--- a/day2-deck/decks/Op Code Variance with Services - Review.pptx
+++ b/day2-deck/decks/Op Code Variance with Services - Review.pptx
@@ -505,7 +505,7 @@
           <a:p>
             <a:r>
               <a:rPr lang="en-US" dirty="0"/>
-              <a:t>Source: Qlik - Closed Repair Orders. Customer pay, Jan-Sep 2026 by close date, op code report basis. Same-store, INEOS excluded (opened 2026). Services short = benchmark x the store's CP ROs, minus the services it sold. Each service valued at the store's own labor + parts gross per service sold (group average where the store sold fewer than 30), capped at twice the group average because some flagged lines carry other work bundled on them. A year = Jan-Sep x 12 / 9. Stores at or above the benchmark are not shown and do not offset anyone. Alignment: every store, gross a year above (+) or below (-) the benchmark at the store's own gross per service. Rate = Jan-Sep closing %. Services = services a year above (+) or below (-) the benchmark (benchmark x CP ROs vs services sold, x 12/9).</a:t>
+              <a:t>Source: Qlik - Closed Repair Orders. Customer pay, Jan-Sep 2026 by close date, op code report basis. Same-store, INEOS excluded (opened 2026). Services short = benchmark x the store's CP ROs, minus the services it sold. Each service valued at the store's own labor + parts gross per service sold (group average where the store sold fewer than 30), capped at twice the group average because some flagged lines carry other work bundled on them. A year = Jan-Sep x 12 / 9. Stores at or above the benchmark are not shown and do not offset anyone. Alignment: every store, gross a year above (+) or below (-) the benchmark at the store's own gross per service. Rate = Jan-Sep closing %. Opcodes = opcodes a year above (+) or below (-) the benchmark (benchmark x CP ROs vs services sold, x 12/9).</a:t>
             </a:r>
             <a:endParaRPr lang="en-US" dirty="0"/>
           </a:p>
@@ -593,7 +593,7 @@
           <a:p>
             <a:r>
               <a:rPr lang="en-US" dirty="0"/>
-              <a:t>Source: Qlik - Closed Repair Orders. Customer pay, Jan-Sep 2026 by close date, op code report basis. Same-store, INEOS excluded (opened 2026). Services short = benchmark x the store's CP ROs, minus the services it sold. Each service valued at the store's own labor + parts gross per service sold (group average where the store sold fewer than 30), capped at twice the group average because some flagged lines carry other work bundled on them. A year = Jan-Sep x 12 / 9. Stores at or above the benchmark are not shown and do not offset anyone. Tire Balance: every store, gross a year above (+) or below (-) the benchmark at the store's own gross per service. Rate = Jan-Sep closing %. Services = services a year above (+) or below (-) the benchmark (benchmark x CP ROs vs services sold, x 12/9).</a:t>
+              <a:t>Source: Qlik - Closed Repair Orders. Customer pay, Jan-Sep 2026 by close date, op code report basis. Same-store, INEOS excluded (opened 2026). Services short = benchmark x the store's CP ROs, minus the services it sold. Each service valued at the store's own labor + parts gross per service sold (group average where the store sold fewer than 30), capped at twice the group average because some flagged lines carry other work bundled on them. A year = Jan-Sep x 12 / 9. Stores at or above the benchmark are not shown and do not offset anyone. Tire Balance: every store, gross a year above (+) or below (-) the benchmark at the store's own gross per service. Rate = Jan-Sep closing %. Opcodes = opcodes a year above (+) or below (-) the benchmark (benchmark x CP ROs vs services sold, x 12/9).</a:t>
             </a:r>
             <a:endParaRPr lang="en-US" dirty="0"/>
           </a:p>
@@ -681,7 +681,7 @@
           <a:p>
             <a:r>
               <a:rPr lang="en-US" dirty="0"/>
-              <a:t>Source: Qlik - Closed Repair Orders. Customer pay, Jan-Sep 2026 by close date, op code report basis. Same-store, INEOS excluded (opened 2026). Services short = benchmark x the store's CP ROs, minus the services it sold. Each service valued at the store's own labor + parts gross per service sold (group average where the store sold fewer than 30), capped at twice the group average because some flagged lines carry other work bundled on them. A year = Jan-Sep x 12 / 9. Stores at or above the benchmark are not shown and do not offset anyone. Brake Fluid: every store, gross a year above (+) or below (-) the benchmark at the store's own gross per service. Rate = Jan-Sep closing %. Services = services a year above (+) or below (-) the benchmark (benchmark x CP ROs vs services sold, x 12/9).</a:t>
+              <a:t>Source: Qlik - Closed Repair Orders. Customer pay, Jan-Sep 2026 by close date, op code report basis. Same-store, INEOS excluded (opened 2026). Services short = benchmark x the store's CP ROs, minus the services it sold. Each service valued at the store's own labor + parts gross per service sold (group average where the store sold fewer than 30), capped at twice the group average because some flagged lines carry other work bundled on them. A year = Jan-Sep x 12 / 9. Stores at or above the benchmark are not shown and do not offset anyone. Brake Fluid: every store, gross a year above (+) or below (-) the benchmark at the store's own gross per service. Rate = Jan-Sep closing %. Opcodes = opcodes a year above (+) or below (-) the benchmark (benchmark x CP ROs vs services sold, x 12/9).</a:t>
             </a:r>
             <a:endParaRPr lang="en-US" dirty="0"/>
           </a:p>
@@ -769,7 +769,7 @@
           <a:p>
             <a:r>
               <a:rPr lang="en-US" dirty="0"/>
-              <a:t>Source: Qlik - Closed Repair Orders. Customer pay, Jan-Sep 2026 by close date, op code report basis. Same-store, INEOS excluded (opened 2026). Services short = benchmark x the store's CP ROs, minus the services it sold. Each service valued at the store's own labor + parts gross per service sold (group average where the store sold fewer than 30), capped at twice the group average because some flagged lines carry other work bundled on them. A year = Jan-Sep x 12 / 9. Stores at or above the benchmark are not shown and do not offset anyone. Fuel System Service: every store, gross a year above (+) or below (-) the benchmark at the store's own gross per service. Rate = Jan-Sep closing %. Services = services a year above (+) or below (-) the benchmark (benchmark x CP ROs vs services sold, x 12/9).</a:t>
+              <a:t>Source: Qlik - Closed Repair Orders. Customer pay, Jan-Sep 2026 by close date, op code report basis. Same-store, INEOS excluded (opened 2026). Services short = benchmark x the store's CP ROs, minus the services it sold. Each service valued at the store's own labor + parts gross per service sold (group average where the store sold fewer than 30), capped at twice the group average because some flagged lines carry other work bundled on them. A year = Jan-Sep x 12 / 9. Stores at or above the benchmark are not shown and do not offset anyone. Fuel System Service: every store, gross a year above (+) or below (-) the benchmark at the store's own gross per service. Rate = Jan-Sep closing %. Opcodes = opcodes a year above (+) or below (-) the benchmark (benchmark x CP ROs vs services sold, x 12/9).</a:t>
             </a:r>
             <a:endParaRPr lang="en-US" dirty="0"/>
           </a:p>
@@ -1371,7 +1371,7 @@
                 <a:ea typeface="Inter" pitchFamily="34" charset="-122"/>
                 <a:cs typeface="Inter" pitchFamily="34" charset="-120"/>
               </a:rPr>
-              <a:t>Services</a:t>
+              <a:t>Opcodes</a:t>
             </a:r>
             <a:endParaRPr lang="en-US" sz="1400" dirty="0"/>
           </a:p>
@@ -1508,7 +1508,7 @@
                 <a:ea typeface="Inter" pitchFamily="34" charset="-122"/>
                 <a:cs typeface="Inter" pitchFamily="34" charset="-120"/>
               </a:rPr>
-              <a:t>Services</a:t>
+              <a:t>Opcodes</a:t>
             </a:r>
             <a:endParaRPr lang="en-US" sz="1400" dirty="0"/>
           </a:p>
@@ -8969,7 +8969,7 @@
                 <a:ea typeface="Inter" pitchFamily="34" charset="-122"/>
                 <a:cs typeface="Inter" pitchFamily="34" charset="-120"/>
               </a:rPr>
-              <a:t>Services</a:t>
+              <a:t>Opcodes</a:t>
             </a:r>
             <a:endParaRPr lang="en-US" sz="1400" dirty="0"/>
           </a:p>
@@ -9106,7 +9106,7 @@
                 <a:ea typeface="Inter" pitchFamily="34" charset="-122"/>
                 <a:cs typeface="Inter" pitchFamily="34" charset="-120"/>
               </a:rPr>
-              <a:t>Services</a:t>
+              <a:t>Opcodes</a:t>
             </a:r>
             <a:endParaRPr lang="en-US" sz="1400" dirty="0"/>
           </a:p>
@@ -16567,7 +16567,7 @@
                 <a:ea typeface="Inter" pitchFamily="34" charset="-122"/>
                 <a:cs typeface="Inter" pitchFamily="34" charset="-120"/>
               </a:rPr>
-              <a:t>Services</a:t>
+              <a:t>Opcodes</a:t>
             </a:r>
             <a:endParaRPr lang="en-US" sz="1400" dirty="0"/>
           </a:p>
@@ -16704,7 +16704,7 @@
                 <a:ea typeface="Inter" pitchFamily="34" charset="-122"/>
                 <a:cs typeface="Inter" pitchFamily="34" charset="-120"/>
               </a:rPr>
-              <a:t>Services</a:t>
+              <a:t>Opcodes</a:t>
             </a:r>
             <a:endParaRPr lang="en-US" sz="1400" dirty="0"/>
           </a:p>
@@ -24165,7 +24165,7 @@
                 <a:ea typeface="Inter" pitchFamily="34" charset="-122"/>
                 <a:cs typeface="Inter" pitchFamily="34" charset="-120"/>
               </a:rPr>
-              <a:t>Services</a:t>
+              <a:t>Opcodes</a:t>
             </a:r>
             <a:endParaRPr lang="en-US" sz="1400" dirty="0"/>
           </a:p>
@@ -24302,7 +24302,7 @@
                 <a:ea typeface="Inter" pitchFamily="34" charset="-122"/>
                 <a:cs typeface="Inter" pitchFamily="34" charset="-120"/>
               </a:rPr>
-              <a:t>Services</a:t>
+              <a:t>Opcodes</a:t>
             </a:r>
             <a:endParaRPr lang="en-US" sz="1400" dirty="0"/>
           </a:p>

--- a/day2-deck/decks/Op Code Variance with Services - Review.pptx
+++ b/day2-deck/decks/Op Code Variance with Services - Review.pptx
@@ -505,7 +505,7 @@
           <a:p>
             <a:r>
               <a:rPr lang="en-US" dirty="0"/>
-              <a:t>Source: Qlik - Closed Repair Orders. Customer pay, Jan-Sep 2026 by close date, op code report basis. Same-store, INEOS excluded (opened 2026). Services short = benchmark x the store's CP ROs, minus the services it sold. Each service valued at the store's own labor + parts gross per service sold (group average where the store sold fewer than 30), capped at twice the group average because some flagged lines carry other work bundled on them. A year = Jan-Sep x 12 / 9. Stores at or above the benchmark are not shown and do not offset anyone. Alignment: every store, gross a year above (+) or below (-) the benchmark at the store's own gross per service. Rate = Jan-Sep closing %; green / red bar = top / bottom three by rate. Opcodes = opcodes a year above (+) or below (-) the benchmark (benchmark x CP ROs vs services sold, x 12/9).</a:t>
+              <a:t>Source: Qlik - Closed Repair Orders. Customer pay, Jan-Sep 2026 by close date, op code report basis. Same-store, INEOS excluded (opened 2026). Services short = benchmark x the store's CP ROs, minus the services it sold. Each service valued at the store's own labor + parts gross per service sold (group average where the store sold fewer than 30), capped at twice the group average because some flagged lines carry other work bundled on them. Alignment: every store, gross Jan-Sep 2026 above (+) or below (-) the benchmark at the store's own gross per service. Rate = Jan-Sep closing %; green / red bar = top / bottom three by rate. Opcodes = opcodes Jan-Sep above (+) or below (-) the benchmark (benchmark x CP ROs vs services sold).</a:t>
             </a:r>
             <a:endParaRPr lang="en-US" dirty="0"/>
           </a:p>
@@ -593,7 +593,7 @@
           <a:p>
             <a:r>
               <a:rPr lang="en-US" dirty="0"/>
-              <a:t>Source: Qlik - Closed Repair Orders. Customer pay, Jan-Sep 2026 by close date, op code report basis. Same-store, INEOS excluded (opened 2026). Services short = benchmark x the store's CP ROs, minus the services it sold. Each service valued at the store's own labor + parts gross per service sold (group average where the store sold fewer than 30), capped at twice the group average because some flagged lines carry other work bundled on them. A year = Jan-Sep x 12 / 9. Stores at or above the benchmark are not shown and do not offset anyone. Tire Balance: every store, gross a year above (+) or below (-) the benchmark at the store's own gross per service. Rate = Jan-Sep closing %; green / red bar = top / bottom three by rate. Opcodes = opcodes a year above (+) or below (-) the benchmark (benchmark x CP ROs vs services sold, x 12/9).</a:t>
+              <a:t>Source: Qlik - Closed Repair Orders. Customer pay, Jan-Sep 2026 by close date, op code report basis. Same-store, INEOS excluded (opened 2026). Services short = benchmark x the store's CP ROs, minus the services it sold. Each service valued at the store's own labor + parts gross per service sold (group average where the store sold fewer than 30), capped at twice the group average because some flagged lines carry other work bundled on them. Tire Balance: every store, gross Jan-Sep 2026 above (+) or below (-) the benchmark at the store's own gross per service. Rate = Jan-Sep closing %; green / red bar = top / bottom three by rate. Gray bar = the manufacturer doesn't call for tire balance at that store (VOLVO, AUDI HENDERSON, VW HENDERSON, AUDI RENO); red = the three lowest after them. Opcodes = opcodes Jan-Sep above (+) or below (-) the benchmark (benchmark x CP ROs vs services sold).</a:t>
             </a:r>
             <a:endParaRPr lang="en-US" dirty="0"/>
           </a:p>
@@ -681,7 +681,7 @@
           <a:p>
             <a:r>
               <a:rPr lang="en-US" dirty="0"/>
-              <a:t>Source: Qlik - Closed Repair Orders. Customer pay, Jan-Sep 2026 by close date, op code report basis. Same-store, INEOS excluded (opened 2026). Services short = benchmark x the store's CP ROs, minus the services it sold. Each service valued at the store's own labor + parts gross per service sold (group average where the store sold fewer than 30), capped at twice the group average because some flagged lines carry other work bundled on them. A year = Jan-Sep x 12 / 9. Stores at or above the benchmark are not shown and do not offset anyone. Brake Fluid: every store, gross a year above (+) or below (-) the benchmark at the store's own gross per service. Rate = Jan-Sep closing %; green / red bar = top / bottom three by rate. Opcodes = opcodes a year above (+) or below (-) the benchmark (benchmark x CP ROs vs services sold, x 12/9).</a:t>
+              <a:t>Source: Qlik - Closed Repair Orders. Customer pay, Jan-Sep 2026 by close date, op code report basis. Same-store, INEOS excluded (opened 2026). Services short = benchmark x the store's CP ROs, minus the services it sold. Each service valued at the store's own labor + parts gross per service sold (group average where the store sold fewer than 30), capped at twice the group average because some flagged lines carry other work bundled on them. Brake Fluid: every store, gross Jan-Sep 2026 above (+) or below (-) the benchmark at the store's own gross per service. Rate = Jan-Sep closing %; green / red bar = top / bottom three by rate. Opcodes = opcodes Jan-Sep above (+) or below (-) the benchmark (benchmark x CP ROs vs services sold).</a:t>
             </a:r>
             <a:endParaRPr lang="en-US" dirty="0"/>
           </a:p>
@@ -769,7 +769,7 @@
           <a:p>
             <a:r>
               <a:rPr lang="en-US" dirty="0"/>
-              <a:t>Source: Qlik - Closed Repair Orders. Customer pay, Jan-Sep 2026 by close date, op code report basis. Same-store, INEOS excluded (opened 2026). Services short = benchmark x the store's CP ROs, minus the services it sold. Each service valued at the store's own labor + parts gross per service sold (group average where the store sold fewer than 30), capped at twice the group average because some flagged lines carry other work bundled on them. A year = Jan-Sep x 12 / 9. Stores at or above the benchmark are not shown and do not offset anyone. Fuel System Service: every store, gross a year above (+) or below (-) the benchmark at the store's own gross per service. Rate = Jan-Sep closing %; green / red bar = top / bottom three by rate. Opcodes = opcodes a year above (+) or below (-) the benchmark (benchmark x CP ROs vs services sold, x 12/9).</a:t>
+              <a:t>Source: Qlik - Closed Repair Orders. Customer pay, Jan-Sep 2026 by close date, op code report basis. Same-store, INEOS excluded (opened 2026). Services short = benchmark x the store's CP ROs, minus the services it sold. Each service valued at the store's own labor + parts gross per service sold (group average where the store sold fewer than 30), capped at twice the group average because some flagged lines carry other work bundled on them. Fuel System Service: every store, gross Jan-Sep 2026 above (+) or below (-) the benchmark at the store's own gross per service. Rate = Jan-Sep closing %; green / red bar = top / bottom three by rate. Opcodes = opcodes Jan-Sep above (+) or below (-) the benchmark (benchmark x CP ROs vs services sold).</a:t>
             </a:r>
             <a:endParaRPr lang="en-US" dirty="0"/>
           </a:p>
@@ -1195,7 +1195,7 @@
                 <a:ea typeface="Inter" pitchFamily="34" charset="-122"/>
                 <a:cs typeface="Inter" pitchFamily="34" charset="-120"/>
               </a:rPr>
-              <a:t>OPCODES · JAN–SEP 2026, ANNUALIZED</a:t>
+              <a:t>OPCODES · JAN–SEP 2026 YTD</a:t>
             </a:r>
             <a:endParaRPr lang="en-US" sz="1400" dirty="0"/>
           </a:p>
@@ -1665,7 +1665,7 @@
                 <a:ea typeface="Inter" pitchFamily="34" charset="-122"/>
                 <a:cs typeface="Inter" pitchFamily="34" charset="-120"/>
               </a:rPr>
-              <a:t>+$229K</a:t>
+              <a:t>+$171K</a:t>
             </a:r>
             <a:endParaRPr lang="en-US" sz="1300" dirty="0"/>
           </a:p>
@@ -1704,7 +1704,7 @@
                 <a:ea typeface="Inter" pitchFamily="34" charset="-122"/>
                 <a:cs typeface="Inter" pitchFamily="34" charset="-120"/>
               </a:rPr>
-              <a:t>+1,896</a:t>
+              <a:t>+1,422</a:t>
             </a:r>
             <a:endParaRPr lang="en-US" sz="1300" dirty="0"/>
           </a:p>
@@ -1880,7 +1880,7 @@
                 <a:ea typeface="Inter" pitchFamily="34" charset="-122"/>
                 <a:cs typeface="Inter" pitchFamily="34" charset="-120"/>
               </a:rPr>
-              <a:t>+$163K</a:t>
+              <a:t>+$123K</a:t>
             </a:r>
             <a:endParaRPr lang="en-US" sz="1300" dirty="0"/>
           </a:p>
@@ -1919,7 +1919,7 @@
                 <a:ea typeface="Inter" pitchFamily="34" charset="-122"/>
                 <a:cs typeface="Inter" pitchFamily="34" charset="-120"/>
               </a:rPr>
-              <a:t>+631</a:t>
+              <a:t>+473</a:t>
             </a:r>
             <a:endParaRPr lang="en-US" sz="1300" dirty="0"/>
           </a:p>
@@ -2115,7 +2115,7 @@
                 <a:ea typeface="Inter" pitchFamily="34" charset="-122"/>
                 <a:cs typeface="Inter" pitchFamily="34" charset="-120"/>
               </a:rPr>
-              <a:t>+$42K</a:t>
+              <a:t>+$31K</a:t>
             </a:r>
             <a:endParaRPr lang="en-US" sz="1300" dirty="0"/>
           </a:p>
@@ -2154,7 +2154,7 @@
                 <a:ea typeface="Inter" pitchFamily="34" charset="-122"/>
                 <a:cs typeface="Inter" pitchFamily="34" charset="-120"/>
               </a:rPr>
-              <a:t>+182</a:t>
+              <a:t>+137</a:t>
             </a:r>
             <a:endParaRPr lang="en-US" sz="1300" dirty="0"/>
           </a:p>
@@ -2350,7 +2350,7 @@
                 <a:ea typeface="Inter" pitchFamily="34" charset="-122"/>
                 <a:cs typeface="Inter" pitchFamily="34" charset="-120"/>
               </a:rPr>
-              <a:t>+$41K</a:t>
+              <a:t>+$31K</a:t>
             </a:r>
             <a:endParaRPr lang="en-US" sz="1300" dirty="0"/>
           </a:p>
@@ -2389,7 +2389,7 @@
                 <a:ea typeface="Inter" pitchFamily="34" charset="-122"/>
                 <a:cs typeface="Inter" pitchFamily="34" charset="-120"/>
               </a:rPr>
-              <a:t>+196</a:t>
+              <a:t>+147</a:t>
             </a:r>
             <a:endParaRPr lang="en-US" sz="1300" dirty="0"/>
           </a:p>
@@ -2585,7 +2585,7 @@
                 <a:ea typeface="Inter" pitchFamily="34" charset="-122"/>
                 <a:cs typeface="Inter" pitchFamily="34" charset="-120"/>
               </a:rPr>
-              <a:t>+$27K</a:t>
+              <a:t>+$20K</a:t>
             </a:r>
             <a:endParaRPr lang="en-US" sz="1300" dirty="0"/>
           </a:p>
@@ -2624,7 +2624,7 @@
                 <a:ea typeface="Inter" pitchFamily="34" charset="-122"/>
                 <a:cs typeface="Inter" pitchFamily="34" charset="-120"/>
               </a:rPr>
-              <a:t>+238</a:t>
+              <a:t>+179</a:t>
             </a:r>
             <a:endParaRPr lang="en-US" sz="1300" dirty="0"/>
           </a:p>
@@ -2800,7 +2800,7 @@
                 <a:ea typeface="Inter" pitchFamily="34" charset="-122"/>
                 <a:cs typeface="Inter" pitchFamily="34" charset="-120"/>
               </a:rPr>
-              <a:t>+$23K</a:t>
+              <a:t>+$18K</a:t>
             </a:r>
             <a:endParaRPr lang="en-US" sz="1300" dirty="0"/>
           </a:p>
@@ -2839,7 +2839,7 @@
                 <a:ea typeface="Inter" pitchFamily="34" charset="-122"/>
                 <a:cs typeface="Inter" pitchFamily="34" charset="-120"/>
               </a:rPr>
-              <a:t>+111</a:t>
+              <a:t>+84</a:t>
             </a:r>
             <a:endParaRPr lang="en-US" sz="1300" dirty="0"/>
           </a:p>
@@ -3015,7 +3015,7 @@
                 <a:ea typeface="Inter" pitchFamily="34" charset="-122"/>
                 <a:cs typeface="Inter" pitchFamily="34" charset="-120"/>
               </a:rPr>
-              <a:t>+$17K</a:t>
+              <a:t>+$13K</a:t>
             </a:r>
             <a:endParaRPr lang="en-US" sz="1300" dirty="0"/>
           </a:p>
@@ -3054,7 +3054,7 @@
                 <a:ea typeface="Inter" pitchFamily="34" charset="-122"/>
                 <a:cs typeface="Inter" pitchFamily="34" charset="-120"/>
               </a:rPr>
-              <a:t>+129</a:t>
+              <a:t>+97</a:t>
             </a:r>
             <a:endParaRPr lang="en-US" sz="1300" dirty="0"/>
           </a:p>
@@ -3230,7 +3230,7 @@
                 <a:ea typeface="Inter" pitchFamily="34" charset="-122"/>
                 <a:cs typeface="Inter" pitchFamily="34" charset="-120"/>
               </a:rPr>
-              <a:t>+$14K</a:t>
+              <a:t>+$11K</a:t>
             </a:r>
             <a:endParaRPr lang="en-US" sz="1300" dirty="0"/>
           </a:p>
@@ -3269,7 +3269,7 @@
                 <a:ea typeface="Inter" pitchFamily="34" charset="-122"/>
                 <a:cs typeface="Inter" pitchFamily="34" charset="-120"/>
               </a:rPr>
-              <a:t>+123</a:t>
+              <a:t>+92</a:t>
             </a:r>
             <a:endParaRPr lang="en-US" sz="1300" dirty="0"/>
           </a:p>
@@ -3445,7 +3445,7 @@
                 <a:ea typeface="Inter" pitchFamily="34" charset="-122"/>
                 <a:cs typeface="Inter" pitchFamily="34" charset="-120"/>
               </a:rPr>
-              <a:t>−$865</a:t>
+              <a:t>−$649</a:t>
             </a:r>
             <a:endParaRPr lang="en-US" sz="1300" dirty="0"/>
           </a:p>
@@ -3484,7 +3484,7 @@
                 <a:ea typeface="Inter" pitchFamily="34" charset="-122"/>
                 <a:cs typeface="Inter" pitchFamily="34" charset="-120"/>
               </a:rPr>
-              <a:t>−7</a:t>
+              <a:t>−5</a:t>
             </a:r>
             <a:endParaRPr lang="en-US" sz="1300" dirty="0"/>
           </a:p>
@@ -3660,7 +3660,7 @@
                 <a:ea typeface="Inter" pitchFamily="34" charset="-122"/>
                 <a:cs typeface="Inter" pitchFamily="34" charset="-120"/>
               </a:rPr>
-              <a:t>−$7K</a:t>
+              <a:t>−$5K</a:t>
             </a:r>
             <a:endParaRPr lang="en-US" sz="1300" dirty="0"/>
           </a:p>
@@ -3699,7 +3699,7 @@
                 <a:ea typeface="Inter" pitchFamily="34" charset="-122"/>
                 <a:cs typeface="Inter" pitchFamily="34" charset="-120"/>
               </a:rPr>
-              <a:t>−51</a:t>
+              <a:t>−38</a:t>
             </a:r>
             <a:endParaRPr lang="en-US" sz="1300" dirty="0"/>
           </a:p>
@@ -3875,7 +3875,7 @@
                 <a:ea typeface="Inter" pitchFamily="34" charset="-122"/>
                 <a:cs typeface="Inter" pitchFamily="34" charset="-120"/>
               </a:rPr>
-              <a:t>−$9K</a:t>
+              <a:t>−$7K</a:t>
             </a:r>
             <a:endParaRPr lang="en-US" sz="1300" dirty="0"/>
           </a:p>
@@ -3914,7 +3914,7 @@
                 <a:ea typeface="Inter" pitchFamily="34" charset="-122"/>
                 <a:cs typeface="Inter" pitchFamily="34" charset="-120"/>
               </a:rPr>
-              <a:t>−79</a:t>
+              <a:t>−60</a:t>
             </a:r>
             <a:endParaRPr lang="en-US" sz="1300" dirty="0"/>
           </a:p>
@@ -4090,7 +4090,7 @@
                 <a:ea typeface="Inter" pitchFamily="34" charset="-122"/>
                 <a:cs typeface="Inter" pitchFamily="34" charset="-120"/>
               </a:rPr>
-              <a:t>−$10K</a:t>
+              <a:t>−$7K</a:t>
             </a:r>
             <a:endParaRPr lang="en-US" sz="1300" dirty="0"/>
           </a:p>
@@ -4129,7 +4129,7 @@
                 <a:ea typeface="Inter" pitchFamily="34" charset="-122"/>
                 <a:cs typeface="Inter" pitchFamily="34" charset="-120"/>
               </a:rPr>
-              <a:t>−83</a:t>
+              <a:t>−63</a:t>
             </a:r>
             <a:endParaRPr lang="en-US" sz="1300" dirty="0"/>
           </a:p>
@@ -4305,7 +4305,7 @@
                 <a:ea typeface="Inter" pitchFamily="34" charset="-122"/>
                 <a:cs typeface="Inter" pitchFamily="34" charset="-120"/>
               </a:rPr>
-              <a:t>−$10K</a:t>
+              <a:t>−$8K</a:t>
             </a:r>
             <a:endParaRPr lang="en-US" sz="1300" dirty="0"/>
           </a:p>
@@ -4344,7 +4344,7 @@
                 <a:ea typeface="Inter" pitchFamily="34" charset="-122"/>
                 <a:cs typeface="Inter" pitchFamily="34" charset="-120"/>
               </a:rPr>
-              <a:t>−40</a:t>
+              <a:t>−30</a:t>
             </a:r>
             <a:endParaRPr lang="en-US" sz="1300" dirty="0"/>
           </a:p>
@@ -4520,7 +4520,7 @@
                 <a:ea typeface="Inter" pitchFamily="34" charset="-122"/>
                 <a:cs typeface="Inter" pitchFamily="34" charset="-120"/>
               </a:rPr>
-              <a:t>−$11K</a:t>
+              <a:t>−$9K</a:t>
             </a:r>
             <a:endParaRPr lang="en-US" sz="1300" dirty="0"/>
           </a:p>
@@ -4559,7 +4559,7 @@
                 <a:ea typeface="Inter" pitchFamily="34" charset="-122"/>
                 <a:cs typeface="Inter" pitchFamily="34" charset="-120"/>
               </a:rPr>
-              <a:t>−135</a:t>
+              <a:t>−101</a:t>
             </a:r>
             <a:endParaRPr lang="en-US" sz="1300" dirty="0"/>
           </a:p>
@@ -4735,7 +4735,7 @@
                 <a:ea typeface="Inter" pitchFamily="34" charset="-122"/>
                 <a:cs typeface="Inter" pitchFamily="34" charset="-120"/>
               </a:rPr>
-              <a:t>−$12K</a:t>
+              <a:t>−$9K</a:t>
             </a:r>
             <a:endParaRPr lang="en-US" sz="1300" dirty="0"/>
           </a:p>
@@ -4774,7 +4774,7 @@
                 <a:ea typeface="Inter" pitchFamily="34" charset="-122"/>
                 <a:cs typeface="Inter" pitchFamily="34" charset="-120"/>
               </a:rPr>
-              <a:t>−165</a:t>
+              <a:t>−124</a:t>
             </a:r>
             <a:endParaRPr lang="en-US" sz="1300" dirty="0"/>
           </a:p>
@@ -4950,7 +4950,7 @@
                 <a:ea typeface="Inter" pitchFamily="34" charset="-122"/>
                 <a:cs typeface="Inter" pitchFamily="34" charset="-120"/>
               </a:rPr>
-              <a:t>−$18K</a:t>
+              <a:t>−$13K</a:t>
             </a:r>
             <a:endParaRPr lang="en-US" sz="1300" dirty="0"/>
           </a:p>
@@ -4989,7 +4989,7 @@
                 <a:ea typeface="Inter" pitchFamily="34" charset="-122"/>
                 <a:cs typeface="Inter" pitchFamily="34" charset="-120"/>
               </a:rPr>
-              <a:t>−240</a:t>
+              <a:t>−180</a:t>
             </a:r>
             <a:endParaRPr lang="en-US" sz="1300" dirty="0"/>
           </a:p>
@@ -5185,7 +5185,7 @@
                 <a:ea typeface="Inter" pitchFamily="34" charset="-122"/>
                 <a:cs typeface="Inter" pitchFamily="34" charset="-120"/>
               </a:rPr>
-              <a:t>−$21K</a:t>
+              <a:t>−$16K</a:t>
             </a:r>
             <a:endParaRPr lang="en-US" sz="1300" dirty="0"/>
           </a:p>
@@ -5224,7 +5224,7 @@
                 <a:ea typeface="Inter" pitchFamily="34" charset="-122"/>
                 <a:cs typeface="Inter" pitchFamily="34" charset="-120"/>
               </a:rPr>
-              <a:t>−210</a:t>
+              <a:t>−158</a:t>
             </a:r>
             <a:endParaRPr lang="en-US" sz="1300" dirty="0"/>
           </a:p>
@@ -5400,7 +5400,7 @@
                 <a:ea typeface="Inter" pitchFamily="34" charset="-122"/>
                 <a:cs typeface="Inter" pitchFamily="34" charset="-120"/>
               </a:rPr>
-              <a:t>−$23K</a:t>
+              <a:t>−$17K</a:t>
             </a:r>
             <a:endParaRPr lang="en-US" sz="1300" dirty="0"/>
           </a:p>
@@ -5439,7 +5439,7 @@
                 <a:ea typeface="Inter" pitchFamily="34" charset="-122"/>
                 <a:cs typeface="Inter" pitchFamily="34" charset="-120"/>
               </a:rPr>
-              <a:t>−291</a:t>
+              <a:t>−218</a:t>
             </a:r>
             <a:endParaRPr lang="en-US" sz="1300" dirty="0"/>
           </a:p>
@@ -5615,7 +5615,7 @@
                 <a:ea typeface="Inter" pitchFamily="34" charset="-122"/>
                 <a:cs typeface="Inter" pitchFamily="34" charset="-120"/>
               </a:rPr>
-              <a:t>−$23K</a:t>
+              <a:t>−$18K</a:t>
             </a:r>
             <a:endParaRPr lang="en-US" sz="1300" dirty="0"/>
           </a:p>
@@ -5654,7 +5654,7 @@
                 <a:ea typeface="Inter" pitchFamily="34" charset="-122"/>
                 <a:cs typeface="Inter" pitchFamily="34" charset="-120"/>
               </a:rPr>
-              <a:t>−96</a:t>
+              <a:t>−72</a:t>
             </a:r>
             <a:endParaRPr lang="en-US" sz="1300" dirty="0"/>
           </a:p>
@@ -5830,7 +5830,7 @@
                 <a:ea typeface="Inter" pitchFamily="34" charset="-122"/>
                 <a:cs typeface="Inter" pitchFamily="34" charset="-120"/>
               </a:rPr>
-              <a:t>−$25K</a:t>
+              <a:t>−$19K</a:t>
             </a:r>
             <a:endParaRPr lang="en-US" sz="1300" dirty="0"/>
           </a:p>
@@ -5869,7 +5869,7 @@
                 <a:ea typeface="Inter" pitchFamily="34" charset="-122"/>
                 <a:cs typeface="Inter" pitchFamily="34" charset="-120"/>
               </a:rPr>
-              <a:t>−324</a:t>
+              <a:t>−243</a:t>
             </a:r>
             <a:endParaRPr lang="en-US" sz="1300" dirty="0"/>
           </a:p>
@@ -6045,7 +6045,7 @@
                 <a:ea typeface="Inter" pitchFamily="34" charset="-122"/>
                 <a:cs typeface="Inter" pitchFamily="34" charset="-120"/>
               </a:rPr>
-              <a:t>−$26K</a:t>
+              <a:t>−$20K</a:t>
             </a:r>
             <a:endParaRPr lang="en-US" sz="1300" dirty="0"/>
           </a:p>
@@ -6084,7 +6084,7 @@
                 <a:ea typeface="Inter" pitchFamily="34" charset="-122"/>
                 <a:cs typeface="Inter" pitchFamily="34" charset="-120"/>
               </a:rPr>
-              <a:t>−230</a:t>
+              <a:t>−173</a:t>
             </a:r>
             <a:endParaRPr lang="en-US" sz="1300" dirty="0"/>
           </a:p>
@@ -6260,7 +6260,7 @@
                 <a:ea typeface="Inter" pitchFamily="34" charset="-122"/>
                 <a:cs typeface="Inter" pitchFamily="34" charset="-120"/>
               </a:rPr>
-              <a:t>−$33K</a:t>
+              <a:t>−$24K</a:t>
             </a:r>
             <a:endParaRPr lang="en-US" sz="1300" dirty="0"/>
           </a:p>
@@ -6299,7 +6299,7 @@
                 <a:ea typeface="Inter" pitchFamily="34" charset="-122"/>
                 <a:cs typeface="Inter" pitchFamily="34" charset="-120"/>
               </a:rPr>
-              <a:t>−221</a:t>
+              <a:t>−166</a:t>
             </a:r>
             <a:endParaRPr lang="en-US" sz="1300" dirty="0"/>
           </a:p>
@@ -6475,7 +6475,7 @@
                 <a:ea typeface="Inter" pitchFamily="34" charset="-122"/>
                 <a:cs typeface="Inter" pitchFamily="34" charset="-120"/>
               </a:rPr>
-              <a:t>−$33K</a:t>
+              <a:t>−$25K</a:t>
             </a:r>
             <a:endParaRPr lang="en-US" sz="1300" dirty="0"/>
           </a:p>
@@ -6514,7 +6514,7 @@
                 <a:ea typeface="Inter" pitchFamily="34" charset="-122"/>
                 <a:cs typeface="Inter" pitchFamily="34" charset="-120"/>
               </a:rPr>
-              <a:t>−326</a:t>
+              <a:t>−245</a:t>
             </a:r>
             <a:endParaRPr lang="en-US" sz="1300" dirty="0"/>
           </a:p>
@@ -6690,7 +6690,7 @@
                 <a:ea typeface="Inter" pitchFamily="34" charset="-122"/>
                 <a:cs typeface="Inter" pitchFamily="34" charset="-120"/>
               </a:rPr>
-              <a:t>−$34K</a:t>
+              <a:t>−$26K</a:t>
             </a:r>
             <a:endParaRPr lang="en-US" sz="1300" dirty="0"/>
           </a:p>
@@ -6729,7 +6729,7 @@
                 <a:ea typeface="Inter" pitchFamily="34" charset="-122"/>
                 <a:cs typeface="Inter" pitchFamily="34" charset="-120"/>
               </a:rPr>
-              <a:t>−149</a:t>
+              <a:t>−112</a:t>
             </a:r>
             <a:endParaRPr lang="en-US" sz="1300" dirty="0"/>
           </a:p>
@@ -6905,7 +6905,7 @@
                 <a:ea typeface="Inter" pitchFamily="34" charset="-122"/>
                 <a:cs typeface="Inter" pitchFamily="34" charset="-120"/>
               </a:rPr>
-              <a:t>−$36K</a:t>
+              <a:t>−$27K</a:t>
             </a:r>
             <a:endParaRPr lang="en-US" sz="1300" dirty="0"/>
           </a:p>
@@ -6944,7 +6944,7 @@
                 <a:ea typeface="Inter" pitchFamily="34" charset="-122"/>
                 <a:cs typeface="Inter" pitchFamily="34" charset="-120"/>
               </a:rPr>
-              <a:t>−294</a:t>
+              <a:t>−221</a:t>
             </a:r>
             <a:endParaRPr lang="en-US" sz="1300" dirty="0"/>
           </a:p>
@@ -7120,7 +7120,7 @@
                 <a:ea typeface="Inter" pitchFamily="34" charset="-122"/>
                 <a:cs typeface="Inter" pitchFamily="34" charset="-120"/>
               </a:rPr>
-              <a:t>−$38K</a:t>
+              <a:t>−$29K</a:t>
             </a:r>
             <a:endParaRPr lang="en-US" sz="1300" dirty="0"/>
           </a:p>
@@ -7159,7 +7159,7 @@
                 <a:ea typeface="Inter" pitchFamily="34" charset="-122"/>
                 <a:cs typeface="Inter" pitchFamily="34" charset="-120"/>
               </a:rPr>
-              <a:t>−365</a:t>
+              <a:t>−274</a:t>
             </a:r>
             <a:endParaRPr lang="en-US" sz="1300" dirty="0"/>
           </a:p>
@@ -7335,7 +7335,7 @@
                 <a:ea typeface="Inter" pitchFamily="34" charset="-122"/>
                 <a:cs typeface="Inter" pitchFamily="34" charset="-120"/>
               </a:rPr>
-              <a:t>−$49K</a:t>
+              <a:t>−$37K</a:t>
             </a:r>
             <a:endParaRPr lang="en-US" sz="1300" dirty="0"/>
           </a:p>
@@ -7374,7 +7374,7 @@
                 <a:ea typeface="Inter" pitchFamily="34" charset="-122"/>
                 <a:cs typeface="Inter" pitchFamily="34" charset="-120"/>
               </a:rPr>
-              <a:t>−478</a:t>
+              <a:t>−359</a:t>
             </a:r>
             <a:endParaRPr lang="en-US" sz="1300" dirty="0"/>
           </a:p>
@@ -7550,7 +7550,7 @@
                 <a:ea typeface="Inter" pitchFamily="34" charset="-122"/>
                 <a:cs typeface="Inter" pitchFamily="34" charset="-120"/>
               </a:rPr>
-              <a:t>−$57K</a:t>
+              <a:t>−$43K</a:t>
             </a:r>
             <a:endParaRPr lang="en-US" sz="1300" dirty="0"/>
           </a:p>
@@ -7589,7 +7589,7 @@
                 <a:ea typeface="Inter" pitchFamily="34" charset="-122"/>
                 <a:cs typeface="Inter" pitchFamily="34" charset="-120"/>
               </a:rPr>
-              <a:t>−770</a:t>
+              <a:t>−578</a:t>
             </a:r>
             <a:endParaRPr lang="en-US" sz="1300" dirty="0"/>
           </a:p>
@@ -7785,7 +7785,7 @@
                 <a:ea typeface="Inter" pitchFamily="34" charset="-122"/>
                 <a:cs typeface="Inter" pitchFamily="34" charset="-120"/>
               </a:rPr>
-              <a:t>−$75K</a:t>
+              <a:t>−$57K</a:t>
             </a:r>
             <a:endParaRPr lang="en-US" sz="1300" dirty="0"/>
           </a:p>
@@ -7824,7 +7824,7 @@
                 <a:ea typeface="Inter" pitchFamily="34" charset="-122"/>
                 <a:cs typeface="Inter" pitchFamily="34" charset="-120"/>
               </a:rPr>
-              <a:t>−556</a:t>
+              <a:t>−417</a:t>
             </a:r>
             <a:endParaRPr lang="en-US" sz="1300" dirty="0"/>
           </a:p>
@@ -8000,7 +8000,7 @@
                 <a:ea typeface="Inter" pitchFamily="34" charset="-122"/>
                 <a:cs typeface="Inter" pitchFamily="34" charset="-120"/>
               </a:rPr>
-              <a:t>−$77K</a:t>
+              <a:t>−$58K</a:t>
             </a:r>
             <a:endParaRPr lang="en-US" sz="1300" dirty="0"/>
           </a:p>
@@ -8039,7 +8039,7 @@
                 <a:ea typeface="Inter" pitchFamily="34" charset="-122"/>
                 <a:cs typeface="Inter" pitchFamily="34" charset="-120"/>
               </a:rPr>
-              <a:t>−568</a:t>
+              <a:t>−426</a:t>
             </a:r>
             <a:endParaRPr lang="en-US" sz="1300" dirty="0"/>
           </a:p>
@@ -8215,7 +8215,7 @@
                 <a:ea typeface="Inter" pitchFamily="34" charset="-122"/>
                 <a:cs typeface="Inter" pitchFamily="34" charset="-120"/>
               </a:rPr>
-              <a:t>−$83K</a:t>
+              <a:t>−$62K</a:t>
             </a:r>
             <a:endParaRPr lang="en-US" sz="1300" dirty="0"/>
           </a:p>
@@ -8254,7 +8254,7 @@
                 <a:ea typeface="Inter" pitchFamily="34" charset="-122"/>
                 <a:cs typeface="Inter" pitchFamily="34" charset="-120"/>
               </a:rPr>
-              <a:t>−700</a:t>
+              <a:t>−525</a:t>
             </a:r>
             <a:endParaRPr lang="en-US" sz="1300" dirty="0"/>
           </a:p>
@@ -8430,7 +8430,7 @@
                 <a:ea typeface="Inter" pitchFamily="34" charset="-122"/>
                 <a:cs typeface="Inter" pitchFamily="34" charset="-120"/>
               </a:rPr>
-              <a:t>−$90K</a:t>
+              <a:t>−$67K</a:t>
             </a:r>
             <a:endParaRPr lang="en-US" sz="1300" dirty="0"/>
           </a:p>
@@ -8469,7 +8469,7 @@
                 <a:ea typeface="Inter" pitchFamily="34" charset="-122"/>
                 <a:cs typeface="Inter" pitchFamily="34" charset="-120"/>
               </a:rPr>
-              <a:t>−1,066</a:t>
+              <a:t>−799</a:t>
             </a:r>
             <a:endParaRPr lang="en-US" sz="1300" dirty="0"/>
           </a:p>
@@ -8645,7 +8645,7 @@
                 <a:ea typeface="Inter" pitchFamily="34" charset="-122"/>
                 <a:cs typeface="Inter" pitchFamily="34" charset="-120"/>
               </a:rPr>
-              <a:t>−$225K</a:t>
+              <a:t>−$169K</a:t>
             </a:r>
             <a:endParaRPr lang="en-US" sz="1300" dirty="0"/>
           </a:p>
@@ -8684,7 +8684,7 @@
                 <a:ea typeface="Inter" pitchFamily="34" charset="-122"/>
                 <a:cs typeface="Inter" pitchFamily="34" charset="-120"/>
               </a:rPr>
-              <a:t>−2,490</a:t>
+              <a:t>−1,867</a:t>
             </a:r>
             <a:endParaRPr lang="en-US" sz="1300" dirty="0"/>
           </a:p>
@@ -8778,7 +8778,7 @@
         <p:spPr>
           <a:xfrm>
             <a:off x="457200" y="6126480"/>
-            <a:ext cx="11274552" cy="341376"/>
+            <a:ext cx="11274552" cy="615696"/>
           </a:xfrm>
           <a:prstGeom prst="rect">
             <a:avLst/>
@@ -8798,7 +8798,7 @@
         <p:spPr>
           <a:xfrm>
             <a:off x="658368" y="6144768"/>
-            <a:ext cx="10927080" cy="304800"/>
+            <a:ext cx="10927080" cy="579120"/>
           </a:xfrm>
           <a:prstGeom prst="rect">
             <a:avLst/>
@@ -8814,7 +8814,7 @@
               <a:buNone/>
             </a:pPr>
             <a:r>
-              <a:rPr lang="en-US" sz="1400" b="1" dirty="0">
+              <a:rPr lang="en-US" sz="1600" b="1" dirty="0">
                 <a:solidFill>
                   <a:srgbClr val="A82B26"/>
                 </a:solidFill>
@@ -8822,9 +8822,9 @@
                 <a:ea typeface="Inter" pitchFamily="34" charset="-122"/>
                 <a:cs typeface="Inter" pitchFamily="34" charset="-120"/>
               </a:rPr>
-              <a:t>25 stores under 15% leave $1,029,276 a year; 8 are at or above it. Toyota Spokane is furthest below at −$225K.</a:t>
-            </a:r>
-            <a:endParaRPr lang="en-US" sz="1400" dirty="0"/>
+              <a:t>25 stores under 15% have left $771,957 so far this year; 8 are at or above it. Toyota Spokane is furthest below at −$169K.</a:t>
+            </a:r>
+            <a:endParaRPr lang="en-US" sz="1600" dirty="0"/>
           </a:p>
         </p:txBody>
       </p:sp>
@@ -8913,7 +8913,7 @@
                 <a:ea typeface="Inter" pitchFamily="34" charset="-122"/>
                 <a:cs typeface="Inter" pitchFamily="34" charset="-120"/>
               </a:rPr>
-              <a:t>OPCODES · JAN–SEP 2026, ANNUALIZED</a:t>
+              <a:t>OPCODES · JAN–SEP 2026 YTD</a:t>
             </a:r>
             <a:endParaRPr lang="en-US" sz="1400" dirty="0"/>
           </a:p>
@@ -9383,7 +9383,7 @@
                 <a:ea typeface="Inter" pitchFamily="34" charset="-122"/>
                 <a:cs typeface="Inter" pitchFamily="34" charset="-120"/>
               </a:rPr>
-              <a:t>+$70K</a:t>
+              <a:t>+$52K</a:t>
             </a:r>
             <a:endParaRPr lang="en-US" sz="1300" dirty="0"/>
           </a:p>
@@ -9422,7 +9422,7 @@
                 <a:ea typeface="Inter" pitchFamily="34" charset="-122"/>
                 <a:cs typeface="Inter" pitchFamily="34" charset="-120"/>
               </a:rPr>
-              <a:t>+1,025</a:t>
+              <a:t>+769</a:t>
             </a:r>
             <a:endParaRPr lang="en-US" sz="1300" dirty="0"/>
           </a:p>
@@ -9618,7 +9618,7 @@
                 <a:ea typeface="Inter" pitchFamily="34" charset="-122"/>
                 <a:cs typeface="Inter" pitchFamily="34" charset="-120"/>
               </a:rPr>
-              <a:t>+$31K</a:t>
+              <a:t>+$23K</a:t>
             </a:r>
             <a:endParaRPr lang="en-US" sz="1300" dirty="0"/>
           </a:p>
@@ -9657,7 +9657,7 @@
                 <a:ea typeface="Inter" pitchFamily="34" charset="-122"/>
                 <a:cs typeface="Inter" pitchFamily="34" charset="-120"/>
               </a:rPr>
-              <a:t>+250</a:t>
+              <a:t>+187</a:t>
             </a:r>
             <a:endParaRPr lang="en-US" sz="1300" dirty="0"/>
           </a:p>
@@ -9853,7 +9853,7 @@
                 <a:ea typeface="Inter" pitchFamily="34" charset="-122"/>
                 <a:cs typeface="Inter" pitchFamily="34" charset="-120"/>
               </a:rPr>
-              <a:t>+$14K</a:t>
+              <a:t>+$10K</a:t>
             </a:r>
             <a:endParaRPr lang="en-US" sz="1300" dirty="0"/>
           </a:p>
@@ -9892,7 +9892,7 @@
                 <a:ea typeface="Inter" pitchFamily="34" charset="-122"/>
                 <a:cs typeface="Inter" pitchFamily="34" charset="-120"/>
               </a:rPr>
-              <a:t>+93</a:t>
+              <a:t>+70</a:t>
             </a:r>
             <a:endParaRPr lang="en-US" sz="1300" dirty="0"/>
           </a:p>
@@ -10088,7 +10088,7 @@
                 <a:ea typeface="Inter" pitchFamily="34" charset="-122"/>
                 <a:cs typeface="Inter" pitchFamily="34" charset="-120"/>
               </a:rPr>
-              <a:t>+$6K</a:t>
+              <a:t>+$4K</a:t>
             </a:r>
             <a:endParaRPr lang="en-US" sz="1300" dirty="0"/>
           </a:p>
@@ -10127,7 +10127,7 @@
                 <a:ea typeface="Inter" pitchFamily="34" charset="-122"/>
                 <a:cs typeface="Inter" pitchFamily="34" charset="-120"/>
               </a:rPr>
-              <a:t>+37</a:t>
+              <a:t>+28</a:t>
             </a:r>
             <a:endParaRPr lang="en-US" sz="1300" dirty="0"/>
           </a:p>
@@ -10303,7 +10303,7 @@
                 <a:ea typeface="Inter" pitchFamily="34" charset="-122"/>
                 <a:cs typeface="Inter" pitchFamily="34" charset="-120"/>
               </a:rPr>
-              <a:t>−$34</a:t>
+              <a:t>−$26</a:t>
             </a:r>
             <a:endParaRPr lang="en-US" sz="1300" dirty="0"/>
           </a:p>
@@ -10518,7 +10518,7 @@
                 <a:ea typeface="Inter" pitchFamily="34" charset="-122"/>
                 <a:cs typeface="Inter" pitchFamily="34" charset="-120"/>
               </a:rPr>
-              <a:t>−$3K</a:t>
+              <a:t>−$2K</a:t>
             </a:r>
             <a:endParaRPr lang="en-US" sz="1300" dirty="0"/>
           </a:p>
@@ -10557,7 +10557,7 @@
                 <a:ea typeface="Inter" pitchFamily="34" charset="-122"/>
                 <a:cs typeface="Inter" pitchFamily="34" charset="-120"/>
               </a:rPr>
-              <a:t>−44</a:t>
+              <a:t>−33</a:t>
             </a:r>
             <a:endParaRPr lang="en-US" sz="1300" dirty="0"/>
           </a:p>
@@ -10733,7 +10733,7 @@
                 <a:ea typeface="Inter" pitchFamily="34" charset="-122"/>
                 <a:cs typeface="Inter" pitchFamily="34" charset="-120"/>
               </a:rPr>
-              <a:t>−$6K</a:t>
+              <a:t>−$4K</a:t>
             </a:r>
             <a:endParaRPr lang="en-US" sz="1300" dirty="0"/>
           </a:p>
@@ -10772,7 +10772,7 @@
                 <a:ea typeface="Inter" pitchFamily="34" charset="-122"/>
                 <a:cs typeface="Inter" pitchFamily="34" charset="-120"/>
               </a:rPr>
-              <a:t>−39</a:t>
+              <a:t>−29</a:t>
             </a:r>
             <a:endParaRPr lang="en-US" sz="1300" dirty="0"/>
           </a:p>
@@ -10948,7 +10948,7 @@
                 <a:ea typeface="Inter" pitchFamily="34" charset="-122"/>
                 <a:cs typeface="Inter" pitchFamily="34" charset="-120"/>
               </a:rPr>
-              <a:t>−$8K</a:t>
+              <a:t>−$6K</a:t>
             </a:r>
             <a:endParaRPr lang="en-US" sz="1300" dirty="0"/>
           </a:p>
@@ -10987,7 +10987,7 @@
                 <a:ea typeface="Inter" pitchFamily="34" charset="-122"/>
                 <a:cs typeface="Inter" pitchFamily="34" charset="-120"/>
               </a:rPr>
-              <a:t>−148</a:t>
+              <a:t>−111</a:t>
             </a:r>
             <a:endParaRPr lang="en-US" sz="1300" dirty="0"/>
           </a:p>
@@ -11034,7 +11034,27 @@
       </p:sp>
       <p:sp>
         <p:nvSpPr>
-          <p:cNvPr id="65" name="Text 63"/>
+          <p:cNvPr id="65" name="Shape 63"/>
+          <p:cNvSpPr/>
+          <p:nvPr/>
+        </p:nvSpPr>
+        <p:spPr>
+          <a:xfrm>
+            <a:off x="5971032" y="3486016"/>
+            <a:ext cx="54864" cy="157062"/>
+          </a:xfrm>
+          <a:prstGeom prst="rect">
+            <a:avLst/>
+          </a:prstGeom>
+          <a:solidFill>
+            <a:srgbClr val="9AA3AD"/>
+          </a:solidFill>
+          <a:ln/>
+        </p:spPr>
+      </p:sp>
+      <p:sp>
+        <p:nvSpPr>
+          <p:cNvPr id="66" name="Text 64"/>
           <p:cNvSpPr txBox="1"/>
           <p:nvPr/>
         </p:nvSpPr>
@@ -11073,7 +11093,7 @@
       </p:sp>
       <p:sp>
         <p:nvSpPr>
-          <p:cNvPr id="66" name="Text 64"/>
+          <p:cNvPr id="67" name="Text 65"/>
           <p:cNvSpPr txBox="1"/>
           <p:nvPr/>
         </p:nvSpPr>
@@ -11112,7 +11132,7 @@
       </p:sp>
       <p:sp>
         <p:nvSpPr>
-          <p:cNvPr id="67" name="Shape 65"/>
+          <p:cNvPr id="68" name="Shape 66"/>
           <p:cNvSpPr/>
           <p:nvPr/>
         </p:nvSpPr>
@@ -11132,7 +11152,7 @@
       </p:sp>
       <p:sp>
         <p:nvSpPr>
-          <p:cNvPr id="68" name="Text 66"/>
+          <p:cNvPr id="69" name="Text 67"/>
           <p:cNvSpPr txBox="1"/>
           <p:nvPr/>
         </p:nvSpPr>
@@ -11163,15 +11183,15 @@
                 <a:ea typeface="Inter" pitchFamily="34" charset="-122"/>
                 <a:cs typeface="Inter" pitchFamily="34" charset="-120"/>
               </a:rPr>
-              <a:t>−$11K</a:t>
-            </a:r>
-            <a:endParaRPr lang="en-US" sz="1300" dirty="0"/>
-          </a:p>
-        </p:txBody>
-      </p:sp>
-      <p:sp>
-        <p:nvSpPr>
-          <p:cNvPr id="69" name="Text 67"/>
+              <a:t>−$8K</a:t>
+            </a:r>
+            <a:endParaRPr lang="en-US" sz="1300" dirty="0"/>
+          </a:p>
+        </p:txBody>
+      </p:sp>
+      <p:sp>
+        <p:nvSpPr>
+          <p:cNvPr id="70" name="Text 68"/>
           <p:cNvSpPr txBox="1"/>
           <p:nvPr/>
         </p:nvSpPr>
@@ -11202,15 +11222,15 @@
                 <a:ea typeface="Inter" pitchFamily="34" charset="-122"/>
                 <a:cs typeface="Inter" pitchFamily="34" charset="-120"/>
               </a:rPr>
-              <a:t>−138</a:t>
-            </a:r>
-            <a:endParaRPr lang="en-US" sz="1300" dirty="0"/>
-          </a:p>
-        </p:txBody>
-      </p:sp>
-      <p:sp>
-        <p:nvSpPr>
-          <p:cNvPr id="70" name="Text 68"/>
+              <a:t>−103</a:t>
+            </a:r>
+            <a:endParaRPr lang="en-US" sz="1300" dirty="0"/>
+          </a:p>
+        </p:txBody>
+      </p:sp>
+      <p:sp>
+        <p:nvSpPr>
+          <p:cNvPr id="71" name="Text 69"/>
           <p:cNvSpPr txBox="1"/>
           <p:nvPr/>
         </p:nvSpPr>
@@ -11249,7 +11269,7 @@
       </p:sp>
       <p:sp>
         <p:nvSpPr>
-          <p:cNvPr id="71" name="Text 69"/>
+          <p:cNvPr id="72" name="Text 70"/>
           <p:cNvSpPr txBox="1"/>
           <p:nvPr/>
         </p:nvSpPr>
@@ -11288,7 +11308,7 @@
       </p:sp>
       <p:sp>
         <p:nvSpPr>
-          <p:cNvPr id="72" name="Text 70"/>
+          <p:cNvPr id="73" name="Text 71"/>
           <p:cNvSpPr txBox="1"/>
           <p:nvPr/>
         </p:nvSpPr>
@@ -11327,7 +11347,7 @@
       </p:sp>
       <p:sp>
         <p:nvSpPr>
-          <p:cNvPr id="73" name="Shape 71"/>
+          <p:cNvPr id="74" name="Shape 72"/>
           <p:cNvSpPr/>
           <p:nvPr/>
         </p:nvSpPr>
@@ -11347,7 +11367,7 @@
       </p:sp>
       <p:sp>
         <p:nvSpPr>
-          <p:cNvPr id="74" name="Text 72"/>
+          <p:cNvPr id="75" name="Text 73"/>
           <p:cNvSpPr txBox="1"/>
           <p:nvPr/>
         </p:nvSpPr>
@@ -11378,15 +11398,15 @@
                 <a:ea typeface="Inter" pitchFamily="34" charset="-122"/>
                 <a:cs typeface="Inter" pitchFamily="34" charset="-120"/>
               </a:rPr>
-              <a:t>−$14K</a:t>
-            </a:r>
-            <a:endParaRPr lang="en-US" sz="1300" dirty="0"/>
-          </a:p>
-        </p:txBody>
-      </p:sp>
-      <p:sp>
-        <p:nvSpPr>
-          <p:cNvPr id="75" name="Text 73"/>
+              <a:t>−$11K</a:t>
+            </a:r>
+            <a:endParaRPr lang="en-US" sz="1300" dirty="0"/>
+          </a:p>
+        </p:txBody>
+      </p:sp>
+      <p:sp>
+        <p:nvSpPr>
+          <p:cNvPr id="76" name="Text 74"/>
           <p:cNvSpPr txBox="1"/>
           <p:nvPr/>
         </p:nvSpPr>
@@ -11417,15 +11437,15 @@
                 <a:ea typeface="Inter" pitchFamily="34" charset="-122"/>
                 <a:cs typeface="Inter" pitchFamily="34" charset="-120"/>
               </a:rPr>
-              <a:t>−643</a:t>
-            </a:r>
-            <a:endParaRPr lang="en-US" sz="1300" dirty="0"/>
-          </a:p>
-        </p:txBody>
-      </p:sp>
-      <p:sp>
-        <p:nvSpPr>
-          <p:cNvPr id="76" name="Text 74"/>
+              <a:t>−483</a:t>
+            </a:r>
+            <a:endParaRPr lang="en-US" sz="1300" dirty="0"/>
+          </a:p>
+        </p:txBody>
+      </p:sp>
+      <p:sp>
+        <p:nvSpPr>
+          <p:cNvPr id="77" name="Text 75"/>
           <p:cNvSpPr txBox="1"/>
           <p:nvPr/>
         </p:nvSpPr>
@@ -11464,7 +11484,7 @@
       </p:sp>
       <p:sp>
         <p:nvSpPr>
-          <p:cNvPr id="77" name="Text 75"/>
+          <p:cNvPr id="78" name="Text 76"/>
           <p:cNvSpPr txBox="1"/>
           <p:nvPr/>
         </p:nvSpPr>
@@ -11503,7 +11523,7 @@
       </p:sp>
       <p:sp>
         <p:nvSpPr>
-          <p:cNvPr id="78" name="Text 76"/>
+          <p:cNvPr id="79" name="Text 77"/>
           <p:cNvSpPr txBox="1"/>
           <p:nvPr/>
         </p:nvSpPr>
@@ -11542,7 +11562,7 @@
       </p:sp>
       <p:sp>
         <p:nvSpPr>
-          <p:cNvPr id="79" name="Shape 77"/>
+          <p:cNvPr id="80" name="Shape 78"/>
           <p:cNvSpPr/>
           <p:nvPr/>
         </p:nvSpPr>
@@ -11562,7 +11582,7 @@
       </p:sp>
       <p:sp>
         <p:nvSpPr>
-          <p:cNvPr id="80" name="Text 78"/>
+          <p:cNvPr id="81" name="Text 79"/>
           <p:cNvSpPr txBox="1"/>
           <p:nvPr/>
         </p:nvSpPr>
@@ -11593,15 +11613,15 @@
                 <a:ea typeface="Inter" pitchFamily="34" charset="-122"/>
                 <a:cs typeface="Inter" pitchFamily="34" charset="-120"/>
               </a:rPr>
-              <a:t>−$18K</a:t>
-            </a:r>
-            <a:endParaRPr lang="en-US" sz="1300" dirty="0"/>
-          </a:p>
-        </p:txBody>
-      </p:sp>
-      <p:sp>
-        <p:nvSpPr>
-          <p:cNvPr id="81" name="Text 79"/>
+              <a:t>−$14K</a:t>
+            </a:r>
+            <a:endParaRPr lang="en-US" sz="1300" dirty="0"/>
+          </a:p>
+        </p:txBody>
+      </p:sp>
+      <p:sp>
+        <p:nvSpPr>
+          <p:cNvPr id="82" name="Text 80"/>
           <p:cNvSpPr txBox="1"/>
           <p:nvPr/>
         </p:nvSpPr>
@@ -11632,15 +11652,15 @@
                 <a:ea typeface="Inter" pitchFamily="34" charset="-122"/>
                 <a:cs typeface="Inter" pitchFamily="34" charset="-120"/>
               </a:rPr>
-              <a:t>−380</a:t>
-            </a:r>
-            <a:endParaRPr lang="en-US" sz="1300" dirty="0"/>
-          </a:p>
-        </p:txBody>
-      </p:sp>
-      <p:sp>
-        <p:nvSpPr>
-          <p:cNvPr id="82" name="Text 80"/>
+              <a:t>−285</a:t>
+            </a:r>
+            <a:endParaRPr lang="en-US" sz="1300" dirty="0"/>
+          </a:p>
+        </p:txBody>
+      </p:sp>
+      <p:sp>
+        <p:nvSpPr>
+          <p:cNvPr id="83" name="Text 81"/>
           <p:cNvSpPr txBox="1"/>
           <p:nvPr/>
         </p:nvSpPr>
@@ -11679,7 +11699,7 @@
       </p:sp>
       <p:sp>
         <p:nvSpPr>
-          <p:cNvPr id="83" name="Text 81"/>
+          <p:cNvPr id="84" name="Text 82"/>
           <p:cNvSpPr txBox="1"/>
           <p:nvPr/>
         </p:nvSpPr>
@@ -11718,7 +11738,7 @@
       </p:sp>
       <p:sp>
         <p:nvSpPr>
-          <p:cNvPr id="84" name="Text 82"/>
+          <p:cNvPr id="85" name="Text 83"/>
           <p:cNvSpPr txBox="1"/>
           <p:nvPr/>
         </p:nvSpPr>
@@ -11757,7 +11777,7 @@
       </p:sp>
       <p:sp>
         <p:nvSpPr>
-          <p:cNvPr id="85" name="Shape 83"/>
+          <p:cNvPr id="86" name="Shape 84"/>
           <p:cNvSpPr/>
           <p:nvPr/>
         </p:nvSpPr>
@@ -11777,7 +11797,7 @@
       </p:sp>
       <p:sp>
         <p:nvSpPr>
-          <p:cNvPr id="86" name="Text 84"/>
+          <p:cNvPr id="87" name="Text 85"/>
           <p:cNvSpPr txBox="1"/>
           <p:nvPr/>
         </p:nvSpPr>
@@ -11808,15 +11828,15 @@
                 <a:ea typeface="Inter" pitchFamily="34" charset="-122"/>
                 <a:cs typeface="Inter" pitchFamily="34" charset="-120"/>
               </a:rPr>
-              <a:t>−$21K</a:t>
-            </a:r>
-            <a:endParaRPr lang="en-US" sz="1300" dirty="0"/>
-          </a:p>
-        </p:txBody>
-      </p:sp>
-      <p:sp>
-        <p:nvSpPr>
-          <p:cNvPr id="87" name="Text 85"/>
+              <a:t>−$16K</a:t>
+            </a:r>
+            <a:endParaRPr lang="en-US" sz="1300" dirty="0"/>
+          </a:p>
+        </p:txBody>
+      </p:sp>
+      <p:sp>
+        <p:nvSpPr>
+          <p:cNvPr id="88" name="Text 86"/>
           <p:cNvSpPr txBox="1"/>
           <p:nvPr/>
         </p:nvSpPr>
@@ -11847,15 +11867,15 @@
                 <a:ea typeface="Inter" pitchFamily="34" charset="-122"/>
                 <a:cs typeface="Inter" pitchFamily="34" charset="-120"/>
               </a:rPr>
-              <a:t>−496</a:t>
-            </a:r>
-            <a:endParaRPr lang="en-US" sz="1300" dirty="0"/>
-          </a:p>
-        </p:txBody>
-      </p:sp>
-      <p:sp>
-        <p:nvSpPr>
-          <p:cNvPr id="88" name="Text 86"/>
+              <a:t>−372</a:t>
+            </a:r>
+            <a:endParaRPr lang="en-US" sz="1300" dirty="0"/>
+          </a:p>
+        </p:txBody>
+      </p:sp>
+      <p:sp>
+        <p:nvSpPr>
+          <p:cNvPr id="89" name="Text 87"/>
           <p:cNvSpPr txBox="1"/>
           <p:nvPr/>
         </p:nvSpPr>
@@ -11894,7 +11914,7 @@
       </p:sp>
       <p:sp>
         <p:nvSpPr>
-          <p:cNvPr id="89" name="Text 87"/>
+          <p:cNvPr id="90" name="Text 88"/>
           <p:cNvSpPr txBox="1"/>
           <p:nvPr/>
         </p:nvSpPr>
@@ -11933,7 +11953,7 @@
       </p:sp>
       <p:sp>
         <p:nvSpPr>
-          <p:cNvPr id="90" name="Text 88"/>
+          <p:cNvPr id="91" name="Text 89"/>
           <p:cNvSpPr txBox="1"/>
           <p:nvPr/>
         </p:nvSpPr>
@@ -11972,7 +11992,7 @@
       </p:sp>
       <p:sp>
         <p:nvSpPr>
-          <p:cNvPr id="91" name="Shape 89"/>
+          <p:cNvPr id="92" name="Shape 90"/>
           <p:cNvSpPr/>
           <p:nvPr/>
         </p:nvSpPr>
@@ -11992,7 +12012,7 @@
       </p:sp>
       <p:sp>
         <p:nvSpPr>
-          <p:cNvPr id="92" name="Text 90"/>
+          <p:cNvPr id="93" name="Text 91"/>
           <p:cNvSpPr txBox="1"/>
           <p:nvPr/>
         </p:nvSpPr>
@@ -12023,15 +12043,15 @@
                 <a:ea typeface="Inter" pitchFamily="34" charset="-122"/>
                 <a:cs typeface="Inter" pitchFamily="34" charset="-120"/>
               </a:rPr>
-              <a:t>−$27K</a:t>
-            </a:r>
-            <a:endParaRPr lang="en-US" sz="1300" dirty="0"/>
-          </a:p>
-        </p:txBody>
-      </p:sp>
-      <p:sp>
-        <p:nvSpPr>
-          <p:cNvPr id="93" name="Text 91"/>
+              <a:t>−$20K</a:t>
+            </a:r>
+            <a:endParaRPr lang="en-US" sz="1300" dirty="0"/>
+          </a:p>
+        </p:txBody>
+      </p:sp>
+      <p:sp>
+        <p:nvSpPr>
+          <p:cNvPr id="94" name="Text 92"/>
           <p:cNvSpPr txBox="1"/>
           <p:nvPr/>
         </p:nvSpPr>
@@ -12062,15 +12082,15 @@
                 <a:ea typeface="Inter" pitchFamily="34" charset="-122"/>
                 <a:cs typeface="Inter" pitchFamily="34" charset="-120"/>
               </a:rPr>
-              <a:t>−300</a:t>
-            </a:r>
-            <a:endParaRPr lang="en-US" sz="1300" dirty="0"/>
-          </a:p>
-        </p:txBody>
-      </p:sp>
-      <p:sp>
-        <p:nvSpPr>
-          <p:cNvPr id="94" name="Text 92"/>
+              <a:t>−225</a:t>
+            </a:r>
+            <a:endParaRPr lang="en-US" sz="1300" dirty="0"/>
+          </a:p>
+        </p:txBody>
+      </p:sp>
+      <p:sp>
+        <p:nvSpPr>
+          <p:cNvPr id="95" name="Text 93"/>
           <p:cNvSpPr txBox="1"/>
           <p:nvPr/>
         </p:nvSpPr>
@@ -12109,7 +12129,7 @@
       </p:sp>
       <p:sp>
         <p:nvSpPr>
-          <p:cNvPr id="95" name="Text 93"/>
+          <p:cNvPr id="96" name="Text 94"/>
           <p:cNvSpPr txBox="1"/>
           <p:nvPr/>
         </p:nvSpPr>
@@ -12148,7 +12168,7 @@
       </p:sp>
       <p:sp>
         <p:nvSpPr>
-          <p:cNvPr id="96" name="Text 94"/>
+          <p:cNvPr id="97" name="Text 95"/>
           <p:cNvSpPr txBox="1"/>
           <p:nvPr/>
         </p:nvSpPr>
@@ -12187,7 +12207,7 @@
       </p:sp>
       <p:sp>
         <p:nvSpPr>
-          <p:cNvPr id="97" name="Shape 95"/>
+          <p:cNvPr id="98" name="Shape 96"/>
           <p:cNvSpPr/>
           <p:nvPr/>
         </p:nvSpPr>
@@ -12207,7 +12227,7 @@
       </p:sp>
       <p:sp>
         <p:nvSpPr>
-          <p:cNvPr id="98" name="Text 96"/>
+          <p:cNvPr id="99" name="Text 97"/>
           <p:cNvSpPr txBox="1"/>
           <p:nvPr/>
         </p:nvSpPr>
@@ -12238,15 +12258,15 @@
                 <a:ea typeface="Inter" pitchFamily="34" charset="-122"/>
                 <a:cs typeface="Inter" pitchFamily="34" charset="-120"/>
               </a:rPr>
-              <a:t>−$27K</a:t>
-            </a:r>
-            <a:endParaRPr lang="en-US" sz="1300" dirty="0"/>
-          </a:p>
-        </p:txBody>
-      </p:sp>
-      <p:sp>
-        <p:nvSpPr>
-          <p:cNvPr id="99" name="Text 97"/>
+              <a:t>−$21K</a:t>
+            </a:r>
+            <a:endParaRPr lang="en-US" sz="1300" dirty="0"/>
+          </a:p>
+        </p:txBody>
+      </p:sp>
+      <p:sp>
+        <p:nvSpPr>
+          <p:cNvPr id="100" name="Text 98"/>
           <p:cNvSpPr txBox="1"/>
           <p:nvPr/>
         </p:nvSpPr>
@@ -12277,15 +12297,15 @@
                 <a:ea typeface="Inter" pitchFamily="34" charset="-122"/>
                 <a:cs typeface="Inter" pitchFamily="34" charset="-120"/>
               </a:rPr>
-              <a:t>−460</a:t>
-            </a:r>
-            <a:endParaRPr lang="en-US" sz="1300" dirty="0"/>
-          </a:p>
-        </p:txBody>
-      </p:sp>
-      <p:sp>
-        <p:nvSpPr>
-          <p:cNvPr id="100" name="Text 98"/>
+              <a:t>−345</a:t>
+            </a:r>
+            <a:endParaRPr lang="en-US" sz="1300" dirty="0"/>
+          </a:p>
+        </p:txBody>
+      </p:sp>
+      <p:sp>
+        <p:nvSpPr>
+          <p:cNvPr id="101" name="Text 99"/>
           <p:cNvSpPr txBox="1"/>
           <p:nvPr/>
         </p:nvSpPr>
@@ -12324,7 +12344,27 @@
       </p:sp>
       <p:sp>
         <p:nvSpPr>
-          <p:cNvPr id="101" name="Text 99"/>
+          <p:cNvPr id="102" name="Shape 100"/>
+          <p:cNvSpPr/>
+          <p:nvPr/>
+        </p:nvSpPr>
+        <p:spPr>
+          <a:xfrm>
+            <a:off x="5971032" y="4977025"/>
+            <a:ext cx="54864" cy="157062"/>
+          </a:xfrm>
+          <a:prstGeom prst="rect">
+            <a:avLst/>
+          </a:prstGeom>
+          <a:solidFill>
+            <a:srgbClr val="9AA3AD"/>
+          </a:solidFill>
+          <a:ln/>
+        </p:spPr>
+      </p:sp>
+      <p:sp>
+        <p:nvSpPr>
+          <p:cNvPr id="103" name="Text 101"/>
           <p:cNvSpPr txBox="1"/>
           <p:nvPr/>
         </p:nvSpPr>
@@ -12363,7 +12403,7 @@
       </p:sp>
       <p:sp>
         <p:nvSpPr>
-          <p:cNvPr id="102" name="Text 100"/>
+          <p:cNvPr id="104" name="Text 102"/>
           <p:cNvSpPr txBox="1"/>
           <p:nvPr/>
         </p:nvSpPr>
@@ -12402,7 +12442,7 @@
       </p:sp>
       <p:sp>
         <p:nvSpPr>
-          <p:cNvPr id="103" name="Shape 101"/>
+          <p:cNvPr id="105" name="Shape 103"/>
           <p:cNvSpPr/>
           <p:nvPr/>
         </p:nvSpPr>
@@ -12422,7 +12462,7 @@
       </p:sp>
       <p:sp>
         <p:nvSpPr>
-          <p:cNvPr id="104" name="Text 102"/>
+          <p:cNvPr id="106" name="Text 104"/>
           <p:cNvSpPr txBox="1"/>
           <p:nvPr/>
         </p:nvSpPr>
@@ -12453,15 +12493,15 @@
                 <a:ea typeface="Inter" pitchFamily="34" charset="-122"/>
                 <a:cs typeface="Inter" pitchFamily="34" charset="-120"/>
               </a:rPr>
-              <a:t>−$28K</a:t>
-            </a:r>
-            <a:endParaRPr lang="en-US" sz="1300" dirty="0"/>
-          </a:p>
-        </p:txBody>
-      </p:sp>
-      <p:sp>
-        <p:nvSpPr>
-          <p:cNvPr id="105" name="Text 103"/>
+              <a:t>−$21K</a:t>
+            </a:r>
+            <a:endParaRPr lang="en-US" sz="1300" dirty="0"/>
+          </a:p>
+        </p:txBody>
+      </p:sp>
+      <p:sp>
+        <p:nvSpPr>
+          <p:cNvPr id="107" name="Text 105"/>
           <p:cNvSpPr txBox="1"/>
           <p:nvPr/>
         </p:nvSpPr>
@@ -12492,15 +12532,15 @@
                 <a:ea typeface="Inter" pitchFamily="34" charset="-122"/>
                 <a:cs typeface="Inter" pitchFamily="34" charset="-120"/>
               </a:rPr>
-              <a:t>−373</a:t>
-            </a:r>
-            <a:endParaRPr lang="en-US" sz="1300" dirty="0"/>
-          </a:p>
-        </p:txBody>
-      </p:sp>
-      <p:sp>
-        <p:nvSpPr>
-          <p:cNvPr id="106" name="Text 104"/>
+              <a:t>−280</a:t>
+            </a:r>
+            <a:endParaRPr lang="en-US" sz="1300" dirty="0"/>
+          </a:p>
+        </p:txBody>
+      </p:sp>
+      <p:sp>
+        <p:nvSpPr>
+          <p:cNvPr id="108" name="Text 106"/>
           <p:cNvSpPr txBox="1"/>
           <p:nvPr/>
         </p:nvSpPr>
@@ -12539,92 +12579,14 @@
       </p:sp>
       <p:sp>
         <p:nvSpPr>
-          <p:cNvPr id="107" name="Text 105"/>
-          <p:cNvSpPr txBox="1"/>
-          <p:nvPr/>
-        </p:nvSpPr>
-        <p:spPr>
-          <a:xfrm>
-            <a:off x="658368" y="5428309"/>
-            <a:ext cx="310896" cy="248502"/>
-          </a:xfrm>
-          <a:prstGeom prst="rect">
-            <a:avLst/>
-          </a:prstGeom>
-          <a:noFill/>
-          <a:ln/>
-        </p:spPr>
-        <p:txBody>
-          <a:bodyPr wrap="square" lIns="0" tIns="0" rIns="0" bIns="0" rtlCol="0" anchor="ctr"/>
-          <a:lstStyle/>
-          <a:p>
-            <a:pPr algn="r" indent="0" marL="0">
-              <a:buNone/>
-            </a:pPr>
-            <a:r>
-              <a:rPr lang="en-US" sz="1200" dirty="0">
-                <a:solidFill>
-                  <a:srgbClr val="9AA3AD"/>
-                </a:solidFill>
-                <a:latin typeface="Inter" pitchFamily="34" charset="0"/>
-                <a:ea typeface="Inter" pitchFamily="34" charset="-122"/>
-                <a:cs typeface="Inter" pitchFamily="34" charset="-120"/>
-              </a:rPr>
-              <a:t>16</a:t>
-            </a:r>
-            <a:endParaRPr lang="en-US" sz="1200" dirty="0"/>
-          </a:p>
-        </p:txBody>
-      </p:sp>
-      <p:sp>
-        <p:nvSpPr>
-          <p:cNvPr id="108" name="Text 106"/>
-          <p:cNvSpPr txBox="1"/>
-          <p:nvPr/>
-        </p:nvSpPr>
-        <p:spPr>
-          <a:xfrm>
-            <a:off x="1014984" y="5428309"/>
-            <a:ext cx="1783080" cy="248502"/>
-          </a:xfrm>
-          <a:prstGeom prst="rect">
-            <a:avLst/>
-          </a:prstGeom>
-          <a:noFill/>
-          <a:ln/>
-        </p:spPr>
-        <p:txBody>
-          <a:bodyPr wrap="square" lIns="0" tIns="0" rIns="0" bIns="0" rtlCol="0" anchor="ctr"/>
-          <a:lstStyle/>
-          <a:p>
-            <a:pPr indent="0" marL="0">
-              <a:buNone/>
-            </a:pPr>
-            <a:r>
-              <a:rPr lang="en-US" sz="1200" dirty="0">
-                <a:solidFill>
-                  <a:srgbClr val="1A1A1A"/>
-                </a:solidFill>
-                <a:latin typeface="Inter" pitchFamily="34" charset="0"/>
-                <a:ea typeface="Inter" pitchFamily="34" charset="-122"/>
-                <a:cs typeface="Inter" pitchFamily="34" charset="-120"/>
-              </a:rPr>
-              <a:t>LINCOLN</a:t>
-            </a:r>
-            <a:endParaRPr lang="en-US" sz="1200" dirty="0"/>
-          </a:p>
-        </p:txBody>
-      </p:sp>
-      <p:sp>
-        <p:nvSpPr>
           <p:cNvPr id="109" name="Shape 107"/>
           <p:cNvSpPr/>
           <p:nvPr/>
         </p:nvSpPr>
         <p:spPr>
           <a:xfrm>
-            <a:off x="3154916" y="5484222"/>
-            <a:ext cx="58766" cy="136676"/>
+            <a:off x="5971032" y="5225527"/>
+            <a:ext cx="54864" cy="157062"/>
           </a:xfrm>
           <a:prstGeom prst="rect">
             <a:avLst/>
@@ -12643,34 +12605,34 @@
         </p:nvSpPr>
         <p:spPr>
           <a:xfrm>
-            <a:off x="3401568" y="5428309"/>
-            <a:ext cx="1005840" cy="248502"/>
-          </a:xfrm>
-          <a:prstGeom prst="rect">
-            <a:avLst/>
-          </a:prstGeom>
-          <a:noFill/>
-          <a:ln/>
-        </p:spPr>
-        <p:txBody>
-          <a:bodyPr wrap="square" lIns="0" tIns="0" rIns="0" bIns="0" rtlCol="0" anchor="ctr"/>
-          <a:lstStyle/>
-          <a:p>
-            <a:pPr algn="r" indent="0" marL="0">
-              <a:buNone/>
-            </a:pPr>
-            <a:r>
-              <a:rPr lang="en-US" sz="1300" b="1" dirty="0">
-                <a:solidFill>
-                  <a:srgbClr val="A82B26"/>
-                </a:solidFill>
-                <a:latin typeface="Inter" pitchFamily="34" charset="0"/>
-                <a:ea typeface="Inter" pitchFamily="34" charset="-122"/>
-                <a:cs typeface="Inter" pitchFamily="34" charset="-120"/>
-              </a:rPr>
-              <a:t>−$31K</a:t>
-            </a:r>
-            <a:endParaRPr lang="en-US" sz="1300" dirty="0"/>
+            <a:off x="658368" y="5428309"/>
+            <a:ext cx="310896" cy="248502"/>
+          </a:xfrm>
+          <a:prstGeom prst="rect">
+            <a:avLst/>
+          </a:prstGeom>
+          <a:noFill/>
+          <a:ln/>
+        </p:spPr>
+        <p:txBody>
+          <a:bodyPr wrap="square" lIns="0" tIns="0" rIns="0" bIns="0" rtlCol="0" anchor="ctr"/>
+          <a:lstStyle/>
+          <a:p>
+            <a:pPr algn="r" indent="0" marL="0">
+              <a:buNone/>
+            </a:pPr>
+            <a:r>
+              <a:rPr lang="en-US" sz="1200" dirty="0">
+                <a:solidFill>
+                  <a:srgbClr val="9AA3AD"/>
+                </a:solidFill>
+                <a:latin typeface="Inter" pitchFamily="34" charset="0"/>
+                <a:ea typeface="Inter" pitchFamily="34" charset="-122"/>
+                <a:cs typeface="Inter" pitchFamily="34" charset="-120"/>
+              </a:rPr>
+              <a:t>16</a:t>
+            </a:r>
+            <a:endParaRPr lang="en-US" sz="1200" dirty="0"/>
           </a:p>
         </p:txBody>
       </p:sp>
@@ -12682,110 +12644,32 @@
         </p:nvSpPr>
         <p:spPr>
           <a:xfrm>
-            <a:off x="4407408" y="5428309"/>
-            <a:ext cx="868680" cy="248502"/>
-          </a:xfrm>
-          <a:prstGeom prst="rect">
-            <a:avLst/>
-          </a:prstGeom>
-          <a:noFill/>
-          <a:ln/>
-        </p:spPr>
-        <p:txBody>
-          <a:bodyPr wrap="square" lIns="0" tIns="0" rIns="0" bIns="0" rtlCol="0" anchor="ctr"/>
-          <a:lstStyle/>
-          <a:p>
-            <a:pPr algn="r" indent="0" marL="0">
-              <a:buNone/>
-            </a:pPr>
-            <a:r>
-              <a:rPr lang="en-US" sz="1300" dirty="0">
-                <a:solidFill>
-                  <a:srgbClr val="595959"/>
-                </a:solidFill>
-                <a:latin typeface="Inter" pitchFamily="34" charset="0"/>
-                <a:ea typeface="Inter" pitchFamily="34" charset="-122"/>
-                <a:cs typeface="Inter" pitchFamily="34" charset="-120"/>
-              </a:rPr>
-              <a:t>−467</a:t>
-            </a:r>
-            <a:endParaRPr lang="en-US" sz="1300" dirty="0"/>
-          </a:p>
-        </p:txBody>
-      </p:sp>
-      <p:sp>
-        <p:nvSpPr>
-          <p:cNvPr id="112" name="Text 110"/>
-          <p:cNvSpPr txBox="1"/>
-          <p:nvPr/>
-        </p:nvSpPr>
-        <p:spPr>
-          <a:xfrm>
-            <a:off x="5276088" y="5428309"/>
-            <a:ext cx="640080" cy="248502"/>
-          </a:xfrm>
-          <a:prstGeom prst="rect">
-            <a:avLst/>
-          </a:prstGeom>
-          <a:noFill/>
-          <a:ln/>
-        </p:spPr>
-        <p:txBody>
-          <a:bodyPr wrap="square" lIns="0" tIns="0" rIns="0" bIns="0" rtlCol="0" anchor="ctr"/>
-          <a:lstStyle/>
-          <a:p>
-            <a:pPr algn="r" indent="0" marL="0">
-              <a:buNone/>
-            </a:pPr>
-            <a:r>
-              <a:rPr lang="en-US" sz="1300" dirty="0">
-                <a:solidFill>
-                  <a:srgbClr val="595959"/>
-                </a:solidFill>
-                <a:latin typeface="Inter" pitchFamily="34" charset="0"/>
-                <a:ea typeface="Inter" pitchFamily="34" charset="-122"/>
-                <a:cs typeface="Inter" pitchFamily="34" charset="-120"/>
-              </a:rPr>
-              <a:t>1.6%</a:t>
-            </a:r>
-            <a:endParaRPr lang="en-US" sz="1300" dirty="0"/>
-          </a:p>
-        </p:txBody>
-      </p:sp>
-      <p:sp>
-        <p:nvSpPr>
-          <p:cNvPr id="113" name="Text 111"/>
-          <p:cNvSpPr txBox="1"/>
-          <p:nvPr/>
-        </p:nvSpPr>
-        <p:spPr>
-          <a:xfrm>
-            <a:off x="658368" y="5676810"/>
-            <a:ext cx="310896" cy="248502"/>
-          </a:xfrm>
-          <a:prstGeom prst="rect">
-            <a:avLst/>
-          </a:prstGeom>
-          <a:noFill/>
-          <a:ln/>
-        </p:spPr>
-        <p:txBody>
-          <a:bodyPr wrap="square" lIns="0" tIns="0" rIns="0" bIns="0" rtlCol="0" anchor="ctr"/>
-          <a:lstStyle/>
-          <a:p>
-            <a:pPr algn="r" indent="0" marL="0">
+            <a:off x="1014984" y="5428309"/>
+            <a:ext cx="1783080" cy="248502"/>
+          </a:xfrm>
+          <a:prstGeom prst="rect">
+            <a:avLst/>
+          </a:prstGeom>
+          <a:noFill/>
+          <a:ln/>
+        </p:spPr>
+        <p:txBody>
+          <a:bodyPr wrap="square" lIns="0" tIns="0" rIns="0" bIns="0" rtlCol="0" anchor="ctr"/>
+          <a:lstStyle/>
+          <a:p>
+            <a:pPr indent="0" marL="0">
               <a:buNone/>
             </a:pPr>
             <a:r>
               <a:rPr lang="en-US" sz="1200" dirty="0">
                 <a:solidFill>
-                  <a:srgbClr val="9AA3AD"/>
-                </a:solidFill>
-                <a:latin typeface="Inter" pitchFamily="34" charset="0"/>
-                <a:ea typeface="Inter" pitchFamily="34" charset="-122"/>
-                <a:cs typeface="Inter" pitchFamily="34" charset="-120"/>
-              </a:rPr>
-              <a:t>17</a:t>
+                  <a:srgbClr val="1A1A1A"/>
+                </a:solidFill>
+                <a:latin typeface="Inter" pitchFamily="34" charset="0"/>
+                <a:ea typeface="Inter" pitchFamily="34" charset="-122"/>
+                <a:cs typeface="Inter" pitchFamily="34" charset="-120"/>
+              </a:rPr>
+              <a:t>LINCOLN</a:t>
             </a:r>
             <a:endParaRPr lang="en-US" sz="1200" dirty="0"/>
           </a:p>
@@ -12793,53 +12677,14 @@
       </p:sp>
       <p:sp>
         <p:nvSpPr>
-          <p:cNvPr id="114" name="Text 112"/>
-          <p:cNvSpPr txBox="1"/>
-          <p:nvPr/>
-        </p:nvSpPr>
-        <p:spPr>
-          <a:xfrm>
-            <a:off x="1014984" y="5676810"/>
-            <a:ext cx="1783080" cy="248502"/>
-          </a:xfrm>
-          <a:prstGeom prst="rect">
-            <a:avLst/>
-          </a:prstGeom>
-          <a:noFill/>
-          <a:ln/>
-        </p:spPr>
-        <p:txBody>
-          <a:bodyPr wrap="square" lIns="0" tIns="0" rIns="0" bIns="0" rtlCol="0" anchor="ctr"/>
-          <a:lstStyle/>
-          <a:p>
-            <a:pPr indent="0" marL="0">
-              <a:buNone/>
-            </a:pPr>
-            <a:r>
-              <a:rPr lang="en-US" sz="1200" dirty="0">
-                <a:solidFill>
-                  <a:srgbClr val="1A1A1A"/>
-                </a:solidFill>
-                <a:latin typeface="Inter" pitchFamily="34" charset="0"/>
-                <a:ea typeface="Inter" pitchFamily="34" charset="-122"/>
-                <a:cs typeface="Inter" pitchFamily="34" charset="-120"/>
-              </a:rPr>
-              <a:t>HYUNDAI ST GEORGE</a:t>
-            </a:r>
-            <a:endParaRPr lang="en-US" sz="1200" dirty="0"/>
-          </a:p>
-        </p:txBody>
-      </p:sp>
-      <p:sp>
-        <p:nvSpPr>
-          <p:cNvPr id="115" name="Shape 113"/>
+          <p:cNvPr id="112" name="Shape 110"/>
           <p:cNvSpPr/>
           <p:nvPr/>
         </p:nvSpPr>
         <p:spPr>
           <a:xfrm>
-            <a:off x="3145678" y="5732723"/>
-            <a:ext cx="68004" cy="136676"/>
+            <a:off x="3154916" y="5484222"/>
+            <a:ext cx="58766" cy="136676"/>
           </a:xfrm>
           <a:prstGeom prst="rect">
             <a:avLst/>
@@ -12852,40 +12697,157 @@
       </p:sp>
       <p:sp>
         <p:nvSpPr>
+          <p:cNvPr id="113" name="Text 111"/>
+          <p:cNvSpPr txBox="1"/>
+          <p:nvPr/>
+        </p:nvSpPr>
+        <p:spPr>
+          <a:xfrm>
+            <a:off x="3401568" y="5428309"/>
+            <a:ext cx="1005840" cy="248502"/>
+          </a:xfrm>
+          <a:prstGeom prst="rect">
+            <a:avLst/>
+          </a:prstGeom>
+          <a:noFill/>
+          <a:ln/>
+        </p:spPr>
+        <p:txBody>
+          <a:bodyPr wrap="square" lIns="0" tIns="0" rIns="0" bIns="0" rtlCol="0" anchor="ctr"/>
+          <a:lstStyle/>
+          <a:p>
+            <a:pPr algn="r" indent="0" marL="0">
+              <a:buNone/>
+            </a:pPr>
+            <a:r>
+              <a:rPr lang="en-US" sz="1300" b="1" dirty="0">
+                <a:solidFill>
+                  <a:srgbClr val="A82B26"/>
+                </a:solidFill>
+                <a:latin typeface="Inter" pitchFamily="34" charset="0"/>
+                <a:ea typeface="Inter" pitchFamily="34" charset="-122"/>
+                <a:cs typeface="Inter" pitchFamily="34" charset="-120"/>
+              </a:rPr>
+              <a:t>−$23K</a:t>
+            </a:r>
+            <a:endParaRPr lang="en-US" sz="1300" dirty="0"/>
+          </a:p>
+        </p:txBody>
+      </p:sp>
+      <p:sp>
+        <p:nvSpPr>
+          <p:cNvPr id="114" name="Text 112"/>
+          <p:cNvSpPr txBox="1"/>
+          <p:nvPr/>
+        </p:nvSpPr>
+        <p:spPr>
+          <a:xfrm>
+            <a:off x="4407408" y="5428309"/>
+            <a:ext cx="868680" cy="248502"/>
+          </a:xfrm>
+          <a:prstGeom prst="rect">
+            <a:avLst/>
+          </a:prstGeom>
+          <a:noFill/>
+          <a:ln/>
+        </p:spPr>
+        <p:txBody>
+          <a:bodyPr wrap="square" lIns="0" tIns="0" rIns="0" bIns="0" rtlCol="0" anchor="ctr"/>
+          <a:lstStyle/>
+          <a:p>
+            <a:pPr algn="r" indent="0" marL="0">
+              <a:buNone/>
+            </a:pPr>
+            <a:r>
+              <a:rPr lang="en-US" sz="1300" dirty="0">
+                <a:solidFill>
+                  <a:srgbClr val="595959"/>
+                </a:solidFill>
+                <a:latin typeface="Inter" pitchFamily="34" charset="0"/>
+                <a:ea typeface="Inter" pitchFamily="34" charset="-122"/>
+                <a:cs typeface="Inter" pitchFamily="34" charset="-120"/>
+              </a:rPr>
+              <a:t>−351</a:t>
+            </a:r>
+            <a:endParaRPr lang="en-US" sz="1300" dirty="0"/>
+          </a:p>
+        </p:txBody>
+      </p:sp>
+      <p:sp>
+        <p:nvSpPr>
+          <p:cNvPr id="115" name="Text 113"/>
+          <p:cNvSpPr txBox="1"/>
+          <p:nvPr/>
+        </p:nvSpPr>
+        <p:spPr>
+          <a:xfrm>
+            <a:off x="5276088" y="5428309"/>
+            <a:ext cx="640080" cy="248502"/>
+          </a:xfrm>
+          <a:prstGeom prst="rect">
+            <a:avLst/>
+          </a:prstGeom>
+          <a:noFill/>
+          <a:ln/>
+        </p:spPr>
+        <p:txBody>
+          <a:bodyPr wrap="square" lIns="0" tIns="0" rIns="0" bIns="0" rtlCol="0" anchor="ctr"/>
+          <a:lstStyle/>
+          <a:p>
+            <a:pPr algn="r" indent="0" marL="0">
+              <a:buNone/>
+            </a:pPr>
+            <a:r>
+              <a:rPr lang="en-US" sz="1300" dirty="0">
+                <a:solidFill>
+                  <a:srgbClr val="595959"/>
+                </a:solidFill>
+                <a:latin typeface="Inter" pitchFamily="34" charset="0"/>
+                <a:ea typeface="Inter" pitchFamily="34" charset="-122"/>
+                <a:cs typeface="Inter" pitchFamily="34" charset="-120"/>
+              </a:rPr>
+              <a:t>1.6%</a:t>
+            </a:r>
+            <a:endParaRPr lang="en-US" sz="1300" dirty="0"/>
+          </a:p>
+        </p:txBody>
+      </p:sp>
+      <p:sp>
+        <p:nvSpPr>
           <p:cNvPr id="116" name="Text 114"/>
           <p:cNvSpPr txBox="1"/>
           <p:nvPr/>
         </p:nvSpPr>
         <p:spPr>
           <a:xfrm>
-            <a:off x="3401568" y="5676810"/>
-            <a:ext cx="1005840" cy="248502"/>
-          </a:xfrm>
-          <a:prstGeom prst="rect">
-            <a:avLst/>
-          </a:prstGeom>
-          <a:noFill/>
-          <a:ln/>
-        </p:spPr>
-        <p:txBody>
-          <a:bodyPr wrap="square" lIns="0" tIns="0" rIns="0" bIns="0" rtlCol="0" anchor="ctr"/>
-          <a:lstStyle/>
-          <a:p>
-            <a:pPr algn="r" indent="0" marL="0">
-              <a:buNone/>
-            </a:pPr>
-            <a:r>
-              <a:rPr lang="en-US" sz="1300" b="1" dirty="0">
-                <a:solidFill>
-                  <a:srgbClr val="A82B26"/>
-                </a:solidFill>
-                <a:latin typeface="Inter" pitchFamily="34" charset="0"/>
-                <a:ea typeface="Inter" pitchFamily="34" charset="-122"/>
-                <a:cs typeface="Inter" pitchFamily="34" charset="-120"/>
-              </a:rPr>
-              <a:t>−$36K</a:t>
-            </a:r>
-            <a:endParaRPr lang="en-US" sz="1300" dirty="0"/>
+            <a:off x="658368" y="5676810"/>
+            <a:ext cx="310896" cy="248502"/>
+          </a:xfrm>
+          <a:prstGeom prst="rect">
+            <a:avLst/>
+          </a:prstGeom>
+          <a:noFill/>
+          <a:ln/>
+        </p:spPr>
+        <p:txBody>
+          <a:bodyPr wrap="square" lIns="0" tIns="0" rIns="0" bIns="0" rtlCol="0" anchor="ctr"/>
+          <a:lstStyle/>
+          <a:p>
+            <a:pPr algn="r" indent="0" marL="0">
+              <a:buNone/>
+            </a:pPr>
+            <a:r>
+              <a:rPr lang="en-US" sz="1200" dirty="0">
+                <a:solidFill>
+                  <a:srgbClr val="9AA3AD"/>
+                </a:solidFill>
+                <a:latin typeface="Inter" pitchFamily="34" charset="0"/>
+                <a:ea typeface="Inter" pitchFamily="34" charset="-122"/>
+                <a:cs typeface="Inter" pitchFamily="34" charset="-120"/>
+              </a:rPr>
+              <a:t>17</a:t>
+            </a:r>
+            <a:endParaRPr lang="en-US" sz="1200" dirty="0"/>
           </a:p>
         </p:txBody>
       </p:sp>
@@ -12897,110 +12859,32 @@
         </p:nvSpPr>
         <p:spPr>
           <a:xfrm>
-            <a:off x="4407408" y="5676810"/>
-            <a:ext cx="868680" cy="248502"/>
-          </a:xfrm>
-          <a:prstGeom prst="rect">
-            <a:avLst/>
-          </a:prstGeom>
-          <a:noFill/>
-          <a:ln/>
-        </p:spPr>
-        <p:txBody>
-          <a:bodyPr wrap="square" lIns="0" tIns="0" rIns="0" bIns="0" rtlCol="0" anchor="ctr"/>
-          <a:lstStyle/>
-          <a:p>
-            <a:pPr algn="r" indent="0" marL="0">
-              <a:buNone/>
-            </a:pPr>
-            <a:r>
-              <a:rPr lang="en-US" sz="1300" dirty="0">
-                <a:solidFill>
-                  <a:srgbClr val="595959"/>
-                </a:solidFill>
-                <a:latin typeface="Inter" pitchFamily="34" charset="0"/>
-                <a:ea typeface="Inter" pitchFamily="34" charset="-122"/>
-                <a:cs typeface="Inter" pitchFamily="34" charset="-120"/>
-              </a:rPr>
-              <a:t>−615</a:t>
-            </a:r>
-            <a:endParaRPr lang="en-US" sz="1300" dirty="0"/>
-          </a:p>
-        </p:txBody>
-      </p:sp>
-      <p:sp>
-        <p:nvSpPr>
-          <p:cNvPr id="118" name="Text 116"/>
-          <p:cNvSpPr txBox="1"/>
-          <p:nvPr/>
-        </p:nvSpPr>
-        <p:spPr>
-          <a:xfrm>
-            <a:off x="5276088" y="5676810"/>
-            <a:ext cx="640080" cy="248502"/>
-          </a:xfrm>
-          <a:prstGeom prst="rect">
-            <a:avLst/>
-          </a:prstGeom>
-          <a:noFill/>
-          <a:ln/>
-        </p:spPr>
-        <p:txBody>
-          <a:bodyPr wrap="square" lIns="0" tIns="0" rIns="0" bIns="0" rtlCol="0" anchor="ctr"/>
-          <a:lstStyle/>
-          <a:p>
-            <a:pPr algn="r" indent="0" marL="0">
-              <a:buNone/>
-            </a:pPr>
-            <a:r>
-              <a:rPr lang="en-US" sz="1300" dirty="0">
-                <a:solidFill>
-                  <a:srgbClr val="595959"/>
-                </a:solidFill>
-                <a:latin typeface="Inter" pitchFamily="34" charset="0"/>
-                <a:ea typeface="Inter" pitchFamily="34" charset="-122"/>
-                <a:cs typeface="Inter" pitchFamily="34" charset="-120"/>
-              </a:rPr>
-              <a:t>1.2%</a:t>
-            </a:r>
-            <a:endParaRPr lang="en-US" sz="1300" dirty="0"/>
-          </a:p>
-        </p:txBody>
-      </p:sp>
-      <p:sp>
-        <p:nvSpPr>
-          <p:cNvPr id="119" name="Text 117"/>
-          <p:cNvSpPr txBox="1"/>
-          <p:nvPr/>
-        </p:nvSpPr>
-        <p:spPr>
-          <a:xfrm>
-            <a:off x="6208776" y="1700784"/>
-            <a:ext cx="310896" cy="248502"/>
-          </a:xfrm>
-          <a:prstGeom prst="rect">
-            <a:avLst/>
-          </a:prstGeom>
-          <a:noFill/>
-          <a:ln/>
-        </p:spPr>
-        <p:txBody>
-          <a:bodyPr wrap="square" lIns="0" tIns="0" rIns="0" bIns="0" rtlCol="0" anchor="ctr"/>
-          <a:lstStyle/>
-          <a:p>
-            <a:pPr algn="r" indent="0" marL="0">
+            <a:off x="1014984" y="5676810"/>
+            <a:ext cx="1783080" cy="248502"/>
+          </a:xfrm>
+          <a:prstGeom prst="rect">
+            <a:avLst/>
+          </a:prstGeom>
+          <a:noFill/>
+          <a:ln/>
+        </p:spPr>
+        <p:txBody>
+          <a:bodyPr wrap="square" lIns="0" tIns="0" rIns="0" bIns="0" rtlCol="0" anchor="ctr"/>
+          <a:lstStyle/>
+          <a:p>
+            <a:pPr indent="0" marL="0">
               <a:buNone/>
             </a:pPr>
             <a:r>
               <a:rPr lang="en-US" sz="1200" dirty="0">
                 <a:solidFill>
-                  <a:srgbClr val="9AA3AD"/>
-                </a:solidFill>
-                <a:latin typeface="Inter" pitchFamily="34" charset="0"/>
-                <a:ea typeface="Inter" pitchFamily="34" charset="-122"/>
-                <a:cs typeface="Inter" pitchFamily="34" charset="-120"/>
-              </a:rPr>
-              <a:t>18</a:t>
+                  <a:srgbClr val="1A1A1A"/>
+                </a:solidFill>
+                <a:latin typeface="Inter" pitchFamily="34" charset="0"/>
+                <a:ea typeface="Inter" pitchFamily="34" charset="-122"/>
+                <a:cs typeface="Inter" pitchFamily="34" charset="-120"/>
+              </a:rPr>
+              <a:t>HYUNDAI ST GEORGE</a:t>
             </a:r>
             <a:endParaRPr lang="en-US" sz="1200" dirty="0"/>
           </a:p>
@@ -13008,53 +12892,14 @@
       </p:sp>
       <p:sp>
         <p:nvSpPr>
-          <p:cNvPr id="120" name="Text 118"/>
-          <p:cNvSpPr txBox="1"/>
-          <p:nvPr/>
-        </p:nvSpPr>
-        <p:spPr>
-          <a:xfrm>
-            <a:off x="6565392" y="1700784"/>
-            <a:ext cx="1783080" cy="248502"/>
-          </a:xfrm>
-          <a:prstGeom prst="rect">
-            <a:avLst/>
-          </a:prstGeom>
-          <a:noFill/>
-          <a:ln/>
-        </p:spPr>
-        <p:txBody>
-          <a:bodyPr wrap="square" lIns="0" tIns="0" rIns="0" bIns="0" rtlCol="0" anchor="ctr"/>
-          <a:lstStyle/>
-          <a:p>
-            <a:pPr indent="0" marL="0">
-              <a:buNone/>
-            </a:pPr>
-            <a:r>
-              <a:rPr lang="en-US" sz="1200" dirty="0">
-                <a:solidFill>
-                  <a:srgbClr val="1A1A1A"/>
-                </a:solidFill>
-                <a:latin typeface="Inter" pitchFamily="34" charset="0"/>
-                <a:ea typeface="Inter" pitchFamily="34" charset="-122"/>
-                <a:cs typeface="Inter" pitchFamily="34" charset="-120"/>
-              </a:rPr>
-              <a:t>HONDA NORTH</a:t>
-            </a:r>
-            <a:endParaRPr lang="en-US" sz="1200" dirty="0"/>
-          </a:p>
-        </p:txBody>
-      </p:sp>
-      <p:sp>
-        <p:nvSpPr>
-          <p:cNvPr id="121" name="Shape 119"/>
+          <p:cNvPr id="118" name="Shape 116"/>
           <p:cNvSpPr/>
           <p:nvPr/>
         </p:nvSpPr>
         <p:spPr>
           <a:xfrm>
-            <a:off x="8691164" y="1756697"/>
-            <a:ext cx="72926" cy="136676"/>
+            <a:off x="3145678" y="5732723"/>
+            <a:ext cx="68004" cy="136676"/>
           </a:xfrm>
           <a:prstGeom prst="rect">
             <a:avLst/>
@@ -13067,40 +12912,157 @@
       </p:sp>
       <p:sp>
         <p:nvSpPr>
+          <p:cNvPr id="119" name="Text 117"/>
+          <p:cNvSpPr txBox="1"/>
+          <p:nvPr/>
+        </p:nvSpPr>
+        <p:spPr>
+          <a:xfrm>
+            <a:off x="3401568" y="5676810"/>
+            <a:ext cx="1005840" cy="248502"/>
+          </a:xfrm>
+          <a:prstGeom prst="rect">
+            <a:avLst/>
+          </a:prstGeom>
+          <a:noFill/>
+          <a:ln/>
+        </p:spPr>
+        <p:txBody>
+          <a:bodyPr wrap="square" lIns="0" tIns="0" rIns="0" bIns="0" rtlCol="0" anchor="ctr"/>
+          <a:lstStyle/>
+          <a:p>
+            <a:pPr algn="r" indent="0" marL="0">
+              <a:buNone/>
+            </a:pPr>
+            <a:r>
+              <a:rPr lang="en-US" sz="1300" b="1" dirty="0">
+                <a:solidFill>
+                  <a:srgbClr val="A82B26"/>
+                </a:solidFill>
+                <a:latin typeface="Inter" pitchFamily="34" charset="0"/>
+                <a:ea typeface="Inter" pitchFamily="34" charset="-122"/>
+                <a:cs typeface="Inter" pitchFamily="34" charset="-120"/>
+              </a:rPr>
+              <a:t>−$27K</a:t>
+            </a:r>
+            <a:endParaRPr lang="en-US" sz="1300" dirty="0"/>
+          </a:p>
+        </p:txBody>
+      </p:sp>
+      <p:sp>
+        <p:nvSpPr>
+          <p:cNvPr id="120" name="Text 118"/>
+          <p:cNvSpPr txBox="1"/>
+          <p:nvPr/>
+        </p:nvSpPr>
+        <p:spPr>
+          <a:xfrm>
+            <a:off x="4407408" y="5676810"/>
+            <a:ext cx="868680" cy="248502"/>
+          </a:xfrm>
+          <a:prstGeom prst="rect">
+            <a:avLst/>
+          </a:prstGeom>
+          <a:noFill/>
+          <a:ln/>
+        </p:spPr>
+        <p:txBody>
+          <a:bodyPr wrap="square" lIns="0" tIns="0" rIns="0" bIns="0" rtlCol="0" anchor="ctr"/>
+          <a:lstStyle/>
+          <a:p>
+            <a:pPr algn="r" indent="0" marL="0">
+              <a:buNone/>
+            </a:pPr>
+            <a:r>
+              <a:rPr lang="en-US" sz="1300" dirty="0">
+                <a:solidFill>
+                  <a:srgbClr val="595959"/>
+                </a:solidFill>
+                <a:latin typeface="Inter" pitchFamily="34" charset="0"/>
+                <a:ea typeface="Inter" pitchFamily="34" charset="-122"/>
+                <a:cs typeface="Inter" pitchFamily="34" charset="-120"/>
+              </a:rPr>
+              <a:t>−461</a:t>
+            </a:r>
+            <a:endParaRPr lang="en-US" sz="1300" dirty="0"/>
+          </a:p>
+        </p:txBody>
+      </p:sp>
+      <p:sp>
+        <p:nvSpPr>
+          <p:cNvPr id="121" name="Text 119"/>
+          <p:cNvSpPr txBox="1"/>
+          <p:nvPr/>
+        </p:nvSpPr>
+        <p:spPr>
+          <a:xfrm>
+            <a:off x="5276088" y="5676810"/>
+            <a:ext cx="640080" cy="248502"/>
+          </a:xfrm>
+          <a:prstGeom prst="rect">
+            <a:avLst/>
+          </a:prstGeom>
+          <a:noFill/>
+          <a:ln/>
+        </p:spPr>
+        <p:txBody>
+          <a:bodyPr wrap="square" lIns="0" tIns="0" rIns="0" bIns="0" rtlCol="0" anchor="ctr"/>
+          <a:lstStyle/>
+          <a:p>
+            <a:pPr algn="r" indent="0" marL="0">
+              <a:buNone/>
+            </a:pPr>
+            <a:r>
+              <a:rPr lang="en-US" sz="1300" dirty="0">
+                <a:solidFill>
+                  <a:srgbClr val="595959"/>
+                </a:solidFill>
+                <a:latin typeface="Inter" pitchFamily="34" charset="0"/>
+                <a:ea typeface="Inter" pitchFamily="34" charset="-122"/>
+                <a:cs typeface="Inter" pitchFamily="34" charset="-120"/>
+              </a:rPr>
+              <a:t>1.2%</a:t>
+            </a:r>
+            <a:endParaRPr lang="en-US" sz="1300" dirty="0"/>
+          </a:p>
+        </p:txBody>
+      </p:sp>
+      <p:sp>
+        <p:nvSpPr>
           <p:cNvPr id="122" name="Text 120"/>
           <p:cNvSpPr txBox="1"/>
           <p:nvPr/>
         </p:nvSpPr>
         <p:spPr>
           <a:xfrm>
-            <a:off x="8951976" y="1700784"/>
-            <a:ext cx="1005840" cy="248502"/>
-          </a:xfrm>
-          <a:prstGeom prst="rect">
-            <a:avLst/>
-          </a:prstGeom>
-          <a:noFill/>
-          <a:ln/>
-        </p:spPr>
-        <p:txBody>
-          <a:bodyPr wrap="square" lIns="0" tIns="0" rIns="0" bIns="0" rtlCol="0" anchor="ctr"/>
-          <a:lstStyle/>
-          <a:p>
-            <a:pPr algn="r" indent="0" marL="0">
-              <a:buNone/>
-            </a:pPr>
-            <a:r>
-              <a:rPr lang="en-US" sz="1300" b="1" dirty="0">
-                <a:solidFill>
-                  <a:srgbClr val="A82B26"/>
-                </a:solidFill>
-                <a:latin typeface="Inter" pitchFamily="34" charset="0"/>
-                <a:ea typeface="Inter" pitchFamily="34" charset="-122"/>
-                <a:cs typeface="Inter" pitchFamily="34" charset="-120"/>
-              </a:rPr>
-              <a:t>−$38K</a:t>
-            </a:r>
-            <a:endParaRPr lang="en-US" sz="1300" dirty="0"/>
+            <a:off x="6208776" y="1700784"/>
+            <a:ext cx="310896" cy="248502"/>
+          </a:xfrm>
+          <a:prstGeom prst="rect">
+            <a:avLst/>
+          </a:prstGeom>
+          <a:noFill/>
+          <a:ln/>
+        </p:spPr>
+        <p:txBody>
+          <a:bodyPr wrap="square" lIns="0" tIns="0" rIns="0" bIns="0" rtlCol="0" anchor="ctr"/>
+          <a:lstStyle/>
+          <a:p>
+            <a:pPr algn="r" indent="0" marL="0">
+              <a:buNone/>
+            </a:pPr>
+            <a:r>
+              <a:rPr lang="en-US" sz="1200" dirty="0">
+                <a:solidFill>
+                  <a:srgbClr val="9AA3AD"/>
+                </a:solidFill>
+                <a:latin typeface="Inter" pitchFamily="34" charset="0"/>
+                <a:ea typeface="Inter" pitchFamily="34" charset="-122"/>
+                <a:cs typeface="Inter" pitchFamily="34" charset="-120"/>
+              </a:rPr>
+              <a:t>18</a:t>
+            </a:r>
+            <a:endParaRPr lang="en-US" sz="1200" dirty="0"/>
           </a:p>
         </p:txBody>
       </p:sp>
@@ -13112,110 +13074,32 @@
         </p:nvSpPr>
         <p:spPr>
           <a:xfrm>
-            <a:off x="9957816" y="1700784"/>
-            <a:ext cx="868680" cy="248502"/>
-          </a:xfrm>
-          <a:prstGeom prst="rect">
-            <a:avLst/>
-          </a:prstGeom>
-          <a:noFill/>
-          <a:ln/>
-        </p:spPr>
-        <p:txBody>
-          <a:bodyPr wrap="square" lIns="0" tIns="0" rIns="0" bIns="0" rtlCol="0" anchor="ctr"/>
-          <a:lstStyle/>
-          <a:p>
-            <a:pPr algn="r" indent="0" marL="0">
-              <a:buNone/>
-            </a:pPr>
-            <a:r>
-              <a:rPr lang="en-US" sz="1300" dirty="0">
-                <a:solidFill>
-                  <a:srgbClr val="595959"/>
-                </a:solidFill>
-                <a:latin typeface="Inter" pitchFamily="34" charset="0"/>
-                <a:ea typeface="Inter" pitchFamily="34" charset="-122"/>
-                <a:cs typeface="Inter" pitchFamily="34" charset="-120"/>
-              </a:rPr>
-              <a:t>−600</a:t>
-            </a:r>
-            <a:endParaRPr lang="en-US" sz="1300" dirty="0"/>
-          </a:p>
-        </p:txBody>
-      </p:sp>
-      <p:sp>
-        <p:nvSpPr>
-          <p:cNvPr id="124" name="Text 122"/>
-          <p:cNvSpPr txBox="1"/>
-          <p:nvPr/>
-        </p:nvSpPr>
-        <p:spPr>
-          <a:xfrm>
-            <a:off x="10826496" y="1700784"/>
-            <a:ext cx="640080" cy="248502"/>
-          </a:xfrm>
-          <a:prstGeom prst="rect">
-            <a:avLst/>
-          </a:prstGeom>
-          <a:noFill/>
-          <a:ln/>
-        </p:spPr>
-        <p:txBody>
-          <a:bodyPr wrap="square" lIns="0" tIns="0" rIns="0" bIns="0" rtlCol="0" anchor="ctr"/>
-          <a:lstStyle/>
-          <a:p>
-            <a:pPr algn="r" indent="0" marL="0">
-              <a:buNone/>
-            </a:pPr>
-            <a:r>
-              <a:rPr lang="en-US" sz="1300" dirty="0">
-                <a:solidFill>
-                  <a:srgbClr val="595959"/>
-                </a:solidFill>
-                <a:latin typeface="Inter" pitchFamily="34" charset="0"/>
-                <a:ea typeface="Inter" pitchFamily="34" charset="-122"/>
-                <a:cs typeface="Inter" pitchFamily="34" charset="-120"/>
-              </a:rPr>
-              <a:t>12.0%</a:t>
-            </a:r>
-            <a:endParaRPr lang="en-US" sz="1300" dirty="0"/>
-          </a:p>
-        </p:txBody>
-      </p:sp>
-      <p:sp>
-        <p:nvSpPr>
-          <p:cNvPr id="125" name="Text 123"/>
-          <p:cNvSpPr txBox="1"/>
-          <p:nvPr/>
-        </p:nvSpPr>
-        <p:spPr>
-          <a:xfrm>
-            <a:off x="6208776" y="1949286"/>
-            <a:ext cx="310896" cy="248502"/>
-          </a:xfrm>
-          <a:prstGeom prst="rect">
-            <a:avLst/>
-          </a:prstGeom>
-          <a:noFill/>
-          <a:ln/>
-        </p:spPr>
-        <p:txBody>
-          <a:bodyPr wrap="square" lIns="0" tIns="0" rIns="0" bIns="0" rtlCol="0" anchor="ctr"/>
-          <a:lstStyle/>
-          <a:p>
-            <a:pPr algn="r" indent="0" marL="0">
+            <a:off x="6565392" y="1700784"/>
+            <a:ext cx="1783080" cy="248502"/>
+          </a:xfrm>
+          <a:prstGeom prst="rect">
+            <a:avLst/>
+          </a:prstGeom>
+          <a:noFill/>
+          <a:ln/>
+        </p:spPr>
+        <p:txBody>
+          <a:bodyPr wrap="square" lIns="0" tIns="0" rIns="0" bIns="0" rtlCol="0" anchor="ctr"/>
+          <a:lstStyle/>
+          <a:p>
+            <a:pPr indent="0" marL="0">
               <a:buNone/>
             </a:pPr>
             <a:r>
               <a:rPr lang="en-US" sz="1200" dirty="0">
                 <a:solidFill>
-                  <a:srgbClr val="9AA3AD"/>
-                </a:solidFill>
-                <a:latin typeface="Inter" pitchFamily="34" charset="0"/>
-                <a:ea typeface="Inter" pitchFamily="34" charset="-122"/>
-                <a:cs typeface="Inter" pitchFamily="34" charset="-120"/>
-              </a:rPr>
-              <a:t>19</a:t>
+                  <a:srgbClr val="1A1A1A"/>
+                </a:solidFill>
+                <a:latin typeface="Inter" pitchFamily="34" charset="0"/>
+                <a:ea typeface="Inter" pitchFamily="34" charset="-122"/>
+                <a:cs typeface="Inter" pitchFamily="34" charset="-120"/>
+              </a:rPr>
+              <a:t>HONDA NORTH</a:t>
             </a:r>
             <a:endParaRPr lang="en-US" sz="1200" dirty="0"/>
           </a:p>
@@ -13223,53 +13107,14 @@
       </p:sp>
       <p:sp>
         <p:nvSpPr>
-          <p:cNvPr id="126" name="Text 124"/>
-          <p:cNvSpPr txBox="1"/>
-          <p:nvPr/>
-        </p:nvSpPr>
-        <p:spPr>
-          <a:xfrm>
-            <a:off x="6565392" y="1949286"/>
-            <a:ext cx="1783080" cy="248502"/>
-          </a:xfrm>
-          <a:prstGeom prst="rect">
-            <a:avLst/>
-          </a:prstGeom>
-          <a:noFill/>
-          <a:ln/>
-        </p:spPr>
-        <p:txBody>
-          <a:bodyPr wrap="square" lIns="0" tIns="0" rIns="0" bIns="0" rtlCol="0" anchor="ctr"/>
-          <a:lstStyle/>
-          <a:p>
-            <a:pPr indent="0" marL="0">
-              <a:buNone/>
-            </a:pPr>
-            <a:r>
-              <a:rPr lang="en-US" sz="1200" dirty="0">
-                <a:solidFill>
-                  <a:srgbClr val="1A1A1A"/>
-                </a:solidFill>
-                <a:latin typeface="Inter" pitchFamily="34" charset="0"/>
-                <a:ea typeface="Inter" pitchFamily="34" charset="-122"/>
-                <a:cs typeface="Inter" pitchFamily="34" charset="-120"/>
-              </a:rPr>
-              <a:t>HONDA FLAGSTAFF</a:t>
-            </a:r>
-            <a:endParaRPr lang="en-US" sz="1200" dirty="0"/>
-          </a:p>
-        </p:txBody>
-      </p:sp>
-      <p:sp>
-        <p:nvSpPr>
-          <p:cNvPr id="127" name="Shape 125"/>
+          <p:cNvPr id="124" name="Shape 122"/>
           <p:cNvSpPr/>
           <p:nvPr/>
         </p:nvSpPr>
         <p:spPr>
           <a:xfrm>
-            <a:off x="8665461" y="2005199"/>
-            <a:ext cx="98629" cy="136676"/>
+            <a:off x="8691164" y="1756697"/>
+            <a:ext cx="72926" cy="136676"/>
           </a:xfrm>
           <a:prstGeom prst="rect">
             <a:avLst/>
@@ -13282,40 +13127,157 @@
       </p:sp>
       <p:sp>
         <p:nvSpPr>
+          <p:cNvPr id="125" name="Text 123"/>
+          <p:cNvSpPr txBox="1"/>
+          <p:nvPr/>
+        </p:nvSpPr>
+        <p:spPr>
+          <a:xfrm>
+            <a:off x="8951976" y="1700784"/>
+            <a:ext cx="1005840" cy="248502"/>
+          </a:xfrm>
+          <a:prstGeom prst="rect">
+            <a:avLst/>
+          </a:prstGeom>
+          <a:noFill/>
+          <a:ln/>
+        </p:spPr>
+        <p:txBody>
+          <a:bodyPr wrap="square" lIns="0" tIns="0" rIns="0" bIns="0" rtlCol="0" anchor="ctr"/>
+          <a:lstStyle/>
+          <a:p>
+            <a:pPr algn="r" indent="0" marL="0">
+              <a:buNone/>
+            </a:pPr>
+            <a:r>
+              <a:rPr lang="en-US" sz="1300" b="1" dirty="0">
+                <a:solidFill>
+                  <a:srgbClr val="A82B26"/>
+                </a:solidFill>
+                <a:latin typeface="Inter" pitchFamily="34" charset="0"/>
+                <a:ea typeface="Inter" pitchFamily="34" charset="-122"/>
+                <a:cs typeface="Inter" pitchFamily="34" charset="-120"/>
+              </a:rPr>
+              <a:t>−$29K</a:t>
+            </a:r>
+            <a:endParaRPr lang="en-US" sz="1300" dirty="0"/>
+          </a:p>
+        </p:txBody>
+      </p:sp>
+      <p:sp>
+        <p:nvSpPr>
+          <p:cNvPr id="126" name="Text 124"/>
+          <p:cNvSpPr txBox="1"/>
+          <p:nvPr/>
+        </p:nvSpPr>
+        <p:spPr>
+          <a:xfrm>
+            <a:off x="9957816" y="1700784"/>
+            <a:ext cx="868680" cy="248502"/>
+          </a:xfrm>
+          <a:prstGeom prst="rect">
+            <a:avLst/>
+          </a:prstGeom>
+          <a:noFill/>
+          <a:ln/>
+        </p:spPr>
+        <p:txBody>
+          <a:bodyPr wrap="square" lIns="0" tIns="0" rIns="0" bIns="0" rtlCol="0" anchor="ctr"/>
+          <a:lstStyle/>
+          <a:p>
+            <a:pPr algn="r" indent="0" marL="0">
+              <a:buNone/>
+            </a:pPr>
+            <a:r>
+              <a:rPr lang="en-US" sz="1300" dirty="0">
+                <a:solidFill>
+                  <a:srgbClr val="595959"/>
+                </a:solidFill>
+                <a:latin typeface="Inter" pitchFamily="34" charset="0"/>
+                <a:ea typeface="Inter" pitchFamily="34" charset="-122"/>
+                <a:cs typeface="Inter" pitchFamily="34" charset="-120"/>
+              </a:rPr>
+              <a:t>−450</a:t>
+            </a:r>
+            <a:endParaRPr lang="en-US" sz="1300" dirty="0"/>
+          </a:p>
+        </p:txBody>
+      </p:sp>
+      <p:sp>
+        <p:nvSpPr>
+          <p:cNvPr id="127" name="Text 125"/>
+          <p:cNvSpPr txBox="1"/>
+          <p:nvPr/>
+        </p:nvSpPr>
+        <p:spPr>
+          <a:xfrm>
+            <a:off x="10826496" y="1700784"/>
+            <a:ext cx="640080" cy="248502"/>
+          </a:xfrm>
+          <a:prstGeom prst="rect">
+            <a:avLst/>
+          </a:prstGeom>
+          <a:noFill/>
+          <a:ln/>
+        </p:spPr>
+        <p:txBody>
+          <a:bodyPr wrap="square" lIns="0" tIns="0" rIns="0" bIns="0" rtlCol="0" anchor="ctr"/>
+          <a:lstStyle/>
+          <a:p>
+            <a:pPr algn="r" indent="0" marL="0">
+              <a:buNone/>
+            </a:pPr>
+            <a:r>
+              <a:rPr lang="en-US" sz="1300" dirty="0">
+                <a:solidFill>
+                  <a:srgbClr val="595959"/>
+                </a:solidFill>
+                <a:latin typeface="Inter" pitchFamily="34" charset="0"/>
+                <a:ea typeface="Inter" pitchFamily="34" charset="-122"/>
+                <a:cs typeface="Inter" pitchFamily="34" charset="-120"/>
+              </a:rPr>
+              <a:t>12.0%</a:t>
+            </a:r>
+            <a:endParaRPr lang="en-US" sz="1300" dirty="0"/>
+          </a:p>
+        </p:txBody>
+      </p:sp>
+      <p:sp>
+        <p:nvSpPr>
           <p:cNvPr id="128" name="Text 126"/>
           <p:cNvSpPr txBox="1"/>
           <p:nvPr/>
         </p:nvSpPr>
         <p:spPr>
           <a:xfrm>
-            <a:off x="8951976" y="1949286"/>
-            <a:ext cx="1005840" cy="248502"/>
-          </a:xfrm>
-          <a:prstGeom prst="rect">
-            <a:avLst/>
-          </a:prstGeom>
-          <a:noFill/>
-          <a:ln/>
-        </p:spPr>
-        <p:txBody>
-          <a:bodyPr wrap="square" lIns="0" tIns="0" rIns="0" bIns="0" rtlCol="0" anchor="ctr"/>
-          <a:lstStyle/>
-          <a:p>
-            <a:pPr algn="r" indent="0" marL="0">
-              <a:buNone/>
-            </a:pPr>
-            <a:r>
-              <a:rPr lang="en-US" sz="1300" b="1" dirty="0">
-                <a:solidFill>
-                  <a:srgbClr val="A82B26"/>
-                </a:solidFill>
-                <a:latin typeface="Inter" pitchFamily="34" charset="0"/>
-                <a:ea typeface="Inter" pitchFamily="34" charset="-122"/>
-                <a:cs typeface="Inter" pitchFamily="34" charset="-120"/>
-              </a:rPr>
-              <a:t>−$52K</a:t>
-            </a:r>
-            <a:endParaRPr lang="en-US" sz="1300" dirty="0"/>
+            <a:off x="6208776" y="1949286"/>
+            <a:ext cx="310896" cy="248502"/>
+          </a:xfrm>
+          <a:prstGeom prst="rect">
+            <a:avLst/>
+          </a:prstGeom>
+          <a:noFill/>
+          <a:ln/>
+        </p:spPr>
+        <p:txBody>
+          <a:bodyPr wrap="square" lIns="0" tIns="0" rIns="0" bIns="0" rtlCol="0" anchor="ctr"/>
+          <a:lstStyle/>
+          <a:p>
+            <a:pPr algn="r" indent="0" marL="0">
+              <a:buNone/>
+            </a:pPr>
+            <a:r>
+              <a:rPr lang="en-US" sz="1200" dirty="0">
+                <a:solidFill>
+                  <a:srgbClr val="9AA3AD"/>
+                </a:solidFill>
+                <a:latin typeface="Inter" pitchFamily="34" charset="0"/>
+                <a:ea typeface="Inter" pitchFamily="34" charset="-122"/>
+                <a:cs typeface="Inter" pitchFamily="34" charset="-120"/>
+              </a:rPr>
+              <a:t>19</a:t>
+            </a:r>
+            <a:endParaRPr lang="en-US" sz="1200" dirty="0"/>
           </a:p>
         </p:txBody>
       </p:sp>
@@ -13327,110 +13289,32 @@
         </p:nvSpPr>
         <p:spPr>
           <a:xfrm>
-            <a:off x="9957816" y="1949286"/>
-            <a:ext cx="868680" cy="248502"/>
-          </a:xfrm>
-          <a:prstGeom prst="rect">
-            <a:avLst/>
-          </a:prstGeom>
-          <a:noFill/>
-          <a:ln/>
-        </p:spPr>
-        <p:txBody>
-          <a:bodyPr wrap="square" lIns="0" tIns="0" rIns="0" bIns="0" rtlCol="0" anchor="ctr"/>
-          <a:lstStyle/>
-          <a:p>
-            <a:pPr algn="r" indent="0" marL="0">
-              <a:buNone/>
-            </a:pPr>
-            <a:r>
-              <a:rPr lang="en-US" sz="1300" dirty="0">
-                <a:solidFill>
-                  <a:srgbClr val="595959"/>
-                </a:solidFill>
-                <a:latin typeface="Inter" pitchFamily="34" charset="0"/>
-                <a:ea typeface="Inter" pitchFamily="34" charset="-122"/>
-                <a:cs typeface="Inter" pitchFamily="34" charset="-120"/>
-              </a:rPr>
-              <a:t>−735</a:t>
-            </a:r>
-            <a:endParaRPr lang="en-US" sz="1300" dirty="0"/>
-          </a:p>
-        </p:txBody>
-      </p:sp>
-      <p:sp>
-        <p:nvSpPr>
-          <p:cNvPr id="130" name="Text 128"/>
-          <p:cNvSpPr txBox="1"/>
-          <p:nvPr/>
-        </p:nvSpPr>
-        <p:spPr>
-          <a:xfrm>
-            <a:off x="10826496" y="1949286"/>
-            <a:ext cx="640080" cy="248502"/>
-          </a:xfrm>
-          <a:prstGeom prst="rect">
-            <a:avLst/>
-          </a:prstGeom>
-          <a:noFill/>
-          <a:ln/>
-        </p:spPr>
-        <p:txBody>
-          <a:bodyPr wrap="square" lIns="0" tIns="0" rIns="0" bIns="0" rtlCol="0" anchor="ctr"/>
-          <a:lstStyle/>
-          <a:p>
-            <a:pPr algn="r" indent="0" marL="0">
-              <a:buNone/>
-            </a:pPr>
-            <a:r>
-              <a:rPr lang="en-US" sz="1300" dirty="0">
-                <a:solidFill>
-                  <a:srgbClr val="595959"/>
-                </a:solidFill>
-                <a:latin typeface="Inter" pitchFamily="34" charset="0"/>
-                <a:ea typeface="Inter" pitchFamily="34" charset="-122"/>
-                <a:cs typeface="Inter" pitchFamily="34" charset="-120"/>
-              </a:rPr>
-              <a:t>1.3%</a:t>
-            </a:r>
-            <a:endParaRPr lang="en-US" sz="1300" dirty="0"/>
-          </a:p>
-        </p:txBody>
-      </p:sp>
-      <p:sp>
-        <p:nvSpPr>
-          <p:cNvPr id="131" name="Text 129"/>
-          <p:cNvSpPr txBox="1"/>
-          <p:nvPr/>
-        </p:nvSpPr>
-        <p:spPr>
-          <a:xfrm>
-            <a:off x="6208776" y="2197787"/>
-            <a:ext cx="310896" cy="248502"/>
-          </a:xfrm>
-          <a:prstGeom prst="rect">
-            <a:avLst/>
-          </a:prstGeom>
-          <a:noFill/>
-          <a:ln/>
-        </p:spPr>
-        <p:txBody>
-          <a:bodyPr wrap="square" lIns="0" tIns="0" rIns="0" bIns="0" rtlCol="0" anchor="ctr"/>
-          <a:lstStyle/>
-          <a:p>
-            <a:pPr algn="r" indent="0" marL="0">
+            <a:off x="6565392" y="1949286"/>
+            <a:ext cx="1783080" cy="248502"/>
+          </a:xfrm>
+          <a:prstGeom prst="rect">
+            <a:avLst/>
+          </a:prstGeom>
+          <a:noFill/>
+          <a:ln/>
+        </p:spPr>
+        <p:txBody>
+          <a:bodyPr wrap="square" lIns="0" tIns="0" rIns="0" bIns="0" rtlCol="0" anchor="ctr"/>
+          <a:lstStyle/>
+          <a:p>
+            <a:pPr indent="0" marL="0">
               <a:buNone/>
             </a:pPr>
             <a:r>
               <a:rPr lang="en-US" sz="1200" dirty="0">
                 <a:solidFill>
-                  <a:srgbClr val="9AA3AD"/>
-                </a:solidFill>
-                <a:latin typeface="Inter" pitchFamily="34" charset="0"/>
-                <a:ea typeface="Inter" pitchFamily="34" charset="-122"/>
-                <a:cs typeface="Inter" pitchFamily="34" charset="-120"/>
-              </a:rPr>
-              <a:t>20</a:t>
+                  <a:srgbClr val="1A1A1A"/>
+                </a:solidFill>
+                <a:latin typeface="Inter" pitchFamily="34" charset="0"/>
+                <a:ea typeface="Inter" pitchFamily="34" charset="-122"/>
+                <a:cs typeface="Inter" pitchFamily="34" charset="-120"/>
+              </a:rPr>
+              <a:t>HONDA FLAGSTAFF</a:t>
             </a:r>
             <a:endParaRPr lang="en-US" sz="1200" dirty="0"/>
           </a:p>
@@ -13438,53 +13322,14 @@
       </p:sp>
       <p:sp>
         <p:nvSpPr>
-          <p:cNvPr id="132" name="Text 130"/>
-          <p:cNvSpPr txBox="1"/>
-          <p:nvPr/>
-        </p:nvSpPr>
-        <p:spPr>
-          <a:xfrm>
-            <a:off x="6565392" y="2197787"/>
-            <a:ext cx="1783080" cy="248502"/>
-          </a:xfrm>
-          <a:prstGeom prst="rect">
-            <a:avLst/>
-          </a:prstGeom>
-          <a:noFill/>
-          <a:ln/>
-        </p:spPr>
-        <p:txBody>
-          <a:bodyPr wrap="square" lIns="0" tIns="0" rIns="0" bIns="0" rtlCol="0" anchor="ctr"/>
-          <a:lstStyle/>
-          <a:p>
-            <a:pPr indent="0" marL="0">
-              <a:buNone/>
-            </a:pPr>
-            <a:r>
-              <a:rPr lang="en-US" sz="1200" dirty="0">
-                <a:solidFill>
-                  <a:srgbClr val="1A1A1A"/>
-                </a:solidFill>
-                <a:latin typeface="Inter" pitchFamily="34" charset="0"/>
-                <a:ea typeface="Inter" pitchFamily="34" charset="-122"/>
-                <a:cs typeface="Inter" pitchFamily="34" charset="-120"/>
-              </a:rPr>
-              <a:t>AUDI RENO</a:t>
-            </a:r>
-            <a:endParaRPr lang="en-US" sz="1200" dirty="0"/>
-          </a:p>
-        </p:txBody>
-      </p:sp>
-      <p:sp>
-        <p:nvSpPr>
-          <p:cNvPr id="133" name="Shape 131"/>
+          <p:cNvPr id="130" name="Shape 128"/>
           <p:cNvSpPr/>
           <p:nvPr/>
         </p:nvSpPr>
         <p:spPr>
           <a:xfrm>
-            <a:off x="8665163" y="2253700"/>
-            <a:ext cx="98927" cy="136676"/>
+            <a:off x="8665461" y="2005199"/>
+            <a:ext cx="98629" cy="136676"/>
           </a:xfrm>
           <a:prstGeom prst="rect">
             <a:avLst/>
@@ -13497,40 +13342,157 @@
       </p:sp>
       <p:sp>
         <p:nvSpPr>
+          <p:cNvPr id="131" name="Text 129"/>
+          <p:cNvSpPr txBox="1"/>
+          <p:nvPr/>
+        </p:nvSpPr>
+        <p:spPr>
+          <a:xfrm>
+            <a:off x="8951976" y="1949286"/>
+            <a:ext cx="1005840" cy="248502"/>
+          </a:xfrm>
+          <a:prstGeom prst="rect">
+            <a:avLst/>
+          </a:prstGeom>
+          <a:noFill/>
+          <a:ln/>
+        </p:spPr>
+        <p:txBody>
+          <a:bodyPr wrap="square" lIns="0" tIns="0" rIns="0" bIns="0" rtlCol="0" anchor="ctr"/>
+          <a:lstStyle/>
+          <a:p>
+            <a:pPr algn="r" indent="0" marL="0">
+              <a:buNone/>
+            </a:pPr>
+            <a:r>
+              <a:rPr lang="en-US" sz="1300" b="1" dirty="0">
+                <a:solidFill>
+                  <a:srgbClr val="A82B26"/>
+                </a:solidFill>
+                <a:latin typeface="Inter" pitchFamily="34" charset="0"/>
+                <a:ea typeface="Inter" pitchFamily="34" charset="-122"/>
+                <a:cs typeface="Inter" pitchFamily="34" charset="-120"/>
+              </a:rPr>
+              <a:t>−$39K</a:t>
+            </a:r>
+            <a:endParaRPr lang="en-US" sz="1300" dirty="0"/>
+          </a:p>
+        </p:txBody>
+      </p:sp>
+      <p:sp>
+        <p:nvSpPr>
+          <p:cNvPr id="132" name="Text 130"/>
+          <p:cNvSpPr txBox="1"/>
+          <p:nvPr/>
+        </p:nvSpPr>
+        <p:spPr>
+          <a:xfrm>
+            <a:off x="9957816" y="1949286"/>
+            <a:ext cx="868680" cy="248502"/>
+          </a:xfrm>
+          <a:prstGeom prst="rect">
+            <a:avLst/>
+          </a:prstGeom>
+          <a:noFill/>
+          <a:ln/>
+        </p:spPr>
+        <p:txBody>
+          <a:bodyPr wrap="square" lIns="0" tIns="0" rIns="0" bIns="0" rtlCol="0" anchor="ctr"/>
+          <a:lstStyle/>
+          <a:p>
+            <a:pPr algn="r" indent="0" marL="0">
+              <a:buNone/>
+            </a:pPr>
+            <a:r>
+              <a:rPr lang="en-US" sz="1300" dirty="0">
+                <a:solidFill>
+                  <a:srgbClr val="595959"/>
+                </a:solidFill>
+                <a:latin typeface="Inter" pitchFamily="34" charset="0"/>
+                <a:ea typeface="Inter" pitchFamily="34" charset="-122"/>
+                <a:cs typeface="Inter" pitchFamily="34" charset="-120"/>
+              </a:rPr>
+              <a:t>−552</a:t>
+            </a:r>
+            <a:endParaRPr lang="en-US" sz="1300" dirty="0"/>
+          </a:p>
+        </p:txBody>
+      </p:sp>
+      <p:sp>
+        <p:nvSpPr>
+          <p:cNvPr id="133" name="Text 131"/>
+          <p:cNvSpPr txBox="1"/>
+          <p:nvPr/>
+        </p:nvSpPr>
+        <p:spPr>
+          <a:xfrm>
+            <a:off x="10826496" y="1949286"/>
+            <a:ext cx="640080" cy="248502"/>
+          </a:xfrm>
+          <a:prstGeom prst="rect">
+            <a:avLst/>
+          </a:prstGeom>
+          <a:noFill/>
+          <a:ln/>
+        </p:spPr>
+        <p:txBody>
+          <a:bodyPr wrap="square" lIns="0" tIns="0" rIns="0" bIns="0" rtlCol="0" anchor="ctr"/>
+          <a:lstStyle/>
+          <a:p>
+            <a:pPr algn="r" indent="0" marL="0">
+              <a:buNone/>
+            </a:pPr>
+            <a:r>
+              <a:rPr lang="en-US" sz="1300" dirty="0">
+                <a:solidFill>
+                  <a:srgbClr val="595959"/>
+                </a:solidFill>
+                <a:latin typeface="Inter" pitchFamily="34" charset="0"/>
+                <a:ea typeface="Inter" pitchFamily="34" charset="-122"/>
+                <a:cs typeface="Inter" pitchFamily="34" charset="-120"/>
+              </a:rPr>
+              <a:t>1.3%</a:t>
+            </a:r>
+            <a:endParaRPr lang="en-US" sz="1300" dirty="0"/>
+          </a:p>
+        </p:txBody>
+      </p:sp>
+      <p:sp>
+        <p:nvSpPr>
           <p:cNvPr id="134" name="Text 132"/>
           <p:cNvSpPr txBox="1"/>
           <p:nvPr/>
         </p:nvSpPr>
         <p:spPr>
           <a:xfrm>
-            <a:off x="8951976" y="2197787"/>
-            <a:ext cx="1005840" cy="248502"/>
-          </a:xfrm>
-          <a:prstGeom prst="rect">
-            <a:avLst/>
-          </a:prstGeom>
-          <a:noFill/>
-          <a:ln/>
-        </p:spPr>
-        <p:txBody>
-          <a:bodyPr wrap="square" lIns="0" tIns="0" rIns="0" bIns="0" rtlCol="0" anchor="ctr"/>
-          <a:lstStyle/>
-          <a:p>
-            <a:pPr algn="r" indent="0" marL="0">
-              <a:buNone/>
-            </a:pPr>
-            <a:r>
-              <a:rPr lang="en-US" sz="1300" b="1" dirty="0">
-                <a:solidFill>
-                  <a:srgbClr val="A82B26"/>
-                </a:solidFill>
-                <a:latin typeface="Inter" pitchFamily="34" charset="0"/>
-                <a:ea typeface="Inter" pitchFamily="34" charset="-122"/>
-                <a:cs typeface="Inter" pitchFamily="34" charset="-120"/>
-              </a:rPr>
-              <a:t>−$52K</a:t>
-            </a:r>
-            <a:endParaRPr lang="en-US" sz="1300" dirty="0"/>
+            <a:off x="6208776" y="2197787"/>
+            <a:ext cx="310896" cy="248502"/>
+          </a:xfrm>
+          <a:prstGeom prst="rect">
+            <a:avLst/>
+          </a:prstGeom>
+          <a:noFill/>
+          <a:ln/>
+        </p:spPr>
+        <p:txBody>
+          <a:bodyPr wrap="square" lIns="0" tIns="0" rIns="0" bIns="0" rtlCol="0" anchor="ctr"/>
+          <a:lstStyle/>
+          <a:p>
+            <a:pPr algn="r" indent="0" marL="0">
+              <a:buNone/>
+            </a:pPr>
+            <a:r>
+              <a:rPr lang="en-US" sz="1200" dirty="0">
+                <a:solidFill>
+                  <a:srgbClr val="9AA3AD"/>
+                </a:solidFill>
+                <a:latin typeface="Inter" pitchFamily="34" charset="0"/>
+                <a:ea typeface="Inter" pitchFamily="34" charset="-122"/>
+                <a:cs typeface="Inter" pitchFamily="34" charset="-120"/>
+              </a:rPr>
+              <a:t>20</a:t>
+            </a:r>
+            <a:endParaRPr lang="en-US" sz="1200" dirty="0"/>
           </a:p>
         </p:txBody>
       </p:sp>
@@ -13542,86 +13504,47 @@
         </p:nvSpPr>
         <p:spPr>
           <a:xfrm>
-            <a:off x="9957816" y="2197787"/>
-            <a:ext cx="868680" cy="248502"/>
-          </a:xfrm>
-          <a:prstGeom prst="rect">
-            <a:avLst/>
-          </a:prstGeom>
-          <a:noFill/>
-          <a:ln/>
-        </p:spPr>
-        <p:txBody>
-          <a:bodyPr wrap="square" lIns="0" tIns="0" rIns="0" bIns="0" rtlCol="0" anchor="ctr"/>
-          <a:lstStyle/>
-          <a:p>
-            <a:pPr algn="r" indent="0" marL="0">
-              <a:buNone/>
-            </a:pPr>
-            <a:r>
-              <a:rPr lang="en-US" sz="1300" dirty="0">
-                <a:solidFill>
-                  <a:srgbClr val="595959"/>
-                </a:solidFill>
-                <a:latin typeface="Inter" pitchFamily="34" charset="0"/>
-                <a:ea typeface="Inter" pitchFamily="34" charset="-122"/>
-                <a:cs typeface="Inter" pitchFamily="34" charset="-120"/>
-              </a:rPr>
-              <a:t>−696</a:t>
-            </a:r>
-            <a:endParaRPr lang="en-US" sz="1300" dirty="0"/>
-          </a:p>
-        </p:txBody>
-      </p:sp>
-      <p:sp>
-        <p:nvSpPr>
-          <p:cNvPr id="136" name="Text 134"/>
-          <p:cNvSpPr txBox="1"/>
-          <p:nvPr/>
-        </p:nvSpPr>
-        <p:spPr>
-          <a:xfrm>
-            <a:off x="10826496" y="2197787"/>
-            <a:ext cx="640080" cy="248502"/>
-          </a:xfrm>
-          <a:prstGeom prst="rect">
-            <a:avLst/>
-          </a:prstGeom>
-          <a:noFill/>
-          <a:ln/>
-        </p:spPr>
-        <p:txBody>
-          <a:bodyPr wrap="square" lIns="0" tIns="0" rIns="0" bIns="0" rtlCol="0" anchor="ctr"/>
-          <a:lstStyle/>
-          <a:p>
-            <a:pPr algn="r" indent="0" marL="0">
-              <a:buNone/>
-            </a:pPr>
-            <a:r>
-              <a:rPr lang="en-US" sz="1300" dirty="0">
-                <a:solidFill>
-                  <a:srgbClr val="595959"/>
-                </a:solidFill>
-                <a:latin typeface="Inter" pitchFamily="34" charset="0"/>
-                <a:ea typeface="Inter" pitchFamily="34" charset="-122"/>
-                <a:cs typeface="Inter" pitchFamily="34" charset="-120"/>
-              </a:rPr>
-              <a:t>0.1%</a:t>
-            </a:r>
-            <a:endParaRPr lang="en-US" sz="1300" dirty="0"/>
-          </a:p>
-        </p:txBody>
-      </p:sp>
-      <p:sp>
-        <p:nvSpPr>
-          <p:cNvPr id="137" name="Shape 135"/>
+            <a:off x="6565392" y="2197787"/>
+            <a:ext cx="1783080" cy="248502"/>
+          </a:xfrm>
+          <a:prstGeom prst="rect">
+            <a:avLst/>
+          </a:prstGeom>
+          <a:noFill/>
+          <a:ln/>
+        </p:spPr>
+        <p:txBody>
+          <a:bodyPr wrap="square" lIns="0" tIns="0" rIns="0" bIns="0" rtlCol="0" anchor="ctr"/>
+          <a:lstStyle/>
+          <a:p>
+            <a:pPr indent="0" marL="0">
+              <a:buNone/>
+            </a:pPr>
+            <a:r>
+              <a:rPr lang="en-US" sz="1200" dirty="0">
+                <a:solidFill>
+                  <a:srgbClr val="1A1A1A"/>
+                </a:solidFill>
+                <a:latin typeface="Inter" pitchFamily="34" charset="0"/>
+                <a:ea typeface="Inter" pitchFamily="34" charset="-122"/>
+                <a:cs typeface="Inter" pitchFamily="34" charset="-120"/>
+              </a:rPr>
+              <a:t>AUDI RENO</a:t>
+            </a:r>
+            <a:endParaRPr lang="en-US" sz="1200" dirty="0"/>
+          </a:p>
+        </p:txBody>
+      </p:sp>
+      <p:sp>
+        <p:nvSpPr>
+          <p:cNvPr id="136" name="Shape 134"/>
           <p:cNvSpPr/>
           <p:nvPr/>
         </p:nvSpPr>
         <p:spPr>
           <a:xfrm>
-            <a:off x="11521440" y="2243507"/>
-            <a:ext cx="54864" cy="157062"/>
+            <a:off x="8665163" y="2253700"/>
+            <a:ext cx="98927" cy="136676"/>
           </a:xfrm>
           <a:prstGeom prst="rect">
             <a:avLst/>
@@ -13634,7 +13557,144 @@
       </p:sp>
       <p:sp>
         <p:nvSpPr>
+          <p:cNvPr id="137" name="Text 135"/>
+          <p:cNvSpPr txBox="1"/>
+          <p:nvPr/>
+        </p:nvSpPr>
+        <p:spPr>
+          <a:xfrm>
+            <a:off x="8951976" y="2197787"/>
+            <a:ext cx="1005840" cy="248502"/>
+          </a:xfrm>
+          <a:prstGeom prst="rect">
+            <a:avLst/>
+          </a:prstGeom>
+          <a:noFill/>
+          <a:ln/>
+        </p:spPr>
+        <p:txBody>
+          <a:bodyPr wrap="square" lIns="0" tIns="0" rIns="0" bIns="0" rtlCol="0" anchor="ctr"/>
+          <a:lstStyle/>
+          <a:p>
+            <a:pPr algn="r" indent="0" marL="0">
+              <a:buNone/>
+            </a:pPr>
+            <a:r>
+              <a:rPr lang="en-US" sz="1300" b="1" dirty="0">
+                <a:solidFill>
+                  <a:srgbClr val="A82B26"/>
+                </a:solidFill>
+                <a:latin typeface="Inter" pitchFamily="34" charset="0"/>
+                <a:ea typeface="Inter" pitchFamily="34" charset="-122"/>
+                <a:cs typeface="Inter" pitchFamily="34" charset="-120"/>
+              </a:rPr>
+              <a:t>−$39K</a:t>
+            </a:r>
+            <a:endParaRPr lang="en-US" sz="1300" dirty="0"/>
+          </a:p>
+        </p:txBody>
+      </p:sp>
+      <p:sp>
+        <p:nvSpPr>
           <p:cNvPr id="138" name="Text 136"/>
+          <p:cNvSpPr txBox="1"/>
+          <p:nvPr/>
+        </p:nvSpPr>
+        <p:spPr>
+          <a:xfrm>
+            <a:off x="9957816" y="2197787"/>
+            <a:ext cx="868680" cy="248502"/>
+          </a:xfrm>
+          <a:prstGeom prst="rect">
+            <a:avLst/>
+          </a:prstGeom>
+          <a:noFill/>
+          <a:ln/>
+        </p:spPr>
+        <p:txBody>
+          <a:bodyPr wrap="square" lIns="0" tIns="0" rIns="0" bIns="0" rtlCol="0" anchor="ctr"/>
+          <a:lstStyle/>
+          <a:p>
+            <a:pPr algn="r" indent="0" marL="0">
+              <a:buNone/>
+            </a:pPr>
+            <a:r>
+              <a:rPr lang="en-US" sz="1300" dirty="0">
+                <a:solidFill>
+                  <a:srgbClr val="595959"/>
+                </a:solidFill>
+                <a:latin typeface="Inter" pitchFamily="34" charset="0"/>
+                <a:ea typeface="Inter" pitchFamily="34" charset="-122"/>
+                <a:cs typeface="Inter" pitchFamily="34" charset="-120"/>
+              </a:rPr>
+              <a:t>−522</a:t>
+            </a:r>
+            <a:endParaRPr lang="en-US" sz="1300" dirty="0"/>
+          </a:p>
+        </p:txBody>
+      </p:sp>
+      <p:sp>
+        <p:nvSpPr>
+          <p:cNvPr id="139" name="Text 137"/>
+          <p:cNvSpPr txBox="1"/>
+          <p:nvPr/>
+        </p:nvSpPr>
+        <p:spPr>
+          <a:xfrm>
+            <a:off x="10826496" y="2197787"/>
+            <a:ext cx="640080" cy="248502"/>
+          </a:xfrm>
+          <a:prstGeom prst="rect">
+            <a:avLst/>
+          </a:prstGeom>
+          <a:noFill/>
+          <a:ln/>
+        </p:spPr>
+        <p:txBody>
+          <a:bodyPr wrap="square" lIns="0" tIns="0" rIns="0" bIns="0" rtlCol="0" anchor="ctr"/>
+          <a:lstStyle/>
+          <a:p>
+            <a:pPr algn="r" indent="0" marL="0">
+              <a:buNone/>
+            </a:pPr>
+            <a:r>
+              <a:rPr lang="en-US" sz="1300" dirty="0">
+                <a:solidFill>
+                  <a:srgbClr val="595959"/>
+                </a:solidFill>
+                <a:latin typeface="Inter" pitchFamily="34" charset="0"/>
+                <a:ea typeface="Inter" pitchFamily="34" charset="-122"/>
+                <a:cs typeface="Inter" pitchFamily="34" charset="-120"/>
+              </a:rPr>
+              <a:t>0.1%</a:t>
+            </a:r>
+            <a:endParaRPr lang="en-US" sz="1300" dirty="0"/>
+          </a:p>
+        </p:txBody>
+      </p:sp>
+      <p:sp>
+        <p:nvSpPr>
+          <p:cNvPr id="140" name="Shape 138"/>
+          <p:cNvSpPr/>
+          <p:nvPr/>
+        </p:nvSpPr>
+        <p:spPr>
+          <a:xfrm>
+            <a:off x="11521440" y="2243507"/>
+            <a:ext cx="54864" cy="157062"/>
+          </a:xfrm>
+          <a:prstGeom prst="rect">
+            <a:avLst/>
+          </a:prstGeom>
+          <a:solidFill>
+            <a:srgbClr val="9AA3AD"/>
+          </a:solidFill>
+          <a:ln/>
+        </p:spPr>
+      </p:sp>
+      <p:sp>
+        <p:nvSpPr>
+          <p:cNvPr id="141" name="Text 139"/>
           <p:cNvSpPr txBox="1"/>
           <p:nvPr/>
         </p:nvSpPr>
@@ -13673,7 +13733,7 @@
       </p:sp>
       <p:sp>
         <p:nvSpPr>
-          <p:cNvPr id="139" name="Text 137"/>
+          <p:cNvPr id="142" name="Text 140"/>
           <p:cNvSpPr txBox="1"/>
           <p:nvPr/>
         </p:nvSpPr>
@@ -13712,7 +13772,7 @@
       </p:sp>
       <p:sp>
         <p:nvSpPr>
-          <p:cNvPr id="140" name="Shape 138"/>
+          <p:cNvPr id="143" name="Shape 141"/>
           <p:cNvSpPr/>
           <p:nvPr/>
         </p:nvSpPr>
@@ -13732,7 +13792,7 @@
       </p:sp>
       <p:sp>
         <p:nvSpPr>
-          <p:cNvPr id="141" name="Text 139"/>
+          <p:cNvPr id="144" name="Text 142"/>
           <p:cNvSpPr txBox="1"/>
           <p:nvPr/>
         </p:nvSpPr>
@@ -13763,15 +13823,15 @@
                 <a:ea typeface="Inter" pitchFamily="34" charset="-122"/>
                 <a:cs typeface="Inter" pitchFamily="34" charset="-120"/>
               </a:rPr>
-              <a:t>−$56K</a:t>
-            </a:r>
-            <a:endParaRPr lang="en-US" sz="1300" dirty="0"/>
-          </a:p>
-        </p:txBody>
-      </p:sp>
-      <p:sp>
-        <p:nvSpPr>
-          <p:cNvPr id="142" name="Text 140"/>
+              <a:t>−$42K</a:t>
+            </a:r>
+            <a:endParaRPr lang="en-US" sz="1300" dirty="0"/>
+          </a:p>
+        </p:txBody>
+      </p:sp>
+      <p:sp>
+        <p:nvSpPr>
+          <p:cNvPr id="145" name="Text 143"/>
           <p:cNvSpPr txBox="1"/>
           <p:nvPr/>
         </p:nvSpPr>
@@ -13802,15 +13862,15 @@
                 <a:ea typeface="Inter" pitchFamily="34" charset="-122"/>
                 <a:cs typeface="Inter" pitchFamily="34" charset="-120"/>
               </a:rPr>
-              <a:t>−754</a:t>
-            </a:r>
-            <a:endParaRPr lang="en-US" sz="1300" dirty="0"/>
-          </a:p>
-        </p:txBody>
-      </p:sp>
-      <p:sp>
-        <p:nvSpPr>
-          <p:cNvPr id="143" name="Text 141"/>
+              <a:t>−566</a:t>
+            </a:r>
+            <a:endParaRPr lang="en-US" sz="1300" dirty="0"/>
+          </a:p>
+        </p:txBody>
+      </p:sp>
+      <p:sp>
+        <p:nvSpPr>
+          <p:cNvPr id="146" name="Text 144"/>
           <p:cNvSpPr txBox="1"/>
           <p:nvPr/>
         </p:nvSpPr>
@@ -13849,7 +13909,7 @@
       </p:sp>
       <p:sp>
         <p:nvSpPr>
-          <p:cNvPr id="144" name="Shape 142"/>
+          <p:cNvPr id="147" name="Shape 145"/>
           <p:cNvSpPr/>
           <p:nvPr/>
         </p:nvSpPr>
@@ -13857,6 +13917,104 @@
           <a:xfrm>
             <a:off x="11521440" y="2492009"/>
             <a:ext cx="54864" cy="157062"/>
+          </a:xfrm>
+          <a:prstGeom prst="rect">
+            <a:avLst/>
+          </a:prstGeom>
+          <a:solidFill>
+            <a:srgbClr val="9AA3AD"/>
+          </a:solidFill>
+          <a:ln/>
+        </p:spPr>
+      </p:sp>
+      <p:sp>
+        <p:nvSpPr>
+          <p:cNvPr id="148" name="Text 146"/>
+          <p:cNvSpPr txBox="1"/>
+          <p:nvPr/>
+        </p:nvSpPr>
+        <p:spPr>
+          <a:xfrm>
+            <a:off x="6208776" y="2694791"/>
+            <a:ext cx="310896" cy="248502"/>
+          </a:xfrm>
+          <a:prstGeom prst="rect">
+            <a:avLst/>
+          </a:prstGeom>
+          <a:noFill/>
+          <a:ln/>
+        </p:spPr>
+        <p:txBody>
+          <a:bodyPr wrap="square" lIns="0" tIns="0" rIns="0" bIns="0" rtlCol="0" anchor="ctr"/>
+          <a:lstStyle/>
+          <a:p>
+            <a:pPr algn="r" indent="0" marL="0">
+              <a:buNone/>
+            </a:pPr>
+            <a:r>
+              <a:rPr lang="en-US" sz="1200" dirty="0">
+                <a:solidFill>
+                  <a:srgbClr val="9AA3AD"/>
+                </a:solidFill>
+                <a:latin typeface="Inter" pitchFamily="34" charset="0"/>
+                <a:ea typeface="Inter" pitchFamily="34" charset="-122"/>
+                <a:cs typeface="Inter" pitchFamily="34" charset="-120"/>
+              </a:rPr>
+              <a:t>22</a:t>
+            </a:r>
+            <a:endParaRPr lang="en-US" sz="1200" dirty="0"/>
+          </a:p>
+        </p:txBody>
+      </p:sp>
+      <p:sp>
+        <p:nvSpPr>
+          <p:cNvPr id="149" name="Text 147"/>
+          <p:cNvSpPr txBox="1"/>
+          <p:nvPr/>
+        </p:nvSpPr>
+        <p:spPr>
+          <a:xfrm>
+            <a:off x="6565392" y="2694791"/>
+            <a:ext cx="1783080" cy="248502"/>
+          </a:xfrm>
+          <a:prstGeom prst="rect">
+            <a:avLst/>
+          </a:prstGeom>
+          <a:noFill/>
+          <a:ln/>
+        </p:spPr>
+        <p:txBody>
+          <a:bodyPr wrap="square" lIns="0" tIns="0" rIns="0" bIns="0" rtlCol="0" anchor="ctr"/>
+          <a:lstStyle/>
+          <a:p>
+            <a:pPr indent="0" marL="0">
+              <a:buNone/>
+            </a:pPr>
+            <a:r>
+              <a:rPr lang="en-US" sz="1200" dirty="0">
+                <a:solidFill>
+                  <a:srgbClr val="1A1A1A"/>
+                </a:solidFill>
+                <a:latin typeface="Inter" pitchFamily="34" charset="0"/>
+                <a:ea typeface="Inter" pitchFamily="34" charset="-122"/>
+                <a:cs typeface="Inter" pitchFamily="34" charset="-120"/>
+              </a:rPr>
+              <a:t>SUBARU LV</a:t>
+            </a:r>
+            <a:endParaRPr lang="en-US" sz="1200" dirty="0"/>
+          </a:p>
+        </p:txBody>
+      </p:sp>
+      <p:sp>
+        <p:nvSpPr>
+          <p:cNvPr id="150" name="Shape 148"/>
+          <p:cNvSpPr/>
+          <p:nvPr/>
+        </p:nvSpPr>
+        <p:spPr>
+          <a:xfrm>
+            <a:off x="8634865" y="2750703"/>
+            <a:ext cx="129225" cy="136676"/>
           </a:xfrm>
           <a:prstGeom prst="rect">
             <a:avLst/>
@@ -13869,13 +14027,130 @@
       </p:sp>
       <p:sp>
         <p:nvSpPr>
-          <p:cNvPr id="145" name="Text 143"/>
-          <p:cNvSpPr txBox="1"/>
-          <p:nvPr/>
-        </p:nvSpPr>
-        <p:spPr>
-          <a:xfrm>
-            <a:off x="6208776" y="2694791"/>
+          <p:cNvPr id="151" name="Text 149"/>
+          <p:cNvSpPr txBox="1"/>
+          <p:nvPr/>
+        </p:nvSpPr>
+        <p:spPr>
+          <a:xfrm>
+            <a:off x="8951976" y="2694791"/>
+            <a:ext cx="1005840" cy="248502"/>
+          </a:xfrm>
+          <a:prstGeom prst="rect">
+            <a:avLst/>
+          </a:prstGeom>
+          <a:noFill/>
+          <a:ln/>
+        </p:spPr>
+        <p:txBody>
+          <a:bodyPr wrap="square" lIns="0" tIns="0" rIns="0" bIns="0" rtlCol="0" anchor="ctr"/>
+          <a:lstStyle/>
+          <a:p>
+            <a:pPr algn="r" indent="0" marL="0">
+              <a:buNone/>
+            </a:pPr>
+            <a:r>
+              <a:rPr lang="en-US" sz="1300" b="1" dirty="0">
+                <a:solidFill>
+                  <a:srgbClr val="A82B26"/>
+                </a:solidFill>
+                <a:latin typeface="Inter" pitchFamily="34" charset="0"/>
+                <a:ea typeface="Inter" pitchFamily="34" charset="-122"/>
+                <a:cs typeface="Inter" pitchFamily="34" charset="-120"/>
+              </a:rPr>
+              <a:t>−$51K</a:t>
+            </a:r>
+            <a:endParaRPr lang="en-US" sz="1300" dirty="0"/>
+          </a:p>
+        </p:txBody>
+      </p:sp>
+      <p:sp>
+        <p:nvSpPr>
+          <p:cNvPr id="152" name="Text 150"/>
+          <p:cNvSpPr txBox="1"/>
+          <p:nvPr/>
+        </p:nvSpPr>
+        <p:spPr>
+          <a:xfrm>
+            <a:off x="9957816" y="2694791"/>
+            <a:ext cx="868680" cy="248502"/>
+          </a:xfrm>
+          <a:prstGeom prst="rect">
+            <a:avLst/>
+          </a:prstGeom>
+          <a:noFill/>
+          <a:ln/>
+        </p:spPr>
+        <p:txBody>
+          <a:bodyPr wrap="square" lIns="0" tIns="0" rIns="0" bIns="0" rtlCol="0" anchor="ctr"/>
+          <a:lstStyle/>
+          <a:p>
+            <a:pPr algn="r" indent="0" marL="0">
+              <a:buNone/>
+            </a:pPr>
+            <a:r>
+              <a:rPr lang="en-US" sz="1300" dirty="0">
+                <a:solidFill>
+                  <a:srgbClr val="595959"/>
+                </a:solidFill>
+                <a:latin typeface="Inter" pitchFamily="34" charset="0"/>
+                <a:ea typeface="Inter" pitchFamily="34" charset="-122"/>
+                <a:cs typeface="Inter" pitchFamily="34" charset="-120"/>
+              </a:rPr>
+              <a:t>−682</a:t>
+            </a:r>
+            <a:endParaRPr lang="en-US" sz="1300" dirty="0"/>
+          </a:p>
+        </p:txBody>
+      </p:sp>
+      <p:sp>
+        <p:nvSpPr>
+          <p:cNvPr id="153" name="Text 151"/>
+          <p:cNvSpPr txBox="1"/>
+          <p:nvPr/>
+        </p:nvSpPr>
+        <p:spPr>
+          <a:xfrm>
+            <a:off x="10826496" y="2694791"/>
+            <a:ext cx="640080" cy="248502"/>
+          </a:xfrm>
+          <a:prstGeom prst="rect">
+            <a:avLst/>
+          </a:prstGeom>
+          <a:noFill/>
+          <a:ln/>
+        </p:spPr>
+        <p:txBody>
+          <a:bodyPr wrap="square" lIns="0" tIns="0" rIns="0" bIns="0" rtlCol="0" anchor="ctr"/>
+          <a:lstStyle/>
+          <a:p>
+            <a:pPr algn="r" indent="0" marL="0">
+              <a:buNone/>
+            </a:pPr>
+            <a:r>
+              <a:rPr lang="en-US" sz="1300" dirty="0">
+                <a:solidFill>
+                  <a:srgbClr val="595959"/>
+                </a:solidFill>
+                <a:latin typeface="Inter" pitchFamily="34" charset="0"/>
+                <a:ea typeface="Inter" pitchFamily="34" charset="-122"/>
+                <a:cs typeface="Inter" pitchFamily="34" charset="-120"/>
+              </a:rPr>
+              <a:t>10.2%</a:t>
+            </a:r>
+            <a:endParaRPr lang="en-US" sz="1300" dirty="0"/>
+          </a:p>
+        </p:txBody>
+      </p:sp>
+      <p:sp>
+        <p:nvSpPr>
+          <p:cNvPr id="154" name="Text 152"/>
+          <p:cNvSpPr txBox="1"/>
+          <p:nvPr/>
+        </p:nvSpPr>
+        <p:spPr>
+          <a:xfrm>
+            <a:off x="6208776" y="2943292"/>
             <a:ext cx="310896" cy="248502"/>
           </a:xfrm>
           <a:prstGeom prst="rect">
@@ -13900,7 +14175,7 @@
                 <a:ea typeface="Inter" pitchFamily="34" charset="-122"/>
                 <a:cs typeface="Inter" pitchFamily="34" charset="-120"/>
               </a:rPr>
-              <a:t>22</a:t>
+              <a:t>23</a:t>
             </a:r>
             <a:endParaRPr lang="en-US" sz="1200" dirty="0"/>
           </a:p>
@@ -13908,13 +14183,13 @@
       </p:sp>
       <p:sp>
         <p:nvSpPr>
-          <p:cNvPr id="146" name="Text 144"/>
-          <p:cNvSpPr txBox="1"/>
-          <p:nvPr/>
-        </p:nvSpPr>
-        <p:spPr>
-          <a:xfrm>
-            <a:off x="6565392" y="2694791"/>
+          <p:cNvPr id="155" name="Text 153"/>
+          <p:cNvSpPr txBox="1"/>
+          <p:nvPr/>
+        </p:nvSpPr>
+        <p:spPr>
+          <a:xfrm>
+            <a:off x="6565392" y="2943292"/>
             <a:ext cx="1783080" cy="248502"/>
           </a:xfrm>
           <a:prstGeom prst="rect">
@@ -13939,7 +14214,7 @@
                 <a:ea typeface="Inter" pitchFamily="34" charset="-122"/>
                 <a:cs typeface="Inter" pitchFamily="34" charset="-120"/>
               </a:rPr>
-              <a:t>SUBARU LV</a:t>
+              <a:t>LEXUS</a:t>
             </a:r>
             <a:endParaRPr lang="en-US" sz="1200" dirty="0"/>
           </a:p>
@@ -13947,14 +14222,14 @@
       </p:sp>
       <p:sp>
         <p:nvSpPr>
-          <p:cNvPr id="147" name="Shape 145"/>
+          <p:cNvPr id="156" name="Shape 154"/>
           <p:cNvSpPr/>
           <p:nvPr/>
         </p:nvSpPr>
         <p:spPr>
           <a:xfrm>
-            <a:off x="8634865" y="2750703"/>
-            <a:ext cx="129225" cy="136676"/>
+            <a:off x="8634819" y="2999205"/>
+            <a:ext cx="129271" cy="136676"/>
           </a:xfrm>
           <a:prstGeom prst="rect">
             <a:avLst/>
@@ -13967,13 +14242,13 @@
       </p:sp>
       <p:sp>
         <p:nvSpPr>
-          <p:cNvPr id="148" name="Text 146"/>
-          <p:cNvSpPr txBox="1"/>
-          <p:nvPr/>
-        </p:nvSpPr>
-        <p:spPr>
-          <a:xfrm>
-            <a:off x="8951976" y="2694791"/>
+          <p:cNvPr id="157" name="Text 155"/>
+          <p:cNvSpPr txBox="1"/>
+          <p:nvPr/>
+        </p:nvSpPr>
+        <p:spPr>
+          <a:xfrm>
+            <a:off x="8951976" y="2943292"/>
             <a:ext cx="1005840" cy="248502"/>
           </a:xfrm>
           <a:prstGeom prst="rect">
@@ -13998,21 +14273,21 @@
                 <a:ea typeface="Inter" pitchFamily="34" charset="-122"/>
                 <a:cs typeface="Inter" pitchFamily="34" charset="-120"/>
               </a:rPr>
-              <a:t>−$68K</a:t>
-            </a:r>
-            <a:endParaRPr lang="en-US" sz="1300" dirty="0"/>
-          </a:p>
-        </p:txBody>
-      </p:sp>
-      <p:sp>
-        <p:nvSpPr>
-          <p:cNvPr id="149" name="Text 147"/>
-          <p:cNvSpPr txBox="1"/>
-          <p:nvPr/>
-        </p:nvSpPr>
-        <p:spPr>
-          <a:xfrm>
-            <a:off x="9957816" y="2694791"/>
+              <a:t>−$51K</a:t>
+            </a:r>
+            <a:endParaRPr lang="en-US" sz="1300" dirty="0"/>
+          </a:p>
+        </p:txBody>
+      </p:sp>
+      <p:sp>
+        <p:nvSpPr>
+          <p:cNvPr id="158" name="Text 156"/>
+          <p:cNvSpPr txBox="1"/>
+          <p:nvPr/>
+        </p:nvSpPr>
+        <p:spPr>
+          <a:xfrm>
+            <a:off x="9957816" y="2943292"/>
             <a:ext cx="868680" cy="248502"/>
           </a:xfrm>
           <a:prstGeom prst="rect">
@@ -14037,21 +14312,21 @@
                 <a:ea typeface="Inter" pitchFamily="34" charset="-122"/>
                 <a:cs typeface="Inter" pitchFamily="34" charset="-120"/>
               </a:rPr>
-              <a:t>−909</a:t>
-            </a:r>
-            <a:endParaRPr lang="en-US" sz="1300" dirty="0"/>
-          </a:p>
-        </p:txBody>
-      </p:sp>
-      <p:sp>
-        <p:nvSpPr>
-          <p:cNvPr id="150" name="Text 148"/>
-          <p:cNvSpPr txBox="1"/>
-          <p:nvPr/>
-        </p:nvSpPr>
-        <p:spPr>
-          <a:xfrm>
-            <a:off x="10826496" y="2694791"/>
+              <a:t>−682</a:t>
+            </a:r>
+            <a:endParaRPr lang="en-US" sz="1300" dirty="0"/>
+          </a:p>
+        </p:txBody>
+      </p:sp>
+      <p:sp>
+        <p:nvSpPr>
+          <p:cNvPr id="159" name="Text 157"/>
+          <p:cNvSpPr txBox="1"/>
+          <p:nvPr/>
+        </p:nvSpPr>
+        <p:spPr>
+          <a:xfrm>
+            <a:off x="10826496" y="2943292"/>
             <a:ext cx="640080" cy="248502"/>
           </a:xfrm>
           <a:prstGeom prst="rect">
@@ -14076,100 +14351,22 @@
                 <a:ea typeface="Inter" pitchFamily="34" charset="-122"/>
                 <a:cs typeface="Inter" pitchFamily="34" charset="-120"/>
               </a:rPr>
-              <a:t>10.2%</a:t>
-            </a:r>
-            <a:endParaRPr lang="en-US" sz="1300" dirty="0"/>
-          </a:p>
-        </p:txBody>
-      </p:sp>
-      <p:sp>
-        <p:nvSpPr>
-          <p:cNvPr id="151" name="Text 149"/>
-          <p:cNvSpPr txBox="1"/>
-          <p:nvPr/>
-        </p:nvSpPr>
-        <p:spPr>
-          <a:xfrm>
-            <a:off x="6208776" y="2943292"/>
-            <a:ext cx="310896" cy="248502"/>
-          </a:xfrm>
-          <a:prstGeom prst="rect">
-            <a:avLst/>
-          </a:prstGeom>
-          <a:noFill/>
-          <a:ln/>
-        </p:spPr>
-        <p:txBody>
-          <a:bodyPr wrap="square" lIns="0" tIns="0" rIns="0" bIns="0" rtlCol="0" anchor="ctr"/>
-          <a:lstStyle/>
-          <a:p>
-            <a:pPr algn="r" indent="0" marL="0">
-              <a:buNone/>
-            </a:pPr>
-            <a:r>
-              <a:rPr lang="en-US" sz="1200" dirty="0">
-                <a:solidFill>
-                  <a:srgbClr val="9AA3AD"/>
-                </a:solidFill>
-                <a:latin typeface="Inter" pitchFamily="34" charset="0"/>
-                <a:ea typeface="Inter" pitchFamily="34" charset="-122"/>
-                <a:cs typeface="Inter" pitchFamily="34" charset="-120"/>
-              </a:rPr>
-              <a:t>23</a:t>
-            </a:r>
-            <a:endParaRPr lang="en-US" sz="1200" dirty="0"/>
-          </a:p>
-        </p:txBody>
-      </p:sp>
-      <p:sp>
-        <p:nvSpPr>
-          <p:cNvPr id="152" name="Text 150"/>
-          <p:cNvSpPr txBox="1"/>
-          <p:nvPr/>
-        </p:nvSpPr>
-        <p:spPr>
-          <a:xfrm>
-            <a:off x="6565392" y="2943292"/>
-            <a:ext cx="1783080" cy="248502"/>
-          </a:xfrm>
-          <a:prstGeom prst="rect">
-            <a:avLst/>
-          </a:prstGeom>
-          <a:noFill/>
-          <a:ln/>
-        </p:spPr>
-        <p:txBody>
-          <a:bodyPr wrap="square" lIns="0" tIns="0" rIns="0" bIns="0" rtlCol="0" anchor="ctr"/>
-          <a:lstStyle/>
-          <a:p>
-            <a:pPr indent="0" marL="0">
-              <a:buNone/>
-            </a:pPr>
-            <a:r>
-              <a:rPr lang="en-US" sz="1200" dirty="0">
-                <a:solidFill>
-                  <a:srgbClr val="1A1A1A"/>
-                </a:solidFill>
-                <a:latin typeface="Inter" pitchFamily="34" charset="0"/>
-                <a:ea typeface="Inter" pitchFamily="34" charset="-122"/>
-                <a:cs typeface="Inter" pitchFamily="34" charset="-120"/>
-              </a:rPr>
-              <a:t>LEXUS</a:t>
-            </a:r>
-            <a:endParaRPr lang="en-US" sz="1200" dirty="0"/>
-          </a:p>
-        </p:txBody>
-      </p:sp>
-      <p:sp>
-        <p:nvSpPr>
-          <p:cNvPr id="153" name="Shape 151"/>
+              <a:t>0.0%</a:t>
+            </a:r>
+            <a:endParaRPr lang="en-US" sz="1300" dirty="0"/>
+          </a:p>
+        </p:txBody>
+      </p:sp>
+      <p:sp>
+        <p:nvSpPr>
+          <p:cNvPr id="160" name="Shape 158"/>
           <p:cNvSpPr/>
           <p:nvPr/>
         </p:nvSpPr>
         <p:spPr>
           <a:xfrm>
-            <a:off x="8634819" y="2999205"/>
-            <a:ext cx="129271" cy="136676"/>
+            <a:off x="11521440" y="2989012"/>
+            <a:ext cx="54864" cy="157062"/>
           </a:xfrm>
           <a:prstGeom prst="rect">
             <a:avLst/>
@@ -14182,131 +14379,92 @@
       </p:sp>
       <p:sp>
         <p:nvSpPr>
-          <p:cNvPr id="154" name="Text 152"/>
-          <p:cNvSpPr txBox="1"/>
-          <p:nvPr/>
-        </p:nvSpPr>
-        <p:spPr>
-          <a:xfrm>
-            <a:off x="8951976" y="2943292"/>
-            <a:ext cx="1005840" cy="248502"/>
-          </a:xfrm>
-          <a:prstGeom prst="rect">
-            <a:avLst/>
-          </a:prstGeom>
-          <a:noFill/>
-          <a:ln/>
-        </p:spPr>
-        <p:txBody>
-          <a:bodyPr wrap="square" lIns="0" tIns="0" rIns="0" bIns="0" rtlCol="0" anchor="ctr"/>
-          <a:lstStyle/>
-          <a:p>
-            <a:pPr algn="r" indent="0" marL="0">
-              <a:buNone/>
-            </a:pPr>
-            <a:r>
-              <a:rPr lang="en-US" sz="1300" b="1" dirty="0">
-                <a:solidFill>
-                  <a:srgbClr val="A82B26"/>
-                </a:solidFill>
-                <a:latin typeface="Inter" pitchFamily="34" charset="0"/>
-                <a:ea typeface="Inter" pitchFamily="34" charset="-122"/>
-                <a:cs typeface="Inter" pitchFamily="34" charset="-120"/>
-              </a:rPr>
-              <a:t>−$68K</a:t>
-            </a:r>
-            <a:endParaRPr lang="en-US" sz="1300" dirty="0"/>
-          </a:p>
-        </p:txBody>
-      </p:sp>
-      <p:sp>
-        <p:nvSpPr>
-          <p:cNvPr id="155" name="Text 153"/>
-          <p:cNvSpPr txBox="1"/>
-          <p:nvPr/>
-        </p:nvSpPr>
-        <p:spPr>
-          <a:xfrm>
-            <a:off x="9957816" y="2943292"/>
-            <a:ext cx="868680" cy="248502"/>
-          </a:xfrm>
-          <a:prstGeom prst="rect">
-            <a:avLst/>
-          </a:prstGeom>
-          <a:noFill/>
-          <a:ln/>
-        </p:spPr>
-        <p:txBody>
-          <a:bodyPr wrap="square" lIns="0" tIns="0" rIns="0" bIns="0" rtlCol="0" anchor="ctr"/>
-          <a:lstStyle/>
-          <a:p>
-            <a:pPr algn="r" indent="0" marL="0">
-              <a:buNone/>
-            </a:pPr>
-            <a:r>
-              <a:rPr lang="en-US" sz="1300" dirty="0">
-                <a:solidFill>
-                  <a:srgbClr val="595959"/>
-                </a:solidFill>
-                <a:latin typeface="Inter" pitchFamily="34" charset="0"/>
-                <a:ea typeface="Inter" pitchFamily="34" charset="-122"/>
-                <a:cs typeface="Inter" pitchFamily="34" charset="-120"/>
-              </a:rPr>
-              <a:t>−909</a:t>
-            </a:r>
-            <a:endParaRPr lang="en-US" sz="1300" dirty="0"/>
-          </a:p>
-        </p:txBody>
-      </p:sp>
-      <p:sp>
-        <p:nvSpPr>
-          <p:cNvPr id="156" name="Text 154"/>
-          <p:cNvSpPr txBox="1"/>
-          <p:nvPr/>
-        </p:nvSpPr>
-        <p:spPr>
-          <a:xfrm>
-            <a:off x="10826496" y="2943292"/>
-            <a:ext cx="640080" cy="248502"/>
-          </a:xfrm>
-          <a:prstGeom prst="rect">
-            <a:avLst/>
-          </a:prstGeom>
-          <a:noFill/>
-          <a:ln/>
-        </p:spPr>
-        <p:txBody>
-          <a:bodyPr wrap="square" lIns="0" tIns="0" rIns="0" bIns="0" rtlCol="0" anchor="ctr"/>
-          <a:lstStyle/>
-          <a:p>
-            <a:pPr algn="r" indent="0" marL="0">
-              <a:buNone/>
-            </a:pPr>
-            <a:r>
-              <a:rPr lang="en-US" sz="1300" dirty="0">
-                <a:solidFill>
-                  <a:srgbClr val="595959"/>
-                </a:solidFill>
-                <a:latin typeface="Inter" pitchFamily="34" charset="0"/>
-                <a:ea typeface="Inter" pitchFamily="34" charset="-122"/>
-                <a:cs typeface="Inter" pitchFamily="34" charset="-120"/>
-              </a:rPr>
-              <a:t>0.0%</a:t>
-            </a:r>
-            <a:endParaRPr lang="en-US" sz="1300" dirty="0"/>
-          </a:p>
-        </p:txBody>
-      </p:sp>
-      <p:sp>
-        <p:nvSpPr>
-          <p:cNvPr id="157" name="Shape 155"/>
+          <p:cNvPr id="161" name="Text 159"/>
+          <p:cNvSpPr txBox="1"/>
+          <p:nvPr/>
+        </p:nvSpPr>
+        <p:spPr>
+          <a:xfrm>
+            <a:off x="6208776" y="3191794"/>
+            <a:ext cx="310896" cy="248502"/>
+          </a:xfrm>
+          <a:prstGeom prst="rect">
+            <a:avLst/>
+          </a:prstGeom>
+          <a:noFill/>
+          <a:ln/>
+        </p:spPr>
+        <p:txBody>
+          <a:bodyPr wrap="square" lIns="0" tIns="0" rIns="0" bIns="0" rtlCol="0" anchor="ctr"/>
+          <a:lstStyle/>
+          <a:p>
+            <a:pPr algn="r" indent="0" marL="0">
+              <a:buNone/>
+            </a:pPr>
+            <a:r>
+              <a:rPr lang="en-US" sz="1200" dirty="0">
+                <a:solidFill>
+                  <a:srgbClr val="9AA3AD"/>
+                </a:solidFill>
+                <a:latin typeface="Inter" pitchFamily="34" charset="0"/>
+                <a:ea typeface="Inter" pitchFamily="34" charset="-122"/>
+                <a:cs typeface="Inter" pitchFamily="34" charset="-120"/>
+              </a:rPr>
+              <a:t>24</a:t>
+            </a:r>
+            <a:endParaRPr lang="en-US" sz="1200" dirty="0"/>
+          </a:p>
+        </p:txBody>
+      </p:sp>
+      <p:sp>
+        <p:nvSpPr>
+          <p:cNvPr id="162" name="Text 160"/>
+          <p:cNvSpPr txBox="1"/>
+          <p:nvPr/>
+        </p:nvSpPr>
+        <p:spPr>
+          <a:xfrm>
+            <a:off x="6565392" y="3191794"/>
+            <a:ext cx="1783080" cy="248502"/>
+          </a:xfrm>
+          <a:prstGeom prst="rect">
+            <a:avLst/>
+          </a:prstGeom>
+          <a:noFill/>
+          <a:ln/>
+        </p:spPr>
+        <p:txBody>
+          <a:bodyPr wrap="square" lIns="0" tIns="0" rIns="0" bIns="0" rtlCol="0" anchor="ctr"/>
+          <a:lstStyle/>
+          <a:p>
+            <a:pPr indent="0" marL="0">
+              <a:buNone/>
+            </a:pPr>
+            <a:r>
+              <a:rPr lang="en-US" sz="1200" dirty="0">
+                <a:solidFill>
+                  <a:srgbClr val="1A1A1A"/>
+                </a:solidFill>
+                <a:latin typeface="Inter" pitchFamily="34" charset="0"/>
+                <a:ea typeface="Inter" pitchFamily="34" charset="-122"/>
+                <a:cs typeface="Inter" pitchFamily="34" charset="-120"/>
+              </a:rPr>
+              <a:t>KIA LV</a:t>
+            </a:r>
+            <a:endParaRPr lang="en-US" sz="1200" dirty="0"/>
+          </a:p>
+        </p:txBody>
+      </p:sp>
+      <p:sp>
+        <p:nvSpPr>
+          <p:cNvPr id="163" name="Shape 161"/>
           <p:cNvSpPr/>
           <p:nvPr/>
         </p:nvSpPr>
         <p:spPr>
           <a:xfrm>
-            <a:off x="11521440" y="2989012"/>
-            <a:ext cx="54864" cy="157062"/>
+            <a:off x="8627320" y="3247707"/>
+            <a:ext cx="136770" cy="136676"/>
           </a:xfrm>
           <a:prstGeom prst="rect">
             <a:avLst/>
@@ -14319,13 +14477,130 @@
       </p:sp>
       <p:sp>
         <p:nvSpPr>
-          <p:cNvPr id="158" name="Text 156"/>
-          <p:cNvSpPr txBox="1"/>
-          <p:nvPr/>
-        </p:nvSpPr>
-        <p:spPr>
-          <a:xfrm>
-            <a:off x="6208776" y="3191794"/>
+          <p:cNvPr id="164" name="Text 162"/>
+          <p:cNvSpPr txBox="1"/>
+          <p:nvPr/>
+        </p:nvSpPr>
+        <p:spPr>
+          <a:xfrm>
+            <a:off x="8951976" y="3191794"/>
+            <a:ext cx="1005840" cy="248502"/>
+          </a:xfrm>
+          <a:prstGeom prst="rect">
+            <a:avLst/>
+          </a:prstGeom>
+          <a:noFill/>
+          <a:ln/>
+        </p:spPr>
+        <p:txBody>
+          <a:bodyPr wrap="square" lIns="0" tIns="0" rIns="0" bIns="0" rtlCol="0" anchor="ctr"/>
+          <a:lstStyle/>
+          <a:p>
+            <a:pPr algn="r" indent="0" marL="0">
+              <a:buNone/>
+            </a:pPr>
+            <a:r>
+              <a:rPr lang="en-US" sz="1300" b="1" dirty="0">
+                <a:solidFill>
+                  <a:srgbClr val="A82B26"/>
+                </a:solidFill>
+                <a:latin typeface="Inter" pitchFamily="34" charset="0"/>
+                <a:ea typeface="Inter" pitchFamily="34" charset="-122"/>
+                <a:cs typeface="Inter" pitchFamily="34" charset="-120"/>
+              </a:rPr>
+              <a:t>−$54K</a:t>
+            </a:r>
+            <a:endParaRPr lang="en-US" sz="1300" dirty="0"/>
+          </a:p>
+        </p:txBody>
+      </p:sp>
+      <p:sp>
+        <p:nvSpPr>
+          <p:cNvPr id="165" name="Text 163"/>
+          <p:cNvSpPr txBox="1"/>
+          <p:nvPr/>
+        </p:nvSpPr>
+        <p:spPr>
+          <a:xfrm>
+            <a:off x="9957816" y="3191794"/>
+            <a:ext cx="868680" cy="248502"/>
+          </a:xfrm>
+          <a:prstGeom prst="rect">
+            <a:avLst/>
+          </a:prstGeom>
+          <a:noFill/>
+          <a:ln/>
+        </p:spPr>
+        <p:txBody>
+          <a:bodyPr wrap="square" lIns="0" tIns="0" rIns="0" bIns="0" rtlCol="0" anchor="ctr"/>
+          <a:lstStyle/>
+          <a:p>
+            <a:pPr algn="r" indent="0" marL="0">
+              <a:buNone/>
+            </a:pPr>
+            <a:r>
+              <a:rPr lang="en-US" sz="1300" dirty="0">
+                <a:solidFill>
+                  <a:srgbClr val="595959"/>
+                </a:solidFill>
+                <a:latin typeface="Inter" pitchFamily="34" charset="0"/>
+                <a:ea typeface="Inter" pitchFamily="34" charset="-122"/>
+                <a:cs typeface="Inter" pitchFamily="34" charset="-120"/>
+              </a:rPr>
+              <a:t>−794</a:t>
+            </a:r>
+            <a:endParaRPr lang="en-US" sz="1300" dirty="0"/>
+          </a:p>
+        </p:txBody>
+      </p:sp>
+      <p:sp>
+        <p:nvSpPr>
+          <p:cNvPr id="166" name="Text 164"/>
+          <p:cNvSpPr txBox="1"/>
+          <p:nvPr/>
+        </p:nvSpPr>
+        <p:spPr>
+          <a:xfrm>
+            <a:off x="10826496" y="3191794"/>
+            <a:ext cx="640080" cy="248502"/>
+          </a:xfrm>
+          <a:prstGeom prst="rect">
+            <a:avLst/>
+          </a:prstGeom>
+          <a:noFill/>
+          <a:ln/>
+        </p:spPr>
+        <p:txBody>
+          <a:bodyPr wrap="square" lIns="0" tIns="0" rIns="0" bIns="0" rtlCol="0" anchor="ctr"/>
+          <a:lstStyle/>
+          <a:p>
+            <a:pPr algn="r" indent="0" marL="0">
+              <a:buNone/>
+            </a:pPr>
+            <a:r>
+              <a:rPr lang="en-US" sz="1300" dirty="0">
+                <a:solidFill>
+                  <a:srgbClr val="595959"/>
+                </a:solidFill>
+                <a:latin typeface="Inter" pitchFamily="34" charset="0"/>
+                <a:ea typeface="Inter" pitchFamily="34" charset="-122"/>
+                <a:cs typeface="Inter" pitchFamily="34" charset="-120"/>
+              </a:rPr>
+              <a:t>5.2%</a:t>
+            </a:r>
+            <a:endParaRPr lang="en-US" sz="1300" dirty="0"/>
+          </a:p>
+        </p:txBody>
+      </p:sp>
+      <p:sp>
+        <p:nvSpPr>
+          <p:cNvPr id="167" name="Text 165"/>
+          <p:cNvSpPr txBox="1"/>
+          <p:nvPr/>
+        </p:nvSpPr>
+        <p:spPr>
+          <a:xfrm>
+            <a:off x="6208776" y="3440296"/>
             <a:ext cx="310896" cy="248502"/>
           </a:xfrm>
           <a:prstGeom prst="rect">
@@ -14350,7 +14625,7 @@
                 <a:ea typeface="Inter" pitchFamily="34" charset="-122"/>
                 <a:cs typeface="Inter" pitchFamily="34" charset="-120"/>
               </a:rPr>
-              <a:t>24</a:t>
+              <a:t>25</a:t>
             </a:r>
             <a:endParaRPr lang="en-US" sz="1200" dirty="0"/>
           </a:p>
@@ -14358,13 +14633,13 @@
       </p:sp>
       <p:sp>
         <p:nvSpPr>
-          <p:cNvPr id="159" name="Text 157"/>
-          <p:cNvSpPr txBox="1"/>
-          <p:nvPr/>
-        </p:nvSpPr>
-        <p:spPr>
-          <a:xfrm>
-            <a:off x="6565392" y="3191794"/>
+          <p:cNvPr id="168" name="Text 166"/>
+          <p:cNvSpPr txBox="1"/>
+          <p:nvPr/>
+        </p:nvSpPr>
+        <p:spPr>
+          <a:xfrm>
+            <a:off x="6565392" y="3440296"/>
             <a:ext cx="1783080" cy="248502"/>
           </a:xfrm>
           <a:prstGeom prst="rect">
@@ -14389,7 +14664,7 @@
                 <a:ea typeface="Inter" pitchFamily="34" charset="-122"/>
                 <a:cs typeface="Inter" pitchFamily="34" charset="-120"/>
               </a:rPr>
-              <a:t>KIA LV</a:t>
+              <a:t>CDJR POST FALLS</a:t>
             </a:r>
             <a:endParaRPr lang="en-US" sz="1200" dirty="0"/>
           </a:p>
@@ -14397,14 +14672,14 @@
       </p:sp>
       <p:sp>
         <p:nvSpPr>
-          <p:cNvPr id="160" name="Shape 158"/>
+          <p:cNvPr id="169" name="Shape 167"/>
           <p:cNvSpPr/>
           <p:nvPr/>
         </p:nvSpPr>
         <p:spPr>
           <a:xfrm>
-            <a:off x="8627320" y="3247707"/>
-            <a:ext cx="136770" cy="136676"/>
+            <a:off x="8624415" y="3496208"/>
+            <a:ext cx="139675" cy="136676"/>
           </a:xfrm>
           <a:prstGeom prst="rect">
             <a:avLst/>
@@ -14417,13 +14692,13 @@
       </p:sp>
       <p:sp>
         <p:nvSpPr>
-          <p:cNvPr id="161" name="Text 159"/>
-          <p:cNvSpPr txBox="1"/>
-          <p:nvPr/>
-        </p:nvSpPr>
-        <p:spPr>
-          <a:xfrm>
-            <a:off x="8951976" y="3191794"/>
+          <p:cNvPr id="170" name="Text 168"/>
+          <p:cNvSpPr txBox="1"/>
+          <p:nvPr/>
+        </p:nvSpPr>
+        <p:spPr>
+          <a:xfrm>
+            <a:off x="8951976" y="3440296"/>
             <a:ext cx="1005840" cy="248502"/>
           </a:xfrm>
           <a:prstGeom prst="rect">
@@ -14448,21 +14723,21 @@
                 <a:ea typeface="Inter" pitchFamily="34" charset="-122"/>
                 <a:cs typeface="Inter" pitchFamily="34" charset="-120"/>
               </a:rPr>
-              <a:t>−$72K</a:t>
-            </a:r>
-            <a:endParaRPr lang="en-US" sz="1300" dirty="0"/>
-          </a:p>
-        </p:txBody>
-      </p:sp>
-      <p:sp>
-        <p:nvSpPr>
-          <p:cNvPr id="162" name="Text 160"/>
-          <p:cNvSpPr txBox="1"/>
-          <p:nvPr/>
-        </p:nvSpPr>
-        <p:spPr>
-          <a:xfrm>
-            <a:off x="9957816" y="3191794"/>
+              <a:t>−$55K</a:t>
+            </a:r>
+            <a:endParaRPr lang="en-US" sz="1300" dirty="0"/>
+          </a:p>
+        </p:txBody>
+      </p:sp>
+      <p:sp>
+        <p:nvSpPr>
+          <p:cNvPr id="171" name="Text 169"/>
+          <p:cNvSpPr txBox="1"/>
+          <p:nvPr/>
+        </p:nvSpPr>
+        <p:spPr>
+          <a:xfrm>
+            <a:off x="9957816" y="3440296"/>
             <a:ext cx="868680" cy="248502"/>
           </a:xfrm>
           <a:prstGeom prst="rect">
@@ -14487,21 +14762,21 @@
                 <a:ea typeface="Inter" pitchFamily="34" charset="-122"/>
                 <a:cs typeface="Inter" pitchFamily="34" charset="-120"/>
               </a:rPr>
-              <a:t>−1,059</a:t>
-            </a:r>
-            <a:endParaRPr lang="en-US" sz="1300" dirty="0"/>
-          </a:p>
-        </p:txBody>
-      </p:sp>
-      <p:sp>
-        <p:nvSpPr>
-          <p:cNvPr id="163" name="Text 161"/>
-          <p:cNvSpPr txBox="1"/>
-          <p:nvPr/>
-        </p:nvSpPr>
-        <p:spPr>
-          <a:xfrm>
-            <a:off x="10826496" y="3191794"/>
+              <a:t>−736</a:t>
+            </a:r>
+            <a:endParaRPr lang="en-US" sz="1300" dirty="0"/>
+          </a:p>
+        </p:txBody>
+      </p:sp>
+      <p:sp>
+        <p:nvSpPr>
+          <p:cNvPr id="172" name="Text 170"/>
+          <p:cNvSpPr txBox="1"/>
+          <p:nvPr/>
+        </p:nvSpPr>
+        <p:spPr>
+          <a:xfrm>
+            <a:off x="10826496" y="3440296"/>
             <a:ext cx="640080" cy="248502"/>
           </a:xfrm>
           <a:prstGeom prst="rect">
@@ -14526,21 +14801,21 @@
                 <a:ea typeface="Inter" pitchFamily="34" charset="-122"/>
                 <a:cs typeface="Inter" pitchFamily="34" charset="-120"/>
               </a:rPr>
-              <a:t>5.2%</a:t>
-            </a:r>
-            <a:endParaRPr lang="en-US" sz="1300" dirty="0"/>
-          </a:p>
-        </p:txBody>
-      </p:sp>
-      <p:sp>
-        <p:nvSpPr>
-          <p:cNvPr id="164" name="Text 162"/>
-          <p:cNvSpPr txBox="1"/>
-          <p:nvPr/>
-        </p:nvSpPr>
-        <p:spPr>
-          <a:xfrm>
-            <a:off x="6208776" y="3440296"/>
+              <a:t>1.2%</a:t>
+            </a:r>
+            <a:endParaRPr lang="en-US" sz="1300" dirty="0"/>
+          </a:p>
+        </p:txBody>
+      </p:sp>
+      <p:sp>
+        <p:nvSpPr>
+          <p:cNvPr id="173" name="Text 171"/>
+          <p:cNvSpPr txBox="1"/>
+          <p:nvPr/>
+        </p:nvSpPr>
+        <p:spPr>
+          <a:xfrm>
+            <a:off x="6208776" y="3688797"/>
             <a:ext cx="310896" cy="248502"/>
           </a:xfrm>
           <a:prstGeom prst="rect">
@@ -14565,7 +14840,7 @@
                 <a:ea typeface="Inter" pitchFamily="34" charset="-122"/>
                 <a:cs typeface="Inter" pitchFamily="34" charset="-120"/>
               </a:rPr>
-              <a:t>25</a:t>
+              <a:t>26</a:t>
             </a:r>
             <a:endParaRPr lang="en-US" sz="1200" dirty="0"/>
           </a:p>
@@ -14573,13 +14848,13 @@
       </p:sp>
       <p:sp>
         <p:nvSpPr>
-          <p:cNvPr id="165" name="Text 163"/>
-          <p:cNvSpPr txBox="1"/>
-          <p:nvPr/>
-        </p:nvSpPr>
-        <p:spPr>
-          <a:xfrm>
-            <a:off x="6565392" y="3440296"/>
+          <p:cNvPr id="174" name="Text 172"/>
+          <p:cNvSpPr txBox="1"/>
+          <p:nvPr/>
+        </p:nvSpPr>
+        <p:spPr>
+          <a:xfrm>
+            <a:off x="6565392" y="3688797"/>
             <a:ext cx="1783080" cy="248502"/>
           </a:xfrm>
           <a:prstGeom prst="rect">
@@ -14604,7 +14879,7 @@
                 <a:ea typeface="Inter" pitchFamily="34" charset="-122"/>
                 <a:cs typeface="Inter" pitchFamily="34" charset="-120"/>
               </a:rPr>
-              <a:t>CDJR POST FALLS</a:t>
+              <a:t>NISSAN</a:t>
             </a:r>
             <a:endParaRPr lang="en-US" sz="1200" dirty="0"/>
           </a:p>
@@ -14612,14 +14887,14 @@
       </p:sp>
       <p:sp>
         <p:nvSpPr>
-          <p:cNvPr id="166" name="Shape 164"/>
+          <p:cNvPr id="175" name="Shape 173"/>
           <p:cNvSpPr/>
           <p:nvPr/>
         </p:nvSpPr>
         <p:spPr>
           <a:xfrm>
-            <a:off x="8624415" y="3496208"/>
-            <a:ext cx="139675" cy="136676"/>
+            <a:off x="8617980" y="3744710"/>
+            <a:ext cx="146110" cy="136676"/>
           </a:xfrm>
           <a:prstGeom prst="rect">
             <a:avLst/>
@@ -14632,13 +14907,13 @@
       </p:sp>
       <p:sp>
         <p:nvSpPr>
-          <p:cNvPr id="167" name="Text 165"/>
-          <p:cNvSpPr txBox="1"/>
-          <p:nvPr/>
-        </p:nvSpPr>
-        <p:spPr>
-          <a:xfrm>
-            <a:off x="8951976" y="3440296"/>
+          <p:cNvPr id="176" name="Text 174"/>
+          <p:cNvSpPr txBox="1"/>
+          <p:nvPr/>
+        </p:nvSpPr>
+        <p:spPr>
+          <a:xfrm>
+            <a:off x="8951976" y="3688797"/>
             <a:ext cx="1005840" cy="248502"/>
           </a:xfrm>
           <a:prstGeom prst="rect">
@@ -14663,21 +14938,21 @@
                 <a:ea typeface="Inter" pitchFamily="34" charset="-122"/>
                 <a:cs typeface="Inter" pitchFamily="34" charset="-120"/>
               </a:rPr>
-              <a:t>−$73K</a:t>
-            </a:r>
-            <a:endParaRPr lang="en-US" sz="1300" dirty="0"/>
-          </a:p>
-        </p:txBody>
-      </p:sp>
-      <p:sp>
-        <p:nvSpPr>
-          <p:cNvPr id="168" name="Text 166"/>
-          <p:cNvSpPr txBox="1"/>
-          <p:nvPr/>
-        </p:nvSpPr>
-        <p:spPr>
-          <a:xfrm>
-            <a:off x="9957816" y="3440296"/>
+              <a:t>−$58K</a:t>
+            </a:r>
+            <a:endParaRPr lang="en-US" sz="1300" dirty="0"/>
+          </a:p>
+        </p:txBody>
+      </p:sp>
+      <p:sp>
+        <p:nvSpPr>
+          <p:cNvPr id="177" name="Text 175"/>
+          <p:cNvSpPr txBox="1"/>
+          <p:nvPr/>
+        </p:nvSpPr>
+        <p:spPr>
+          <a:xfrm>
+            <a:off x="9957816" y="3688797"/>
             <a:ext cx="868680" cy="248502"/>
           </a:xfrm>
           <a:prstGeom prst="rect">
@@ -14702,21 +14977,21 @@
                 <a:ea typeface="Inter" pitchFamily="34" charset="-122"/>
                 <a:cs typeface="Inter" pitchFamily="34" charset="-120"/>
               </a:rPr>
-              <a:t>−981</a:t>
-            </a:r>
-            <a:endParaRPr lang="en-US" sz="1300" dirty="0"/>
-          </a:p>
-        </p:txBody>
-      </p:sp>
-      <p:sp>
-        <p:nvSpPr>
-          <p:cNvPr id="169" name="Text 167"/>
-          <p:cNvSpPr txBox="1"/>
-          <p:nvPr/>
-        </p:nvSpPr>
-        <p:spPr>
-          <a:xfrm>
-            <a:off x="10826496" y="3440296"/>
+              <a:t>−972</a:t>
+            </a:r>
+            <a:endParaRPr lang="en-US" sz="1300" dirty="0"/>
+          </a:p>
+        </p:txBody>
+      </p:sp>
+      <p:sp>
+        <p:nvSpPr>
+          <p:cNvPr id="178" name="Text 176"/>
+          <p:cNvSpPr txBox="1"/>
+          <p:nvPr/>
+        </p:nvSpPr>
+        <p:spPr>
+          <a:xfrm>
+            <a:off x="10826496" y="3688797"/>
             <a:ext cx="640080" cy="248502"/>
           </a:xfrm>
           <a:prstGeom prst="rect">
@@ -14741,21 +15016,21 @@
                 <a:ea typeface="Inter" pitchFamily="34" charset="-122"/>
                 <a:cs typeface="Inter" pitchFamily="34" charset="-120"/>
               </a:rPr>
-              <a:t>1.2%</a:t>
-            </a:r>
-            <a:endParaRPr lang="en-US" sz="1300" dirty="0"/>
-          </a:p>
-        </p:txBody>
-      </p:sp>
-      <p:sp>
-        <p:nvSpPr>
-          <p:cNvPr id="170" name="Text 168"/>
-          <p:cNvSpPr txBox="1"/>
-          <p:nvPr/>
-        </p:nvSpPr>
-        <p:spPr>
-          <a:xfrm>
-            <a:off x="6208776" y="3688797"/>
+              <a:t>1.0%</a:t>
+            </a:r>
+            <a:endParaRPr lang="en-US" sz="1300" dirty="0"/>
+          </a:p>
+        </p:txBody>
+      </p:sp>
+      <p:sp>
+        <p:nvSpPr>
+          <p:cNvPr id="179" name="Text 177"/>
+          <p:cNvSpPr txBox="1"/>
+          <p:nvPr/>
+        </p:nvSpPr>
+        <p:spPr>
+          <a:xfrm>
+            <a:off x="6208776" y="3937299"/>
             <a:ext cx="310896" cy="248502"/>
           </a:xfrm>
           <a:prstGeom prst="rect">
@@ -14780,7 +15055,7 @@
                 <a:ea typeface="Inter" pitchFamily="34" charset="-122"/>
                 <a:cs typeface="Inter" pitchFamily="34" charset="-120"/>
               </a:rPr>
-              <a:t>26</a:t>
+              <a:t>27</a:t>
             </a:r>
             <a:endParaRPr lang="en-US" sz="1200" dirty="0"/>
           </a:p>
@@ -14788,13 +15063,13 @@
       </p:sp>
       <p:sp>
         <p:nvSpPr>
-          <p:cNvPr id="171" name="Text 169"/>
-          <p:cNvSpPr txBox="1"/>
-          <p:nvPr/>
-        </p:nvSpPr>
-        <p:spPr>
-          <a:xfrm>
-            <a:off x="6565392" y="3688797"/>
+          <p:cNvPr id="180" name="Text 178"/>
+          <p:cNvSpPr txBox="1"/>
+          <p:nvPr/>
+        </p:nvSpPr>
+        <p:spPr>
+          <a:xfrm>
+            <a:off x="6565392" y="3937299"/>
             <a:ext cx="1783080" cy="248502"/>
           </a:xfrm>
           <a:prstGeom prst="rect">
@@ -14819,7 +15094,7 @@
                 <a:ea typeface="Inter" pitchFamily="34" charset="-122"/>
                 <a:cs typeface="Inter" pitchFamily="34" charset="-120"/>
               </a:rPr>
-              <a:t>NISSAN</a:t>
+              <a:t>HONDA SPOKANE</a:t>
             </a:r>
             <a:endParaRPr lang="en-US" sz="1200" dirty="0"/>
           </a:p>
@@ -14827,14 +15102,14 @@
       </p:sp>
       <p:sp>
         <p:nvSpPr>
-          <p:cNvPr id="172" name="Shape 170"/>
+          <p:cNvPr id="181" name="Shape 179"/>
           <p:cNvSpPr/>
           <p:nvPr/>
         </p:nvSpPr>
         <p:spPr>
           <a:xfrm>
-            <a:off x="8617980" y="3744710"/>
-            <a:ext cx="146110" cy="136676"/>
+            <a:off x="8611516" y="3993212"/>
+            <a:ext cx="152574" cy="136676"/>
           </a:xfrm>
           <a:prstGeom prst="rect">
             <a:avLst/>
@@ -14847,13 +15122,13 @@
       </p:sp>
       <p:sp>
         <p:nvSpPr>
-          <p:cNvPr id="173" name="Text 171"/>
-          <p:cNvSpPr txBox="1"/>
-          <p:nvPr/>
-        </p:nvSpPr>
-        <p:spPr>
-          <a:xfrm>
-            <a:off x="8951976" y="3688797"/>
+          <p:cNvPr id="182" name="Text 180"/>
+          <p:cNvSpPr txBox="1"/>
+          <p:nvPr/>
+        </p:nvSpPr>
+        <p:spPr>
+          <a:xfrm>
+            <a:off x="8951976" y="3937299"/>
             <a:ext cx="1005840" cy="248502"/>
           </a:xfrm>
           <a:prstGeom prst="rect">
@@ -14878,21 +15153,21 @@
                 <a:ea typeface="Inter" pitchFamily="34" charset="-122"/>
                 <a:cs typeface="Inter" pitchFamily="34" charset="-120"/>
               </a:rPr>
-              <a:t>−$77K</a:t>
-            </a:r>
-            <a:endParaRPr lang="en-US" sz="1300" dirty="0"/>
-          </a:p>
-        </p:txBody>
-      </p:sp>
-      <p:sp>
-        <p:nvSpPr>
-          <p:cNvPr id="174" name="Text 172"/>
-          <p:cNvSpPr txBox="1"/>
-          <p:nvPr/>
-        </p:nvSpPr>
-        <p:spPr>
-          <a:xfrm>
-            <a:off x="9957816" y="3688797"/>
+              <a:t>−$60K</a:t>
+            </a:r>
+            <a:endParaRPr lang="en-US" sz="1300" dirty="0"/>
+          </a:p>
+        </p:txBody>
+      </p:sp>
+      <p:sp>
+        <p:nvSpPr>
+          <p:cNvPr id="183" name="Text 181"/>
+          <p:cNvSpPr txBox="1"/>
+          <p:nvPr/>
+        </p:nvSpPr>
+        <p:spPr>
+          <a:xfrm>
+            <a:off x="9957816" y="3937299"/>
             <a:ext cx="868680" cy="248502"/>
           </a:xfrm>
           <a:prstGeom prst="rect">
@@ -14917,21 +15192,21 @@
                 <a:ea typeface="Inter" pitchFamily="34" charset="-122"/>
                 <a:cs typeface="Inter" pitchFamily="34" charset="-120"/>
               </a:rPr>
-              <a:t>−1,296</a:t>
-            </a:r>
-            <a:endParaRPr lang="en-US" sz="1300" dirty="0"/>
-          </a:p>
-        </p:txBody>
-      </p:sp>
-      <p:sp>
-        <p:nvSpPr>
-          <p:cNvPr id="175" name="Text 173"/>
-          <p:cNvSpPr txBox="1"/>
-          <p:nvPr/>
-        </p:nvSpPr>
-        <p:spPr>
-          <a:xfrm>
-            <a:off x="10826496" y="3688797"/>
+              <a:t>−1,145</a:t>
+            </a:r>
+            <a:endParaRPr lang="en-US" sz="1300" dirty="0"/>
+          </a:p>
+        </p:txBody>
+      </p:sp>
+      <p:sp>
+        <p:nvSpPr>
+          <p:cNvPr id="184" name="Text 182"/>
+          <p:cNvSpPr txBox="1"/>
+          <p:nvPr/>
+        </p:nvSpPr>
+        <p:spPr>
+          <a:xfrm>
+            <a:off x="10826496" y="3937299"/>
             <a:ext cx="640080" cy="248502"/>
           </a:xfrm>
           <a:prstGeom prst="rect">
@@ -14956,21 +15231,21 @@
                 <a:ea typeface="Inter" pitchFamily="34" charset="-122"/>
                 <a:cs typeface="Inter" pitchFamily="34" charset="-120"/>
               </a:rPr>
-              <a:t>1.0%</a:t>
-            </a:r>
-            <a:endParaRPr lang="en-US" sz="1300" dirty="0"/>
-          </a:p>
-        </p:txBody>
-      </p:sp>
-      <p:sp>
-        <p:nvSpPr>
-          <p:cNvPr id="176" name="Text 174"/>
-          <p:cNvSpPr txBox="1"/>
-          <p:nvPr/>
-        </p:nvSpPr>
-        <p:spPr>
-          <a:xfrm>
-            <a:off x="6208776" y="3937299"/>
+              <a:t>2.1%</a:t>
+            </a:r>
+            <a:endParaRPr lang="en-US" sz="1300" dirty="0"/>
+          </a:p>
+        </p:txBody>
+      </p:sp>
+      <p:sp>
+        <p:nvSpPr>
+          <p:cNvPr id="185" name="Text 183"/>
+          <p:cNvSpPr txBox="1"/>
+          <p:nvPr/>
+        </p:nvSpPr>
+        <p:spPr>
+          <a:xfrm>
+            <a:off x="6208776" y="4185800"/>
             <a:ext cx="310896" cy="248502"/>
           </a:xfrm>
           <a:prstGeom prst="rect">
@@ -14995,7 +15270,7 @@
                 <a:ea typeface="Inter" pitchFamily="34" charset="-122"/>
                 <a:cs typeface="Inter" pitchFamily="34" charset="-120"/>
               </a:rPr>
-              <a:t>27</a:t>
+              <a:t>28</a:t>
             </a:r>
             <a:endParaRPr lang="en-US" sz="1200" dirty="0"/>
           </a:p>
@@ -15003,13 +15278,13 @@
       </p:sp>
       <p:sp>
         <p:nvSpPr>
-          <p:cNvPr id="177" name="Text 175"/>
-          <p:cNvSpPr txBox="1"/>
-          <p:nvPr/>
-        </p:nvSpPr>
-        <p:spPr>
-          <a:xfrm>
-            <a:off x="6565392" y="3937299"/>
+          <p:cNvPr id="186" name="Text 184"/>
+          <p:cNvSpPr txBox="1"/>
+          <p:nvPr/>
+        </p:nvSpPr>
+        <p:spPr>
+          <a:xfrm>
+            <a:off x="6565392" y="4185800"/>
             <a:ext cx="1783080" cy="248502"/>
           </a:xfrm>
           <a:prstGeom prst="rect">
@@ -15034,7 +15309,7 @@
                 <a:ea typeface="Inter" pitchFamily="34" charset="-122"/>
                 <a:cs typeface="Inter" pitchFamily="34" charset="-120"/>
               </a:rPr>
-              <a:t>HONDA SPOKANE</a:t>
+              <a:t>CHEVY LV</a:t>
             </a:r>
             <a:endParaRPr lang="en-US" sz="1200" dirty="0"/>
           </a:p>
@@ -15042,14 +15317,14 @@
       </p:sp>
       <p:sp>
         <p:nvSpPr>
-          <p:cNvPr id="178" name="Shape 176"/>
+          <p:cNvPr id="187" name="Shape 185"/>
           <p:cNvSpPr/>
           <p:nvPr/>
         </p:nvSpPr>
         <p:spPr>
           <a:xfrm>
-            <a:off x="8611516" y="3993212"/>
-            <a:ext cx="152574" cy="136676"/>
+            <a:off x="8561522" y="4241713"/>
+            <a:ext cx="202569" cy="136676"/>
           </a:xfrm>
           <a:prstGeom prst="rect">
             <a:avLst/>
@@ -15062,13 +15337,13 @@
       </p:sp>
       <p:sp>
         <p:nvSpPr>
-          <p:cNvPr id="179" name="Text 177"/>
-          <p:cNvSpPr txBox="1"/>
-          <p:nvPr/>
-        </p:nvSpPr>
-        <p:spPr>
-          <a:xfrm>
-            <a:off x="8951976" y="3937299"/>
+          <p:cNvPr id="188" name="Text 186"/>
+          <p:cNvSpPr txBox="1"/>
+          <p:nvPr/>
+        </p:nvSpPr>
+        <p:spPr>
+          <a:xfrm>
+            <a:off x="8951976" y="4185800"/>
             <a:ext cx="1005840" cy="248502"/>
           </a:xfrm>
           <a:prstGeom prst="rect">
@@ -15101,13 +15376,13 @@
       </p:sp>
       <p:sp>
         <p:nvSpPr>
-          <p:cNvPr id="180" name="Text 178"/>
-          <p:cNvSpPr txBox="1"/>
-          <p:nvPr/>
-        </p:nvSpPr>
-        <p:spPr>
-          <a:xfrm>
-            <a:off x="9957816" y="3937299"/>
+          <p:cNvPr id="189" name="Text 187"/>
+          <p:cNvSpPr txBox="1"/>
+          <p:nvPr/>
+        </p:nvSpPr>
+        <p:spPr>
+          <a:xfrm>
+            <a:off x="9957816" y="4185800"/>
             <a:ext cx="868680" cy="248502"/>
           </a:xfrm>
           <a:prstGeom prst="rect">
@@ -15132,21 +15407,21 @@
                 <a:ea typeface="Inter" pitchFamily="34" charset="-122"/>
                 <a:cs typeface="Inter" pitchFamily="34" charset="-120"/>
               </a:rPr>
-              <a:t>−1,526</a:t>
-            </a:r>
-            <a:endParaRPr lang="en-US" sz="1300" dirty="0"/>
-          </a:p>
-        </p:txBody>
-      </p:sp>
-      <p:sp>
-        <p:nvSpPr>
-          <p:cNvPr id="181" name="Text 179"/>
-          <p:cNvSpPr txBox="1"/>
-          <p:nvPr/>
-        </p:nvSpPr>
-        <p:spPr>
-          <a:xfrm>
-            <a:off x="10826496" y="3937299"/>
+              <a:t>−1,501</a:t>
+            </a:r>
+            <a:endParaRPr lang="en-US" sz="1300" dirty="0"/>
+          </a:p>
+        </p:txBody>
+      </p:sp>
+      <p:sp>
+        <p:nvSpPr>
+          <p:cNvPr id="190" name="Text 188"/>
+          <p:cNvSpPr txBox="1"/>
+          <p:nvPr/>
+        </p:nvSpPr>
+        <p:spPr>
+          <a:xfrm>
+            <a:off x="10826496" y="4185800"/>
             <a:ext cx="640080" cy="248502"/>
           </a:xfrm>
           <a:prstGeom prst="rect">
@@ -15171,21 +15446,21 @@
                 <a:ea typeface="Inter" pitchFamily="34" charset="-122"/>
                 <a:cs typeface="Inter" pitchFamily="34" charset="-120"/>
               </a:rPr>
-              <a:t>2.1%</a:t>
-            </a:r>
-            <a:endParaRPr lang="en-US" sz="1300" dirty="0"/>
-          </a:p>
-        </p:txBody>
-      </p:sp>
-      <p:sp>
-        <p:nvSpPr>
-          <p:cNvPr id="182" name="Text 180"/>
-          <p:cNvSpPr txBox="1"/>
-          <p:nvPr/>
-        </p:nvSpPr>
-        <p:spPr>
-          <a:xfrm>
-            <a:off x="6208776" y="4185800"/>
+              <a:t>7.3%</a:t>
+            </a:r>
+            <a:endParaRPr lang="en-US" sz="1300" dirty="0"/>
+          </a:p>
+        </p:txBody>
+      </p:sp>
+      <p:sp>
+        <p:nvSpPr>
+          <p:cNvPr id="191" name="Text 189"/>
+          <p:cNvSpPr txBox="1"/>
+          <p:nvPr/>
+        </p:nvSpPr>
+        <p:spPr>
+          <a:xfrm>
+            <a:off x="6208776" y="4434302"/>
             <a:ext cx="310896" cy="248502"/>
           </a:xfrm>
           <a:prstGeom prst="rect">
@@ -15210,7 +15485,7 @@
                 <a:ea typeface="Inter" pitchFamily="34" charset="-122"/>
                 <a:cs typeface="Inter" pitchFamily="34" charset="-120"/>
               </a:rPr>
-              <a:t>28</a:t>
+              <a:t>29</a:t>
             </a:r>
             <a:endParaRPr lang="en-US" sz="1200" dirty="0"/>
           </a:p>
@@ -15218,13 +15493,13 @@
       </p:sp>
       <p:sp>
         <p:nvSpPr>
-          <p:cNvPr id="183" name="Text 181"/>
-          <p:cNvSpPr txBox="1"/>
-          <p:nvPr/>
-        </p:nvSpPr>
-        <p:spPr>
-          <a:xfrm>
-            <a:off x="6565392" y="4185800"/>
+          <p:cNvPr id="192" name="Text 190"/>
+          <p:cNvSpPr txBox="1"/>
+          <p:nvPr/>
+        </p:nvSpPr>
+        <p:spPr>
+          <a:xfrm>
+            <a:off x="6565392" y="4434302"/>
             <a:ext cx="1783080" cy="248502"/>
           </a:xfrm>
           <a:prstGeom prst="rect">
@@ -15249,7 +15524,7 @@
                 <a:ea typeface="Inter" pitchFamily="34" charset="-122"/>
                 <a:cs typeface="Inter" pitchFamily="34" charset="-120"/>
               </a:rPr>
-              <a:t>CHEVY LV</a:t>
+              <a:t>TOYOTA FLAGSTAFF</a:t>
             </a:r>
             <a:endParaRPr lang="en-US" sz="1200" dirty="0"/>
           </a:p>
@@ -15257,14 +15532,14 @@
       </p:sp>
       <p:sp>
         <p:nvSpPr>
-          <p:cNvPr id="184" name="Shape 182"/>
+          <p:cNvPr id="193" name="Shape 191"/>
           <p:cNvSpPr/>
           <p:nvPr/>
         </p:nvSpPr>
         <p:spPr>
           <a:xfrm>
-            <a:off x="8561522" y="4241713"/>
-            <a:ext cx="202569" cy="136676"/>
+            <a:off x="8556261" y="4490215"/>
+            <a:ext cx="207830" cy="136676"/>
           </a:xfrm>
           <a:prstGeom prst="rect">
             <a:avLst/>
@@ -15277,13 +15552,13 @@
       </p:sp>
       <p:sp>
         <p:nvSpPr>
-          <p:cNvPr id="185" name="Text 183"/>
-          <p:cNvSpPr txBox="1"/>
-          <p:nvPr/>
-        </p:nvSpPr>
-        <p:spPr>
-          <a:xfrm>
-            <a:off x="8951976" y="4185800"/>
+          <p:cNvPr id="194" name="Text 192"/>
+          <p:cNvSpPr txBox="1"/>
+          <p:nvPr/>
+        </p:nvSpPr>
+        <p:spPr>
+          <a:xfrm>
+            <a:off x="8951976" y="4434302"/>
             <a:ext cx="1005840" cy="248502"/>
           </a:xfrm>
           <a:prstGeom prst="rect">
@@ -15308,21 +15583,21 @@
                 <a:ea typeface="Inter" pitchFamily="34" charset="-122"/>
                 <a:cs typeface="Inter" pitchFamily="34" charset="-120"/>
               </a:rPr>
-              <a:t>−$106K</a:t>
-            </a:r>
-            <a:endParaRPr lang="en-US" sz="1300" dirty="0"/>
-          </a:p>
-        </p:txBody>
-      </p:sp>
-      <p:sp>
-        <p:nvSpPr>
-          <p:cNvPr id="186" name="Text 184"/>
-          <p:cNvSpPr txBox="1"/>
-          <p:nvPr/>
-        </p:nvSpPr>
-        <p:spPr>
-          <a:xfrm>
-            <a:off x="9957816" y="4185800"/>
+              <a:t>−$82K</a:t>
+            </a:r>
+            <a:endParaRPr lang="en-US" sz="1300" dirty="0"/>
+          </a:p>
+        </p:txBody>
+      </p:sp>
+      <p:sp>
+        <p:nvSpPr>
+          <p:cNvPr id="195" name="Text 193"/>
+          <p:cNvSpPr txBox="1"/>
+          <p:nvPr/>
+        </p:nvSpPr>
+        <p:spPr>
+          <a:xfrm>
+            <a:off x="9957816" y="4434302"/>
             <a:ext cx="868680" cy="248502"/>
           </a:xfrm>
           <a:prstGeom prst="rect">
@@ -15347,21 +15622,21 @@
                 <a:ea typeface="Inter" pitchFamily="34" charset="-122"/>
                 <a:cs typeface="Inter" pitchFamily="34" charset="-120"/>
               </a:rPr>
-              <a:t>−2,001</a:t>
-            </a:r>
-            <a:endParaRPr lang="en-US" sz="1300" dirty="0"/>
-          </a:p>
-        </p:txBody>
-      </p:sp>
-      <p:sp>
-        <p:nvSpPr>
-          <p:cNvPr id="187" name="Text 185"/>
-          <p:cNvSpPr txBox="1"/>
-          <p:nvPr/>
-        </p:nvSpPr>
-        <p:spPr>
-          <a:xfrm>
-            <a:off x="10826496" y="4185800"/>
+              <a:t>−1,523</a:t>
+            </a:r>
+            <a:endParaRPr lang="en-US" sz="1300" dirty="0"/>
+          </a:p>
+        </p:txBody>
+      </p:sp>
+      <p:sp>
+        <p:nvSpPr>
+          <p:cNvPr id="196" name="Text 194"/>
+          <p:cNvSpPr txBox="1"/>
+          <p:nvPr/>
+        </p:nvSpPr>
+        <p:spPr>
+          <a:xfrm>
+            <a:off x="10826496" y="4434302"/>
             <a:ext cx="640080" cy="248502"/>
           </a:xfrm>
           <a:prstGeom prst="rect">
@@ -15386,21 +15661,21 @@
                 <a:ea typeface="Inter" pitchFamily="34" charset="-122"/>
                 <a:cs typeface="Inter" pitchFamily="34" charset="-120"/>
               </a:rPr>
-              <a:t>7.3%</a:t>
-            </a:r>
-            <a:endParaRPr lang="en-US" sz="1300" dirty="0"/>
-          </a:p>
-        </p:txBody>
-      </p:sp>
-      <p:sp>
-        <p:nvSpPr>
-          <p:cNvPr id="188" name="Text 186"/>
-          <p:cNvSpPr txBox="1"/>
-          <p:nvPr/>
-        </p:nvSpPr>
-        <p:spPr>
-          <a:xfrm>
-            <a:off x="6208776" y="4434302"/>
+              <a:t>4.9%</a:t>
+            </a:r>
+            <a:endParaRPr lang="en-US" sz="1300" dirty="0"/>
+          </a:p>
+        </p:txBody>
+      </p:sp>
+      <p:sp>
+        <p:nvSpPr>
+          <p:cNvPr id="197" name="Text 195"/>
+          <p:cNvSpPr txBox="1"/>
+          <p:nvPr/>
+        </p:nvSpPr>
+        <p:spPr>
+          <a:xfrm>
+            <a:off x="6208776" y="4682804"/>
             <a:ext cx="310896" cy="248502"/>
           </a:xfrm>
           <a:prstGeom prst="rect">
@@ -15425,7 +15700,7 @@
                 <a:ea typeface="Inter" pitchFamily="34" charset="-122"/>
                 <a:cs typeface="Inter" pitchFamily="34" charset="-120"/>
               </a:rPr>
-              <a:t>29</a:t>
+              <a:t>30</a:t>
             </a:r>
             <a:endParaRPr lang="en-US" sz="1200" dirty="0"/>
           </a:p>
@@ -15433,13 +15708,13 @@
       </p:sp>
       <p:sp>
         <p:nvSpPr>
-          <p:cNvPr id="189" name="Text 187"/>
-          <p:cNvSpPr txBox="1"/>
-          <p:nvPr/>
-        </p:nvSpPr>
-        <p:spPr>
-          <a:xfrm>
-            <a:off x="6565392" y="4434302"/>
+          <p:cNvPr id="198" name="Text 196"/>
+          <p:cNvSpPr txBox="1"/>
+          <p:nvPr/>
+        </p:nvSpPr>
+        <p:spPr>
+          <a:xfrm>
+            <a:off x="6565392" y="4682804"/>
             <a:ext cx="1783080" cy="248502"/>
           </a:xfrm>
           <a:prstGeom prst="rect">
@@ -15464,7 +15739,7 @@
                 <a:ea typeface="Inter" pitchFamily="34" charset="-122"/>
                 <a:cs typeface="Inter" pitchFamily="34" charset="-120"/>
               </a:rPr>
-              <a:t>TOYOTA FLAGSTAFF</a:t>
+              <a:t>SUBARU ST GEORGE</a:t>
             </a:r>
             <a:endParaRPr lang="en-US" sz="1200" dirty="0"/>
           </a:p>
@@ -15472,14 +15747,14 @@
       </p:sp>
       <p:sp>
         <p:nvSpPr>
-          <p:cNvPr id="190" name="Shape 188"/>
+          <p:cNvPr id="199" name="Shape 197"/>
           <p:cNvSpPr/>
           <p:nvPr/>
         </p:nvSpPr>
         <p:spPr>
           <a:xfrm>
-            <a:off x="8556261" y="4490215"/>
-            <a:ext cx="207830" cy="136676"/>
+            <a:off x="8526056" y="4738717"/>
+            <a:ext cx="238034" cy="136676"/>
           </a:xfrm>
           <a:prstGeom prst="rect">
             <a:avLst/>
@@ -15492,13 +15767,13 @@
       </p:sp>
       <p:sp>
         <p:nvSpPr>
-          <p:cNvPr id="191" name="Text 189"/>
-          <p:cNvSpPr txBox="1"/>
-          <p:nvPr/>
-        </p:nvSpPr>
-        <p:spPr>
-          <a:xfrm>
-            <a:off x="8951976" y="4434302"/>
+          <p:cNvPr id="200" name="Text 198"/>
+          <p:cNvSpPr txBox="1"/>
+          <p:nvPr/>
+        </p:nvSpPr>
+        <p:spPr>
+          <a:xfrm>
+            <a:off x="8951976" y="4682804"/>
             <a:ext cx="1005840" cy="248502"/>
           </a:xfrm>
           <a:prstGeom prst="rect">
@@ -15523,21 +15798,21 @@
                 <a:ea typeface="Inter" pitchFamily="34" charset="-122"/>
                 <a:cs typeface="Inter" pitchFamily="34" charset="-120"/>
               </a:rPr>
-              <a:t>−$109K</a:t>
-            </a:r>
-            <a:endParaRPr lang="en-US" sz="1300" dirty="0"/>
-          </a:p>
-        </p:txBody>
-      </p:sp>
-      <p:sp>
-        <p:nvSpPr>
-          <p:cNvPr id="192" name="Text 190"/>
-          <p:cNvSpPr txBox="1"/>
-          <p:nvPr/>
-        </p:nvSpPr>
-        <p:spPr>
-          <a:xfrm>
-            <a:off x="9957816" y="4434302"/>
+              <a:t>−$94K</a:t>
+            </a:r>
+            <a:endParaRPr lang="en-US" sz="1300" dirty="0"/>
+          </a:p>
+        </p:txBody>
+      </p:sp>
+      <p:sp>
+        <p:nvSpPr>
+          <p:cNvPr id="201" name="Text 199"/>
+          <p:cNvSpPr txBox="1"/>
+          <p:nvPr/>
+        </p:nvSpPr>
+        <p:spPr>
+          <a:xfrm>
+            <a:off x="9957816" y="4682804"/>
             <a:ext cx="868680" cy="248502"/>
           </a:xfrm>
           <a:prstGeom prst="rect">
@@ -15562,21 +15837,21 @@
                 <a:ea typeface="Inter" pitchFamily="34" charset="-122"/>
                 <a:cs typeface="Inter" pitchFamily="34" charset="-120"/>
               </a:rPr>
-              <a:t>−2,031</a:t>
-            </a:r>
-            <a:endParaRPr lang="en-US" sz="1300" dirty="0"/>
-          </a:p>
-        </p:txBody>
-      </p:sp>
-      <p:sp>
-        <p:nvSpPr>
-          <p:cNvPr id="193" name="Text 191"/>
-          <p:cNvSpPr txBox="1"/>
-          <p:nvPr/>
-        </p:nvSpPr>
-        <p:spPr>
-          <a:xfrm>
-            <a:off x="10826496" y="4434302"/>
+              <a:t>−628</a:t>
+            </a:r>
+            <a:endParaRPr lang="en-US" sz="1300" dirty="0"/>
+          </a:p>
+        </p:txBody>
+      </p:sp>
+      <p:sp>
+        <p:nvSpPr>
+          <p:cNvPr id="202" name="Text 200"/>
+          <p:cNvSpPr txBox="1"/>
+          <p:nvPr/>
+        </p:nvSpPr>
+        <p:spPr>
+          <a:xfrm>
+            <a:off x="10826496" y="4682804"/>
             <a:ext cx="640080" cy="248502"/>
           </a:xfrm>
           <a:prstGeom prst="rect">
@@ -15601,21 +15876,21 @@
                 <a:ea typeface="Inter" pitchFamily="34" charset="-122"/>
                 <a:cs typeface="Inter" pitchFamily="34" charset="-120"/>
               </a:rPr>
-              <a:t>4.9%</a:t>
-            </a:r>
-            <a:endParaRPr lang="en-US" sz="1300" dirty="0"/>
-          </a:p>
-        </p:txBody>
-      </p:sp>
-      <p:sp>
-        <p:nvSpPr>
-          <p:cNvPr id="194" name="Text 192"/>
-          <p:cNvSpPr txBox="1"/>
-          <p:nvPr/>
-        </p:nvSpPr>
-        <p:spPr>
-          <a:xfrm>
-            <a:off x="6208776" y="4682804"/>
+              <a:t>3.6%</a:t>
+            </a:r>
+            <a:endParaRPr lang="en-US" sz="1300" dirty="0"/>
+          </a:p>
+        </p:txBody>
+      </p:sp>
+      <p:sp>
+        <p:nvSpPr>
+          <p:cNvPr id="203" name="Text 201"/>
+          <p:cNvSpPr txBox="1"/>
+          <p:nvPr/>
+        </p:nvSpPr>
+        <p:spPr>
+          <a:xfrm>
+            <a:off x="6208776" y="4931305"/>
             <a:ext cx="310896" cy="248502"/>
           </a:xfrm>
           <a:prstGeom prst="rect">
@@ -15640,7 +15915,7 @@
                 <a:ea typeface="Inter" pitchFamily="34" charset="-122"/>
                 <a:cs typeface="Inter" pitchFamily="34" charset="-120"/>
               </a:rPr>
-              <a:t>30</a:t>
+              <a:t>31</a:t>
             </a:r>
             <a:endParaRPr lang="en-US" sz="1200" dirty="0"/>
           </a:p>
@@ -15648,13 +15923,13 @@
       </p:sp>
       <p:sp>
         <p:nvSpPr>
-          <p:cNvPr id="195" name="Text 193"/>
-          <p:cNvSpPr txBox="1"/>
-          <p:nvPr/>
-        </p:nvSpPr>
-        <p:spPr>
-          <a:xfrm>
-            <a:off x="6565392" y="4682804"/>
+          <p:cNvPr id="204" name="Text 202"/>
+          <p:cNvSpPr txBox="1"/>
+          <p:nvPr/>
+        </p:nvSpPr>
+        <p:spPr>
+          <a:xfrm>
+            <a:off x="6565392" y="4931305"/>
             <a:ext cx="1783080" cy="248502"/>
           </a:xfrm>
           <a:prstGeom prst="rect">
@@ -15679,7 +15954,7 @@
                 <a:ea typeface="Inter" pitchFamily="34" charset="-122"/>
                 <a:cs typeface="Inter" pitchFamily="34" charset="-120"/>
               </a:rPr>
-              <a:t>SUBARU ST GEORGE</a:t>
+              <a:t>TOYOTA PRESCOTT</a:t>
             </a:r>
             <a:endParaRPr lang="en-US" sz="1200" dirty="0"/>
           </a:p>
@@ -15687,14 +15962,14 @@
       </p:sp>
       <p:sp>
         <p:nvSpPr>
-          <p:cNvPr id="196" name="Shape 194"/>
+          <p:cNvPr id="205" name="Shape 203"/>
           <p:cNvSpPr/>
           <p:nvPr/>
         </p:nvSpPr>
         <p:spPr>
           <a:xfrm>
-            <a:off x="8526056" y="4738717"/>
-            <a:ext cx="238034" cy="136676"/>
+            <a:off x="8511929" y="4987218"/>
+            <a:ext cx="252161" cy="136676"/>
           </a:xfrm>
           <a:prstGeom prst="rect">
             <a:avLst/>
@@ -15707,13 +15982,13 @@
       </p:sp>
       <p:sp>
         <p:nvSpPr>
-          <p:cNvPr id="197" name="Text 195"/>
-          <p:cNvSpPr txBox="1"/>
-          <p:nvPr/>
-        </p:nvSpPr>
-        <p:spPr>
-          <a:xfrm>
-            <a:off x="8951976" y="4682804"/>
+          <p:cNvPr id="206" name="Text 204"/>
+          <p:cNvSpPr txBox="1"/>
+          <p:nvPr/>
+        </p:nvSpPr>
+        <p:spPr>
+          <a:xfrm>
+            <a:off x="8951976" y="4931305"/>
             <a:ext cx="1005840" cy="248502"/>
           </a:xfrm>
           <a:prstGeom prst="rect">
@@ -15738,21 +16013,21 @@
                 <a:ea typeface="Inter" pitchFamily="34" charset="-122"/>
                 <a:cs typeface="Inter" pitchFamily="34" charset="-120"/>
               </a:rPr>
-              <a:t>−$125K</a:t>
-            </a:r>
-            <a:endParaRPr lang="en-US" sz="1300" dirty="0"/>
-          </a:p>
-        </p:txBody>
-      </p:sp>
-      <p:sp>
-        <p:nvSpPr>
-          <p:cNvPr id="198" name="Text 196"/>
-          <p:cNvSpPr txBox="1"/>
-          <p:nvPr/>
-        </p:nvSpPr>
-        <p:spPr>
-          <a:xfrm>
-            <a:off x="9957816" y="4682804"/>
+              <a:t>−$99K</a:t>
+            </a:r>
+            <a:endParaRPr lang="en-US" sz="1300" dirty="0"/>
+          </a:p>
+        </p:txBody>
+      </p:sp>
+      <p:sp>
+        <p:nvSpPr>
+          <p:cNvPr id="207" name="Text 205"/>
+          <p:cNvSpPr txBox="1"/>
+          <p:nvPr/>
+        </p:nvSpPr>
+        <p:spPr>
+          <a:xfrm>
+            <a:off x="9957816" y="4931305"/>
             <a:ext cx="868680" cy="248502"/>
           </a:xfrm>
           <a:prstGeom prst="rect">
@@ -15777,21 +16052,21 @@
                 <a:ea typeface="Inter" pitchFamily="34" charset="-122"/>
                 <a:cs typeface="Inter" pitchFamily="34" charset="-120"/>
               </a:rPr>
-              <a:t>−837</a:t>
-            </a:r>
-            <a:endParaRPr lang="en-US" sz="1300" dirty="0"/>
-          </a:p>
-        </p:txBody>
-      </p:sp>
-      <p:sp>
-        <p:nvSpPr>
-          <p:cNvPr id="199" name="Text 197"/>
-          <p:cNvSpPr txBox="1"/>
-          <p:nvPr/>
-        </p:nvSpPr>
-        <p:spPr>
-          <a:xfrm>
-            <a:off x="10826496" y="4682804"/>
+              <a:t>−1,193</a:t>
+            </a:r>
+            <a:endParaRPr lang="en-US" sz="1300" dirty="0"/>
+          </a:p>
+        </p:txBody>
+      </p:sp>
+      <p:sp>
+        <p:nvSpPr>
+          <p:cNvPr id="208" name="Text 206"/>
+          <p:cNvSpPr txBox="1"/>
+          <p:nvPr/>
+        </p:nvSpPr>
+        <p:spPr>
+          <a:xfrm>
+            <a:off x="10826496" y="4931305"/>
             <a:ext cx="640080" cy="248502"/>
           </a:xfrm>
           <a:prstGeom prst="rect">
@@ -15816,21 +16091,21 @@
                 <a:ea typeface="Inter" pitchFamily="34" charset="-122"/>
                 <a:cs typeface="Inter" pitchFamily="34" charset="-120"/>
               </a:rPr>
-              <a:t>3.6%</a:t>
-            </a:r>
-            <a:endParaRPr lang="en-US" sz="1300" dirty="0"/>
-          </a:p>
-        </p:txBody>
-      </p:sp>
-      <p:sp>
-        <p:nvSpPr>
-          <p:cNvPr id="200" name="Text 198"/>
-          <p:cNvSpPr txBox="1"/>
-          <p:nvPr/>
-        </p:nvSpPr>
-        <p:spPr>
-          <a:xfrm>
-            <a:off x="6208776" y="4931305"/>
+              <a:t>6.1%</a:t>
+            </a:r>
+            <a:endParaRPr lang="en-US" sz="1300" dirty="0"/>
+          </a:p>
+        </p:txBody>
+      </p:sp>
+      <p:sp>
+        <p:nvSpPr>
+          <p:cNvPr id="209" name="Text 207"/>
+          <p:cNvSpPr txBox="1"/>
+          <p:nvPr/>
+        </p:nvSpPr>
+        <p:spPr>
+          <a:xfrm>
+            <a:off x="6208776" y="5179807"/>
             <a:ext cx="310896" cy="248502"/>
           </a:xfrm>
           <a:prstGeom prst="rect">
@@ -15855,7 +16130,7 @@
                 <a:ea typeface="Inter" pitchFamily="34" charset="-122"/>
                 <a:cs typeface="Inter" pitchFamily="34" charset="-120"/>
               </a:rPr>
-              <a:t>31</a:t>
+              <a:t>32</a:t>
             </a:r>
             <a:endParaRPr lang="en-US" sz="1200" dirty="0"/>
           </a:p>
@@ -15863,13 +16138,13 @@
       </p:sp>
       <p:sp>
         <p:nvSpPr>
-          <p:cNvPr id="201" name="Text 199"/>
-          <p:cNvSpPr txBox="1"/>
-          <p:nvPr/>
-        </p:nvSpPr>
-        <p:spPr>
-          <a:xfrm>
-            <a:off x="6565392" y="4931305"/>
+          <p:cNvPr id="210" name="Text 208"/>
+          <p:cNvSpPr txBox="1"/>
+          <p:nvPr/>
+        </p:nvSpPr>
+        <p:spPr>
+          <a:xfrm>
+            <a:off x="6565392" y="5179807"/>
             <a:ext cx="1783080" cy="248502"/>
           </a:xfrm>
           <a:prstGeom prst="rect">
@@ -15894,7 +16169,7 @@
                 <a:ea typeface="Inter" pitchFamily="34" charset="-122"/>
                 <a:cs typeface="Inter" pitchFamily="34" charset="-120"/>
               </a:rPr>
-              <a:t>TOYOTA PRESCOTT</a:t>
+              <a:t>TOYOTA HENDERSON</a:t>
             </a:r>
             <a:endParaRPr lang="en-US" sz="1200" dirty="0"/>
           </a:p>
@@ -15902,14 +16177,14 @@
       </p:sp>
       <p:sp>
         <p:nvSpPr>
-          <p:cNvPr id="202" name="Shape 200"/>
+          <p:cNvPr id="211" name="Shape 209"/>
           <p:cNvSpPr/>
           <p:nvPr/>
         </p:nvSpPr>
         <p:spPr>
           <a:xfrm>
-            <a:off x="8511929" y="4987218"/>
-            <a:ext cx="252161" cy="136676"/>
+            <a:off x="8483276" y="5235720"/>
+            <a:ext cx="280814" cy="136676"/>
           </a:xfrm>
           <a:prstGeom prst="rect">
             <a:avLst/>
@@ -15922,13 +16197,13 @@
       </p:sp>
       <p:sp>
         <p:nvSpPr>
-          <p:cNvPr id="203" name="Text 201"/>
-          <p:cNvSpPr txBox="1"/>
-          <p:nvPr/>
-        </p:nvSpPr>
-        <p:spPr>
-          <a:xfrm>
-            <a:off x="8951976" y="4931305"/>
+          <p:cNvPr id="212" name="Text 210"/>
+          <p:cNvSpPr txBox="1"/>
+          <p:nvPr/>
+        </p:nvSpPr>
+        <p:spPr>
+          <a:xfrm>
+            <a:off x="8951976" y="5179807"/>
             <a:ext cx="1005840" cy="248502"/>
           </a:xfrm>
           <a:prstGeom prst="rect">
@@ -15953,21 +16228,21 @@
                 <a:ea typeface="Inter" pitchFamily="34" charset="-122"/>
                 <a:cs typeface="Inter" pitchFamily="34" charset="-120"/>
               </a:rPr>
-              <a:t>−$132K</a:t>
-            </a:r>
-            <a:endParaRPr lang="en-US" sz="1300" dirty="0"/>
-          </a:p>
-        </p:txBody>
-      </p:sp>
-      <p:sp>
-        <p:nvSpPr>
-          <p:cNvPr id="204" name="Text 202"/>
-          <p:cNvSpPr txBox="1"/>
-          <p:nvPr/>
-        </p:nvSpPr>
-        <p:spPr>
-          <a:xfrm>
-            <a:off x="9957816" y="4931305"/>
+              <a:t>−$111K</a:t>
+            </a:r>
+            <a:endParaRPr lang="en-US" sz="1300" dirty="0"/>
+          </a:p>
+        </p:txBody>
+      </p:sp>
+      <p:sp>
+        <p:nvSpPr>
+          <p:cNvPr id="213" name="Text 211"/>
+          <p:cNvSpPr txBox="1"/>
+          <p:nvPr/>
+        </p:nvSpPr>
+        <p:spPr>
+          <a:xfrm>
+            <a:off x="9957816" y="5179807"/>
             <a:ext cx="868680" cy="248502"/>
           </a:xfrm>
           <a:prstGeom prst="rect">
@@ -15992,21 +16267,21 @@
                 <a:ea typeface="Inter" pitchFamily="34" charset="-122"/>
                 <a:cs typeface="Inter" pitchFamily="34" charset="-120"/>
               </a:rPr>
-              <a:t>−1,590</a:t>
-            </a:r>
-            <a:endParaRPr lang="en-US" sz="1300" dirty="0"/>
-          </a:p>
-        </p:txBody>
-      </p:sp>
-      <p:sp>
-        <p:nvSpPr>
-          <p:cNvPr id="205" name="Text 203"/>
-          <p:cNvSpPr txBox="1"/>
-          <p:nvPr/>
-        </p:nvSpPr>
-        <p:spPr>
-          <a:xfrm>
-            <a:off x="10826496" y="4931305"/>
+              <a:t>−2,004</a:t>
+            </a:r>
+            <a:endParaRPr lang="en-US" sz="1300" dirty="0"/>
+          </a:p>
+        </p:txBody>
+      </p:sp>
+      <p:sp>
+        <p:nvSpPr>
+          <p:cNvPr id="214" name="Text 212"/>
+          <p:cNvSpPr txBox="1"/>
+          <p:nvPr/>
+        </p:nvSpPr>
+        <p:spPr>
+          <a:xfrm>
+            <a:off x="10826496" y="5179807"/>
             <a:ext cx="640080" cy="248502"/>
           </a:xfrm>
           <a:prstGeom prst="rect">
@@ -16031,21 +16306,21 @@
                 <a:ea typeface="Inter" pitchFamily="34" charset="-122"/>
                 <a:cs typeface="Inter" pitchFamily="34" charset="-120"/>
               </a:rPr>
-              <a:t>6.1%</a:t>
-            </a:r>
-            <a:endParaRPr lang="en-US" sz="1300" dirty="0"/>
-          </a:p>
-        </p:txBody>
-      </p:sp>
-      <p:sp>
-        <p:nvSpPr>
-          <p:cNvPr id="206" name="Text 204"/>
-          <p:cNvSpPr txBox="1"/>
-          <p:nvPr/>
-        </p:nvSpPr>
-        <p:spPr>
-          <a:xfrm>
-            <a:off x="6208776" y="5179807"/>
+              <a:t>11.2%</a:t>
+            </a:r>
+            <a:endParaRPr lang="en-US" sz="1300" dirty="0"/>
+          </a:p>
+        </p:txBody>
+      </p:sp>
+      <p:sp>
+        <p:nvSpPr>
+          <p:cNvPr id="215" name="Text 213"/>
+          <p:cNvSpPr txBox="1"/>
+          <p:nvPr/>
+        </p:nvSpPr>
+        <p:spPr>
+          <a:xfrm>
+            <a:off x="6208776" y="5428309"/>
             <a:ext cx="310896" cy="248502"/>
           </a:xfrm>
           <a:prstGeom prst="rect">
@@ -16070,7 +16345,7 @@
                 <a:ea typeface="Inter" pitchFamily="34" charset="-122"/>
                 <a:cs typeface="Inter" pitchFamily="34" charset="-120"/>
               </a:rPr>
-              <a:t>32</a:t>
+              <a:t>33</a:t>
             </a:r>
             <a:endParaRPr lang="en-US" sz="1200" dirty="0"/>
           </a:p>
@@ -16078,13 +16353,13 @@
       </p:sp>
       <p:sp>
         <p:nvSpPr>
-          <p:cNvPr id="207" name="Text 205"/>
-          <p:cNvSpPr txBox="1"/>
-          <p:nvPr/>
-        </p:nvSpPr>
-        <p:spPr>
-          <a:xfrm>
-            <a:off x="6565392" y="5179807"/>
+          <p:cNvPr id="216" name="Text 214"/>
+          <p:cNvSpPr txBox="1"/>
+          <p:nvPr/>
+        </p:nvSpPr>
+        <p:spPr>
+          <a:xfrm>
+            <a:off x="6565392" y="5428309"/>
             <a:ext cx="1783080" cy="248502"/>
           </a:xfrm>
           <a:prstGeom prst="rect">
@@ -16109,7 +16384,7 @@
                 <a:ea typeface="Inter" pitchFamily="34" charset="-122"/>
                 <a:cs typeface="Inter" pitchFamily="34" charset="-120"/>
               </a:rPr>
-              <a:t>TOYOTA HENDERSON</a:t>
+              <a:t>TOYOTA SPOKANE</a:t>
             </a:r>
             <a:endParaRPr lang="en-US" sz="1200" dirty="0"/>
           </a:p>
@@ -16117,14 +16392,14 @@
       </p:sp>
       <p:sp>
         <p:nvSpPr>
-          <p:cNvPr id="208" name="Shape 206"/>
+          <p:cNvPr id="217" name="Shape 215"/>
           <p:cNvSpPr/>
           <p:nvPr/>
         </p:nvSpPr>
         <p:spPr>
           <a:xfrm>
-            <a:off x="8483276" y="5235720"/>
-            <a:ext cx="280814" cy="136676"/>
+            <a:off x="8421624" y="5484222"/>
+            <a:ext cx="342466" cy="136676"/>
           </a:xfrm>
           <a:prstGeom prst="rect">
             <a:avLst/>
@@ -16137,13 +16412,13 @@
       </p:sp>
       <p:sp>
         <p:nvSpPr>
-          <p:cNvPr id="209" name="Text 207"/>
-          <p:cNvSpPr txBox="1"/>
-          <p:nvPr/>
-        </p:nvSpPr>
-        <p:spPr>
-          <a:xfrm>
-            <a:off x="8951976" y="5179807"/>
+          <p:cNvPr id="218" name="Text 216"/>
+          <p:cNvSpPr txBox="1"/>
+          <p:nvPr/>
+        </p:nvSpPr>
+        <p:spPr>
+          <a:xfrm>
+            <a:off x="8951976" y="5428309"/>
             <a:ext cx="1005840" cy="248502"/>
           </a:xfrm>
           <a:prstGeom prst="rect">
@@ -16168,21 +16443,21 @@
                 <a:ea typeface="Inter" pitchFamily="34" charset="-122"/>
                 <a:cs typeface="Inter" pitchFamily="34" charset="-120"/>
               </a:rPr>
-              <a:t>−$147K</a:t>
-            </a:r>
-            <a:endParaRPr lang="en-US" sz="1300" dirty="0"/>
-          </a:p>
-        </p:txBody>
-      </p:sp>
-      <p:sp>
-        <p:nvSpPr>
-          <p:cNvPr id="210" name="Text 208"/>
-          <p:cNvSpPr txBox="1"/>
-          <p:nvPr/>
-        </p:nvSpPr>
-        <p:spPr>
-          <a:xfrm>
-            <a:off x="9957816" y="5179807"/>
+              <a:t>−$135K</a:t>
+            </a:r>
+            <a:endParaRPr lang="en-US" sz="1300" dirty="0"/>
+          </a:p>
+        </p:txBody>
+      </p:sp>
+      <p:sp>
+        <p:nvSpPr>
+          <p:cNvPr id="219" name="Text 217"/>
+          <p:cNvSpPr txBox="1"/>
+          <p:nvPr/>
+        </p:nvSpPr>
+        <p:spPr>
+          <a:xfrm>
+            <a:off x="9957816" y="5428309"/>
             <a:ext cx="868680" cy="248502"/>
           </a:xfrm>
           <a:prstGeom prst="rect">
@@ -16207,21 +16482,21 @@
                 <a:ea typeface="Inter" pitchFamily="34" charset="-122"/>
                 <a:cs typeface="Inter" pitchFamily="34" charset="-120"/>
               </a:rPr>
-              <a:t>−2,671</a:t>
-            </a:r>
-            <a:endParaRPr lang="en-US" sz="1300" dirty="0"/>
-          </a:p>
-        </p:txBody>
-      </p:sp>
-      <p:sp>
-        <p:nvSpPr>
-          <p:cNvPr id="211" name="Text 209"/>
-          <p:cNvSpPr txBox="1"/>
-          <p:nvPr/>
-        </p:nvSpPr>
-        <p:spPr>
-          <a:xfrm>
-            <a:off x="10826496" y="5179807"/>
+              <a:t>−2,520</a:t>
+            </a:r>
+            <a:endParaRPr lang="en-US" sz="1300" dirty="0"/>
+          </a:p>
+        </p:txBody>
+      </p:sp>
+      <p:sp>
+        <p:nvSpPr>
+          <p:cNvPr id="220" name="Text 218"/>
+          <p:cNvSpPr txBox="1"/>
+          <p:nvPr/>
+        </p:nvSpPr>
+        <p:spPr>
+          <a:xfrm>
+            <a:off x="10826496" y="5428309"/>
             <a:ext cx="640080" cy="248502"/>
           </a:xfrm>
           <a:prstGeom prst="rect">
@@ -16246,100 +16521,22 @@
                 <a:ea typeface="Inter" pitchFamily="34" charset="-122"/>
                 <a:cs typeface="Inter" pitchFamily="34" charset="-120"/>
               </a:rPr>
-              <a:t>11.2%</a:t>
-            </a:r>
-            <a:endParaRPr lang="en-US" sz="1300" dirty="0"/>
-          </a:p>
-        </p:txBody>
-      </p:sp>
-      <p:sp>
-        <p:nvSpPr>
-          <p:cNvPr id="212" name="Text 210"/>
-          <p:cNvSpPr txBox="1"/>
-          <p:nvPr/>
-        </p:nvSpPr>
-        <p:spPr>
-          <a:xfrm>
-            <a:off x="6208776" y="5428309"/>
-            <a:ext cx="310896" cy="248502"/>
-          </a:xfrm>
-          <a:prstGeom prst="rect">
-            <a:avLst/>
-          </a:prstGeom>
-          <a:noFill/>
-          <a:ln/>
-        </p:spPr>
-        <p:txBody>
-          <a:bodyPr wrap="square" lIns="0" tIns="0" rIns="0" bIns="0" rtlCol="0" anchor="ctr"/>
-          <a:lstStyle/>
-          <a:p>
-            <a:pPr algn="r" indent="0" marL="0">
-              <a:buNone/>
-            </a:pPr>
-            <a:r>
-              <a:rPr lang="en-US" sz="1200" dirty="0">
-                <a:solidFill>
-                  <a:srgbClr val="9AA3AD"/>
-                </a:solidFill>
-                <a:latin typeface="Inter" pitchFamily="34" charset="0"/>
-                <a:ea typeface="Inter" pitchFamily="34" charset="-122"/>
-                <a:cs typeface="Inter" pitchFamily="34" charset="-120"/>
-              </a:rPr>
-              <a:t>33</a:t>
-            </a:r>
-            <a:endParaRPr lang="en-US" sz="1200" dirty="0"/>
-          </a:p>
-        </p:txBody>
-      </p:sp>
-      <p:sp>
-        <p:nvSpPr>
-          <p:cNvPr id="213" name="Text 211"/>
-          <p:cNvSpPr txBox="1"/>
-          <p:nvPr/>
-        </p:nvSpPr>
-        <p:spPr>
-          <a:xfrm>
-            <a:off x="6565392" y="5428309"/>
-            <a:ext cx="1783080" cy="248502"/>
-          </a:xfrm>
-          <a:prstGeom prst="rect">
-            <a:avLst/>
-          </a:prstGeom>
-          <a:noFill/>
-          <a:ln/>
-        </p:spPr>
-        <p:txBody>
-          <a:bodyPr wrap="square" lIns="0" tIns="0" rIns="0" bIns="0" rtlCol="0" anchor="ctr"/>
-          <a:lstStyle/>
-          <a:p>
-            <a:pPr indent="0" marL="0">
-              <a:buNone/>
-            </a:pPr>
-            <a:r>
-              <a:rPr lang="en-US" sz="1200" dirty="0">
-                <a:solidFill>
-                  <a:srgbClr val="1A1A1A"/>
-                </a:solidFill>
-                <a:latin typeface="Inter" pitchFamily="34" charset="0"/>
-                <a:ea typeface="Inter" pitchFamily="34" charset="-122"/>
-                <a:cs typeface="Inter" pitchFamily="34" charset="-120"/>
-              </a:rPr>
-              <a:t>TOYOTA SPOKANE</a:t>
-            </a:r>
-            <a:endParaRPr lang="en-US" sz="1200" dirty="0"/>
-          </a:p>
-        </p:txBody>
-      </p:sp>
-      <p:sp>
-        <p:nvSpPr>
-          <p:cNvPr id="214" name="Shape 212"/>
+              <a:t>0.4%</a:t>
+            </a:r>
+            <a:endParaRPr lang="en-US" sz="1300" dirty="0"/>
+          </a:p>
+        </p:txBody>
+      </p:sp>
+      <p:sp>
+        <p:nvSpPr>
+          <p:cNvPr id="221" name="Shape 219"/>
           <p:cNvSpPr/>
           <p:nvPr/>
         </p:nvSpPr>
         <p:spPr>
           <a:xfrm>
-            <a:off x="8421624" y="5484222"/>
-            <a:ext cx="342466" cy="136676"/>
+            <a:off x="11521440" y="5474029"/>
+            <a:ext cx="54864" cy="157062"/>
           </a:xfrm>
           <a:prstGeom prst="rect">
             <a:avLst/>
@@ -16352,124 +16549,7 @@
       </p:sp>
       <p:sp>
         <p:nvSpPr>
-          <p:cNvPr id="215" name="Text 213"/>
-          <p:cNvSpPr txBox="1"/>
-          <p:nvPr/>
-        </p:nvSpPr>
-        <p:spPr>
-          <a:xfrm>
-            <a:off x="8951976" y="5428309"/>
-            <a:ext cx="1005840" cy="248502"/>
-          </a:xfrm>
-          <a:prstGeom prst="rect">
-            <a:avLst/>
-          </a:prstGeom>
-          <a:noFill/>
-          <a:ln/>
-        </p:spPr>
-        <p:txBody>
-          <a:bodyPr wrap="square" lIns="0" tIns="0" rIns="0" bIns="0" rtlCol="0" anchor="ctr"/>
-          <a:lstStyle/>
-          <a:p>
-            <a:pPr algn="r" indent="0" marL="0">
-              <a:buNone/>
-            </a:pPr>
-            <a:r>
-              <a:rPr lang="en-US" sz="1300" b="1" dirty="0">
-                <a:solidFill>
-                  <a:srgbClr val="A82B26"/>
-                </a:solidFill>
-                <a:latin typeface="Inter" pitchFamily="34" charset="0"/>
-                <a:ea typeface="Inter" pitchFamily="34" charset="-122"/>
-                <a:cs typeface="Inter" pitchFamily="34" charset="-120"/>
-              </a:rPr>
-              <a:t>−$180K</a:t>
-            </a:r>
-            <a:endParaRPr lang="en-US" sz="1300" dirty="0"/>
-          </a:p>
-        </p:txBody>
-      </p:sp>
-      <p:sp>
-        <p:nvSpPr>
-          <p:cNvPr id="216" name="Text 214"/>
-          <p:cNvSpPr txBox="1"/>
-          <p:nvPr/>
-        </p:nvSpPr>
-        <p:spPr>
-          <a:xfrm>
-            <a:off x="9957816" y="5428309"/>
-            <a:ext cx="868680" cy="248502"/>
-          </a:xfrm>
-          <a:prstGeom prst="rect">
-            <a:avLst/>
-          </a:prstGeom>
-          <a:noFill/>
-          <a:ln/>
-        </p:spPr>
-        <p:txBody>
-          <a:bodyPr wrap="square" lIns="0" tIns="0" rIns="0" bIns="0" rtlCol="0" anchor="ctr"/>
-          <a:lstStyle/>
-          <a:p>
-            <a:pPr algn="r" indent="0" marL="0">
-              <a:buNone/>
-            </a:pPr>
-            <a:r>
-              <a:rPr lang="en-US" sz="1300" dirty="0">
-                <a:solidFill>
-                  <a:srgbClr val="595959"/>
-                </a:solidFill>
-                <a:latin typeface="Inter" pitchFamily="34" charset="0"/>
-                <a:ea typeface="Inter" pitchFamily="34" charset="-122"/>
-                <a:cs typeface="Inter" pitchFamily="34" charset="-120"/>
-              </a:rPr>
-              <a:t>−3,361</a:t>
-            </a:r>
-            <a:endParaRPr lang="en-US" sz="1300" dirty="0"/>
-          </a:p>
-        </p:txBody>
-      </p:sp>
-      <p:sp>
-        <p:nvSpPr>
-          <p:cNvPr id="217" name="Text 215"/>
-          <p:cNvSpPr txBox="1"/>
-          <p:nvPr/>
-        </p:nvSpPr>
-        <p:spPr>
-          <a:xfrm>
-            <a:off x="10826496" y="5428309"/>
-            <a:ext cx="640080" cy="248502"/>
-          </a:xfrm>
-          <a:prstGeom prst="rect">
-            <a:avLst/>
-          </a:prstGeom>
-          <a:noFill/>
-          <a:ln/>
-        </p:spPr>
-        <p:txBody>
-          <a:bodyPr wrap="square" lIns="0" tIns="0" rIns="0" bIns="0" rtlCol="0" anchor="ctr"/>
-          <a:lstStyle/>
-          <a:p>
-            <a:pPr algn="r" indent="0" marL="0">
-              <a:buNone/>
-            </a:pPr>
-            <a:r>
-              <a:rPr lang="en-US" sz="1300" dirty="0">
-                <a:solidFill>
-                  <a:srgbClr val="595959"/>
-                </a:solidFill>
-                <a:latin typeface="Inter" pitchFamily="34" charset="0"/>
-                <a:ea typeface="Inter" pitchFamily="34" charset="-122"/>
-                <a:cs typeface="Inter" pitchFamily="34" charset="-120"/>
-              </a:rPr>
-              <a:t>0.4%</a:t>
-            </a:r>
-            <a:endParaRPr lang="en-US" sz="1300" dirty="0"/>
-          </a:p>
-        </p:txBody>
-      </p:sp>
-      <p:sp>
-        <p:nvSpPr>
-          <p:cNvPr id="218" name="Shape 216"/>
+          <p:cNvPr id="222" name="Shape 220"/>
           <p:cNvSpPr/>
           <p:nvPr/>
         </p:nvSpPr>
@@ -16489,14 +16569,14 @@
       </p:sp>
       <p:sp>
         <p:nvSpPr>
-          <p:cNvPr id="219" name="Shape 217"/>
+          <p:cNvPr id="223" name="Shape 221"/>
           <p:cNvSpPr/>
           <p:nvPr/>
         </p:nvSpPr>
         <p:spPr>
           <a:xfrm>
             <a:off x="457200" y="6126480"/>
-            <a:ext cx="11274552" cy="341376"/>
+            <a:ext cx="11274552" cy="615696"/>
           </a:xfrm>
           <a:prstGeom prst="rect">
             <a:avLst/>
@@ -16509,14 +16589,14 @@
       </p:sp>
       <p:sp>
         <p:nvSpPr>
-          <p:cNvPr id="220" name="Text 218"/>
+          <p:cNvPr id="224" name="Text 222"/>
           <p:cNvSpPr txBox="1"/>
           <p:nvPr/>
         </p:nvSpPr>
         <p:spPr>
           <a:xfrm>
             <a:off x="658368" y="6144768"/>
-            <a:ext cx="10927080" cy="304800"/>
+            <a:ext cx="10927080" cy="579120"/>
           </a:xfrm>
           <a:prstGeom prst="rect">
             <a:avLst/>
@@ -16532,7 +16612,7 @@
               <a:buNone/>
             </a:pPr>
             <a:r>
-              <a:rPr lang="en-US" sz="1400" b="1" dirty="0">
+              <a:rPr lang="en-US" sz="1600" b="1" dirty="0">
                 <a:solidFill>
                   <a:srgbClr val="A82B26"/>
                 </a:solidFill>
@@ -16540,9 +16620,9 @@
                 <a:ea typeface="Inter" pitchFamily="34" charset="-122"/>
                 <a:cs typeface="Inter" pitchFamily="34" charset="-120"/>
               </a:rPr>
-              <a:t>29 stores under 15% leave $1,664,385 a year; 4 are at or above it. Toyota Spokane is furthest below at −$180K.</a:t>
-            </a:r>
-            <a:endParaRPr lang="en-US" sz="1400" dirty="0"/>
+              <a:t>29 stores under 15% have left $1,248,289 so far this year; 4 are at or above it. Toyota Spokane is furthest below at −$135K.</a:t>
+            </a:r>
+            <a:endParaRPr lang="en-US" sz="1600" dirty="0"/>
           </a:p>
         </p:txBody>
       </p:sp>
@@ -16631,7 +16711,7 @@
                 <a:ea typeface="Inter" pitchFamily="34" charset="-122"/>
                 <a:cs typeface="Inter" pitchFamily="34" charset="-120"/>
               </a:rPr>
-              <a:t>OPCODES · JAN–SEP 2026, ANNUALIZED</a:t>
+              <a:t>OPCODES · JAN–SEP 2026 YTD</a:t>
             </a:r>
             <a:endParaRPr lang="en-US" sz="1400" dirty="0"/>
           </a:p>
@@ -17101,7 +17181,7 @@
                 <a:ea typeface="Inter" pitchFamily="34" charset="-122"/>
                 <a:cs typeface="Inter" pitchFamily="34" charset="-120"/>
               </a:rPr>
-              <a:t>+$260K</a:t>
+              <a:t>+$195K</a:t>
             </a:r>
             <a:endParaRPr lang="en-US" sz="1300" dirty="0"/>
           </a:p>
@@ -17140,7 +17220,7 @@
                 <a:ea typeface="Inter" pitchFamily="34" charset="-122"/>
                 <a:cs typeface="Inter" pitchFamily="34" charset="-120"/>
               </a:rPr>
-              <a:t>+1,680</a:t>
+              <a:t>+1,260</a:t>
             </a:r>
             <a:endParaRPr lang="en-US" sz="1300" dirty="0"/>
           </a:p>
@@ -17336,7 +17416,7 @@
                 <a:ea typeface="Inter" pitchFamily="34" charset="-122"/>
                 <a:cs typeface="Inter" pitchFamily="34" charset="-120"/>
               </a:rPr>
-              <a:t>+$187K</a:t>
+              <a:t>+$141K</a:t>
             </a:r>
             <a:endParaRPr lang="en-US" sz="1300" dirty="0"/>
           </a:p>
@@ -17375,7 +17455,7 @@
                 <a:ea typeface="Inter" pitchFamily="34" charset="-122"/>
                 <a:cs typeface="Inter" pitchFamily="34" charset="-120"/>
               </a:rPr>
-              <a:t>+497</a:t>
+              <a:t>+372</a:t>
             </a:r>
             <a:endParaRPr lang="en-US" sz="1300" dirty="0"/>
           </a:p>
@@ -17571,7 +17651,7 @@
                 <a:ea typeface="Inter" pitchFamily="34" charset="-122"/>
                 <a:cs typeface="Inter" pitchFamily="34" charset="-120"/>
               </a:rPr>
-              <a:t>+$67K</a:t>
+              <a:t>+$51K</a:t>
             </a:r>
             <a:endParaRPr lang="en-US" sz="1300" dirty="0"/>
           </a:p>
@@ -17610,7 +17690,7 @@
                 <a:ea typeface="Inter" pitchFamily="34" charset="-122"/>
                 <a:cs typeface="Inter" pitchFamily="34" charset="-120"/>
               </a:rPr>
-              <a:t>+422</a:t>
+              <a:t>+316</a:t>
             </a:r>
             <a:endParaRPr lang="en-US" sz="1300" dirty="0"/>
           </a:p>
@@ -17786,7 +17866,7 @@
                 <a:ea typeface="Inter" pitchFamily="34" charset="-122"/>
                 <a:cs typeface="Inter" pitchFamily="34" charset="-120"/>
               </a:rPr>
-              <a:t>+$34K</a:t>
+              <a:t>+$25K</a:t>
             </a:r>
             <a:endParaRPr lang="en-US" sz="1300" dirty="0"/>
           </a:p>
@@ -17825,7 +17905,7 @@
                 <a:ea typeface="Inter" pitchFamily="34" charset="-122"/>
                 <a:cs typeface="Inter" pitchFamily="34" charset="-120"/>
               </a:rPr>
-              <a:t>+89</a:t>
+              <a:t>+67</a:t>
             </a:r>
             <a:endParaRPr lang="en-US" sz="1300" dirty="0"/>
           </a:p>
@@ -18021,7 +18101,7 @@
                 <a:ea typeface="Inter" pitchFamily="34" charset="-122"/>
                 <a:cs typeface="Inter" pitchFamily="34" charset="-120"/>
               </a:rPr>
-              <a:t>+$33K</a:t>
+              <a:t>+$24K</a:t>
             </a:r>
             <a:endParaRPr lang="en-US" sz="1300" dirty="0"/>
           </a:p>
@@ -18060,7 +18140,7 @@
                 <a:ea typeface="Inter" pitchFamily="34" charset="-122"/>
                 <a:cs typeface="Inter" pitchFamily="34" charset="-120"/>
               </a:rPr>
-              <a:t>+86</a:t>
+              <a:t>+65</a:t>
             </a:r>
             <a:endParaRPr lang="en-US" sz="1300" dirty="0"/>
           </a:p>
@@ -18236,7 +18316,7 @@
                 <a:ea typeface="Inter" pitchFamily="34" charset="-122"/>
                 <a:cs typeface="Inter" pitchFamily="34" charset="-120"/>
               </a:rPr>
-              <a:t>+$24K</a:t>
+              <a:t>+$18K</a:t>
             </a:r>
             <a:endParaRPr lang="en-US" sz="1300" dirty="0"/>
           </a:p>
@@ -18275,7 +18355,7 @@
                 <a:ea typeface="Inter" pitchFamily="34" charset="-122"/>
                 <a:cs typeface="Inter" pitchFamily="34" charset="-120"/>
               </a:rPr>
-              <a:t>+153</a:t>
+              <a:t>+115</a:t>
             </a:r>
             <a:endParaRPr lang="en-US" sz="1300" dirty="0"/>
           </a:p>
@@ -18451,7 +18531,7 @@
                 <a:ea typeface="Inter" pitchFamily="34" charset="-122"/>
                 <a:cs typeface="Inter" pitchFamily="34" charset="-120"/>
               </a:rPr>
-              <a:t>+$21K</a:t>
+              <a:t>+$16K</a:t>
             </a:r>
             <a:endParaRPr lang="en-US" sz="1300" dirty="0"/>
           </a:p>
@@ -18490,7 +18570,7 @@
                 <a:ea typeface="Inter" pitchFamily="34" charset="-122"/>
                 <a:cs typeface="Inter" pitchFamily="34" charset="-120"/>
               </a:rPr>
-              <a:t>+56</a:t>
+              <a:t>+42</a:t>
             </a:r>
             <a:endParaRPr lang="en-US" sz="1300" dirty="0"/>
           </a:p>
@@ -18666,7 +18746,7 @@
                 <a:ea typeface="Inter" pitchFamily="34" charset="-122"/>
                 <a:cs typeface="Inter" pitchFamily="34" charset="-120"/>
               </a:rPr>
-              <a:t>+$20K</a:t>
+              <a:t>+$15K</a:t>
             </a:r>
             <a:endParaRPr lang="en-US" sz="1300" dirty="0"/>
           </a:p>
@@ -18705,7 +18785,7 @@
                 <a:ea typeface="Inter" pitchFamily="34" charset="-122"/>
                 <a:cs typeface="Inter" pitchFamily="34" charset="-120"/>
               </a:rPr>
-              <a:t>+133</a:t>
+              <a:t>+100</a:t>
             </a:r>
             <a:endParaRPr lang="en-US" sz="1300" dirty="0"/>
           </a:p>
@@ -18881,7 +18961,7 @@
                 <a:ea typeface="Inter" pitchFamily="34" charset="-122"/>
                 <a:cs typeface="Inter" pitchFamily="34" charset="-120"/>
               </a:rPr>
-              <a:t>+$16K</a:t>
+              <a:t>+$12K</a:t>
             </a:r>
             <a:endParaRPr lang="en-US" sz="1300" dirty="0"/>
           </a:p>
@@ -18920,7 +19000,7 @@
                 <a:ea typeface="Inter" pitchFamily="34" charset="-122"/>
                 <a:cs typeface="Inter" pitchFamily="34" charset="-120"/>
               </a:rPr>
-              <a:t>+42</a:t>
+              <a:t>+32</a:t>
             </a:r>
             <a:endParaRPr lang="en-US" sz="1300" dirty="0"/>
           </a:p>
@@ -19096,7 +19176,7 @@
                 <a:ea typeface="Inter" pitchFamily="34" charset="-122"/>
                 <a:cs typeface="Inter" pitchFamily="34" charset="-120"/>
               </a:rPr>
-              <a:t>+$9K</a:t>
+              <a:t>+$7K</a:t>
             </a:r>
             <a:endParaRPr lang="en-US" sz="1300" dirty="0"/>
           </a:p>
@@ -19135,7 +19215,7 @@
                 <a:ea typeface="Inter" pitchFamily="34" charset="-122"/>
                 <a:cs typeface="Inter" pitchFamily="34" charset="-120"/>
               </a:rPr>
-              <a:t>+27</a:t>
+              <a:t>+20</a:t>
             </a:r>
             <a:endParaRPr lang="en-US" sz="1300" dirty="0"/>
           </a:p>
@@ -19311,7 +19391,7 @@
                 <a:ea typeface="Inter" pitchFamily="34" charset="-122"/>
                 <a:cs typeface="Inter" pitchFamily="34" charset="-120"/>
               </a:rPr>
-              <a:t>+$7K</a:t>
+              <a:t>+$5K</a:t>
             </a:r>
             <a:endParaRPr lang="en-US" sz="1300" dirty="0"/>
           </a:p>
@@ -19350,7 +19430,7 @@
                 <a:ea typeface="Inter" pitchFamily="34" charset="-122"/>
                 <a:cs typeface="Inter" pitchFamily="34" charset="-120"/>
               </a:rPr>
-              <a:t>+47</a:t>
+              <a:t>+36</a:t>
             </a:r>
             <a:endParaRPr lang="en-US" sz="1300" dirty="0"/>
           </a:p>
@@ -19526,7 +19606,7 @@
                 <a:ea typeface="Inter" pitchFamily="34" charset="-122"/>
                 <a:cs typeface="Inter" pitchFamily="34" charset="-120"/>
               </a:rPr>
-              <a:t>+$5K</a:t>
+              <a:t>+$4K</a:t>
             </a:r>
             <a:endParaRPr lang="en-US" sz="1300" dirty="0"/>
           </a:p>
@@ -19565,7 +19645,7 @@
                 <a:ea typeface="Inter" pitchFamily="34" charset="-122"/>
                 <a:cs typeface="Inter" pitchFamily="34" charset="-120"/>
               </a:rPr>
-              <a:t>+40</a:t>
+              <a:t>+30</a:t>
             </a:r>
             <a:endParaRPr lang="en-US" sz="1300" dirty="0"/>
           </a:p>
@@ -19741,7 +19821,7 @@
                 <a:ea typeface="Inter" pitchFamily="34" charset="-122"/>
                 <a:cs typeface="Inter" pitchFamily="34" charset="-120"/>
               </a:rPr>
-              <a:t>−$3K</a:t>
+              <a:t>−$2K</a:t>
             </a:r>
             <a:endParaRPr lang="en-US" sz="1300" dirty="0"/>
           </a:p>
@@ -19780,7 +19860,7 @@
                 <a:ea typeface="Inter" pitchFamily="34" charset="-122"/>
                 <a:cs typeface="Inter" pitchFamily="34" charset="-120"/>
               </a:rPr>
-              <a:t>−9</a:t>
+              <a:t>−7</a:t>
             </a:r>
             <a:endParaRPr lang="en-US" sz="1300" dirty="0"/>
           </a:p>
@@ -19956,7 +20036,7 @@
                 <a:ea typeface="Inter" pitchFamily="34" charset="-122"/>
                 <a:cs typeface="Inter" pitchFamily="34" charset="-120"/>
               </a:rPr>
-              <a:t>−$4K</a:t>
+              <a:t>−$3K</a:t>
             </a:r>
             <a:endParaRPr lang="en-US" sz="1300" dirty="0"/>
           </a:p>
@@ -19995,7 +20075,7 @@
                 <a:ea typeface="Inter" pitchFamily="34" charset="-122"/>
                 <a:cs typeface="Inter" pitchFamily="34" charset="-120"/>
               </a:rPr>
-              <a:t>−33</a:t>
+              <a:t>−25</a:t>
             </a:r>
             <a:endParaRPr lang="en-US" sz="1300" dirty="0"/>
           </a:p>
@@ -20171,7 +20251,7 @@
                 <a:ea typeface="Inter" pitchFamily="34" charset="-122"/>
                 <a:cs typeface="Inter" pitchFamily="34" charset="-120"/>
               </a:rPr>
-              <a:t>−$11K</a:t>
+              <a:t>−$8K</a:t>
             </a:r>
             <a:endParaRPr lang="en-US" sz="1300" dirty="0"/>
           </a:p>
@@ -20210,7 +20290,7 @@
                 <a:ea typeface="Inter" pitchFamily="34" charset="-122"/>
                 <a:cs typeface="Inter" pitchFamily="34" charset="-120"/>
               </a:rPr>
-              <a:t>−87</a:t>
+              <a:t>−65</a:t>
             </a:r>
             <a:endParaRPr lang="en-US" sz="1300" dirty="0"/>
           </a:p>
@@ -20386,7 +20466,7 @@
                 <a:ea typeface="Inter" pitchFamily="34" charset="-122"/>
                 <a:cs typeface="Inter" pitchFamily="34" charset="-120"/>
               </a:rPr>
-              <a:t>−$13K</a:t>
+              <a:t>−$10K</a:t>
             </a:r>
             <a:endParaRPr lang="en-US" sz="1300" dirty="0"/>
           </a:p>
@@ -20425,7 +20505,7 @@
                 <a:ea typeface="Inter" pitchFamily="34" charset="-122"/>
                 <a:cs typeface="Inter" pitchFamily="34" charset="-120"/>
               </a:rPr>
-              <a:t>−117</a:t>
+              <a:t>−88</a:t>
             </a:r>
             <a:endParaRPr lang="en-US" sz="1300" dirty="0"/>
           </a:p>
@@ -20601,7 +20681,7 @@
                 <a:ea typeface="Inter" pitchFamily="34" charset="-122"/>
                 <a:cs typeface="Inter" pitchFamily="34" charset="-120"/>
               </a:rPr>
-              <a:t>−$15K</a:t>
+              <a:t>−$11K</a:t>
             </a:r>
             <a:endParaRPr lang="en-US" sz="1300" dirty="0"/>
           </a:p>
@@ -20640,7 +20720,7 @@
                 <a:ea typeface="Inter" pitchFamily="34" charset="-122"/>
                 <a:cs typeface="Inter" pitchFamily="34" charset="-120"/>
               </a:rPr>
-              <a:t>−98</a:t>
+              <a:t>−74</a:t>
             </a:r>
             <a:endParaRPr lang="en-US" sz="1300" dirty="0"/>
           </a:p>
@@ -20816,7 +20896,7 @@
                 <a:ea typeface="Inter" pitchFamily="34" charset="-122"/>
                 <a:cs typeface="Inter" pitchFamily="34" charset="-120"/>
               </a:rPr>
-              <a:t>−$18K</a:t>
+              <a:t>−$13K</a:t>
             </a:r>
             <a:endParaRPr lang="en-US" sz="1300" dirty="0"/>
           </a:p>
@@ -20855,7 +20935,7 @@
                 <a:ea typeface="Inter" pitchFamily="34" charset="-122"/>
                 <a:cs typeface="Inter" pitchFamily="34" charset="-120"/>
               </a:rPr>
-              <a:t>−115</a:t>
+              <a:t>−86</a:t>
             </a:r>
             <a:endParaRPr lang="en-US" sz="1300" dirty="0"/>
           </a:p>
@@ -21031,7 +21111,7 @@
                 <a:ea typeface="Inter" pitchFamily="34" charset="-122"/>
                 <a:cs typeface="Inter" pitchFamily="34" charset="-120"/>
               </a:rPr>
-              <a:t>−$20K</a:t>
+              <a:t>−$15K</a:t>
             </a:r>
             <a:endParaRPr lang="en-US" sz="1300" dirty="0"/>
           </a:p>
@@ -21070,7 +21150,7 @@
                 <a:ea typeface="Inter" pitchFamily="34" charset="-122"/>
                 <a:cs typeface="Inter" pitchFamily="34" charset="-120"/>
               </a:rPr>
-              <a:t>−52</a:t>
+              <a:t>−39</a:t>
             </a:r>
             <a:endParaRPr lang="en-US" sz="1300" dirty="0"/>
           </a:p>
@@ -21246,7 +21326,7 @@
                 <a:ea typeface="Inter" pitchFamily="34" charset="-122"/>
                 <a:cs typeface="Inter" pitchFamily="34" charset="-120"/>
               </a:rPr>
-              <a:t>−$21K</a:t>
+              <a:t>−$15K</a:t>
             </a:r>
             <a:endParaRPr lang="en-US" sz="1300" dirty="0"/>
           </a:p>
@@ -21285,7 +21365,7 @@
                 <a:ea typeface="Inter" pitchFamily="34" charset="-122"/>
                 <a:cs typeface="Inter" pitchFamily="34" charset="-120"/>
               </a:rPr>
-              <a:t>−162</a:t>
+              <a:t>−122</a:t>
             </a:r>
             <a:endParaRPr lang="en-US" sz="1300" dirty="0"/>
           </a:p>
@@ -21461,7 +21541,7 @@
                 <a:ea typeface="Inter" pitchFamily="34" charset="-122"/>
                 <a:cs typeface="Inter" pitchFamily="34" charset="-120"/>
               </a:rPr>
-              <a:t>−$21K</a:t>
+              <a:t>−$16K</a:t>
             </a:r>
             <a:endParaRPr lang="en-US" sz="1300" dirty="0"/>
           </a:p>
@@ -21500,7 +21580,7 @@
                 <a:ea typeface="Inter" pitchFamily="34" charset="-122"/>
                 <a:cs typeface="Inter" pitchFamily="34" charset="-120"/>
               </a:rPr>
-              <a:t>−245</a:t>
+              <a:t>−184</a:t>
             </a:r>
             <a:endParaRPr lang="en-US" sz="1300" dirty="0"/>
           </a:p>
@@ -21676,7 +21756,7 @@
                 <a:ea typeface="Inter" pitchFamily="34" charset="-122"/>
                 <a:cs typeface="Inter" pitchFamily="34" charset="-120"/>
               </a:rPr>
-              <a:t>−$22K</a:t>
+              <a:t>−$17K</a:t>
             </a:r>
             <a:endParaRPr lang="en-US" sz="1300" dirty="0"/>
           </a:p>
@@ -21715,7 +21795,7 @@
                 <a:ea typeface="Inter" pitchFamily="34" charset="-122"/>
                 <a:cs typeface="Inter" pitchFamily="34" charset="-120"/>
               </a:rPr>
-              <a:t>−187</a:t>
+              <a:t>−140</a:t>
             </a:r>
             <a:endParaRPr lang="en-US" sz="1300" dirty="0"/>
           </a:p>
@@ -21891,7 +21971,7 @@
                 <a:ea typeface="Inter" pitchFamily="34" charset="-122"/>
                 <a:cs typeface="Inter" pitchFamily="34" charset="-120"/>
               </a:rPr>
-              <a:t>−$25K</a:t>
+              <a:t>−$19K</a:t>
             </a:r>
             <a:endParaRPr lang="en-US" sz="1300" dirty="0"/>
           </a:p>
@@ -21930,7 +22010,7 @@
                 <a:ea typeface="Inter" pitchFamily="34" charset="-122"/>
                 <a:cs typeface="Inter" pitchFamily="34" charset="-120"/>
               </a:rPr>
-              <a:t>−211</a:t>
+              <a:t>−158</a:t>
             </a:r>
             <a:endParaRPr lang="en-US" sz="1300" dirty="0"/>
           </a:p>
@@ -22106,7 +22186,7 @@
                 <a:ea typeface="Inter" pitchFamily="34" charset="-122"/>
                 <a:cs typeface="Inter" pitchFamily="34" charset="-120"/>
               </a:rPr>
-              <a:t>−$32K</a:t>
+              <a:t>−$24K</a:t>
             </a:r>
             <a:endParaRPr lang="en-US" sz="1300" dirty="0"/>
           </a:p>
@@ -22145,7 +22225,7 @@
                 <a:ea typeface="Inter" pitchFamily="34" charset="-122"/>
                 <a:cs typeface="Inter" pitchFamily="34" charset="-120"/>
               </a:rPr>
-              <a:t>−235</a:t>
+              <a:t>−176</a:t>
             </a:r>
             <a:endParaRPr lang="en-US" sz="1300" dirty="0"/>
           </a:p>
@@ -22321,7 +22401,7 @@
                 <a:ea typeface="Inter" pitchFamily="34" charset="-122"/>
                 <a:cs typeface="Inter" pitchFamily="34" charset="-120"/>
               </a:rPr>
-              <a:t>−$32K</a:t>
+              <a:t>−$24K</a:t>
             </a:r>
             <a:endParaRPr lang="en-US" sz="1300" dirty="0"/>
           </a:p>
@@ -22360,7 +22440,7 @@
                 <a:ea typeface="Inter" pitchFamily="34" charset="-122"/>
                 <a:cs typeface="Inter" pitchFamily="34" charset="-120"/>
               </a:rPr>
-              <a:t>−287</a:t>
+              <a:t>−215</a:t>
             </a:r>
             <a:endParaRPr lang="en-US" sz="1300" dirty="0"/>
           </a:p>
@@ -22536,7 +22616,7 @@
                 <a:ea typeface="Inter" pitchFamily="34" charset="-122"/>
                 <a:cs typeface="Inter" pitchFamily="34" charset="-120"/>
               </a:rPr>
-              <a:t>−$48K</a:t>
+              <a:t>−$36K</a:t>
             </a:r>
             <a:endParaRPr lang="en-US" sz="1300" dirty="0"/>
           </a:p>
@@ -22575,7 +22655,7 @@
                 <a:ea typeface="Inter" pitchFamily="34" charset="-122"/>
                 <a:cs typeface="Inter" pitchFamily="34" charset="-120"/>
               </a:rPr>
-              <a:t>−389</a:t>
+              <a:t>−292</a:t>
             </a:r>
             <a:endParaRPr lang="en-US" sz="1300" dirty="0"/>
           </a:p>
@@ -22751,7 +22831,7 @@
                 <a:ea typeface="Inter" pitchFamily="34" charset="-122"/>
                 <a:cs typeface="Inter" pitchFamily="34" charset="-120"/>
               </a:rPr>
-              <a:t>−$53K</a:t>
+              <a:t>−$39K</a:t>
             </a:r>
             <a:endParaRPr lang="en-US" sz="1300" dirty="0"/>
           </a:p>
@@ -22790,7 +22870,7 @@
                 <a:ea typeface="Inter" pitchFamily="34" charset="-122"/>
                 <a:cs typeface="Inter" pitchFamily="34" charset="-120"/>
               </a:rPr>
-              <a:t>−412</a:t>
+              <a:t>−309</a:t>
             </a:r>
             <a:endParaRPr lang="en-US" sz="1300" dirty="0"/>
           </a:p>
@@ -22966,7 +23046,7 @@
                 <a:ea typeface="Inter" pitchFamily="34" charset="-122"/>
                 <a:cs typeface="Inter" pitchFamily="34" charset="-120"/>
               </a:rPr>
-              <a:t>−$57K</a:t>
+              <a:t>−$43K</a:t>
             </a:r>
             <a:endParaRPr lang="en-US" sz="1300" dirty="0"/>
           </a:p>
@@ -23005,7 +23085,7 @@
                 <a:ea typeface="Inter" pitchFamily="34" charset="-122"/>
                 <a:cs typeface="Inter" pitchFamily="34" charset="-120"/>
               </a:rPr>
-              <a:t>−379</a:t>
+              <a:t>−284</a:t>
             </a:r>
             <a:endParaRPr lang="en-US" sz="1300" dirty="0"/>
           </a:p>
@@ -23181,7 +23261,7 @@
                 <a:ea typeface="Inter" pitchFamily="34" charset="-122"/>
                 <a:cs typeface="Inter" pitchFamily="34" charset="-120"/>
               </a:rPr>
-              <a:t>−$67K</a:t>
+              <a:t>−$51K</a:t>
             </a:r>
             <a:endParaRPr lang="en-US" sz="1300" dirty="0"/>
           </a:p>
@@ -23220,7 +23300,7 @@
                 <a:ea typeface="Inter" pitchFamily="34" charset="-122"/>
                 <a:cs typeface="Inter" pitchFamily="34" charset="-120"/>
               </a:rPr>
-              <a:t>−367</a:t>
+              <a:t>−275</a:t>
             </a:r>
             <a:endParaRPr lang="en-US" sz="1300" dirty="0"/>
           </a:p>
@@ -23416,7 +23496,7 @@
                 <a:ea typeface="Inter" pitchFamily="34" charset="-122"/>
                 <a:cs typeface="Inter" pitchFamily="34" charset="-120"/>
               </a:rPr>
-              <a:t>−$74K</a:t>
+              <a:t>−$56K</a:t>
             </a:r>
             <a:endParaRPr lang="en-US" sz="1300" dirty="0"/>
           </a:p>
@@ -23455,7 +23535,7 @@
                 <a:ea typeface="Inter" pitchFamily="34" charset="-122"/>
                 <a:cs typeface="Inter" pitchFamily="34" charset="-120"/>
               </a:rPr>
-              <a:t>−380</a:t>
+              <a:t>−285</a:t>
             </a:r>
             <a:endParaRPr lang="en-US" sz="1300" dirty="0"/>
           </a:p>
@@ -23651,7 +23731,7 @@
                 <a:ea typeface="Inter" pitchFamily="34" charset="-122"/>
                 <a:cs typeface="Inter" pitchFamily="34" charset="-120"/>
               </a:rPr>
-              <a:t>−$78K</a:t>
+              <a:t>−$58K</a:t>
             </a:r>
             <a:endParaRPr lang="en-US" sz="1300" dirty="0"/>
           </a:p>
@@ -23690,7 +23770,7 @@
                 <a:ea typeface="Inter" pitchFamily="34" charset="-122"/>
                 <a:cs typeface="Inter" pitchFamily="34" charset="-120"/>
               </a:rPr>
-              <a:t>−378</a:t>
+              <a:t>−283</a:t>
             </a:r>
             <a:endParaRPr lang="en-US" sz="1300" dirty="0"/>
           </a:p>
@@ -23886,7 +23966,7 @@
                 <a:ea typeface="Inter" pitchFamily="34" charset="-122"/>
                 <a:cs typeface="Inter" pitchFamily="34" charset="-120"/>
               </a:rPr>
-              <a:t>−$80K</a:t>
+              <a:t>−$60K</a:t>
             </a:r>
             <a:endParaRPr lang="en-US" sz="1300" dirty="0"/>
           </a:p>
@@ -23925,7 +24005,7 @@
                 <a:ea typeface="Inter" pitchFamily="34" charset="-122"/>
                 <a:cs typeface="Inter" pitchFamily="34" charset="-120"/>
               </a:rPr>
-              <a:t>−683</a:t>
+              <a:t>−513</a:t>
             </a:r>
             <a:endParaRPr lang="en-US" sz="1300" dirty="0"/>
           </a:p>
@@ -24101,7 +24181,7 @@
                 <a:ea typeface="Inter" pitchFamily="34" charset="-122"/>
                 <a:cs typeface="Inter" pitchFamily="34" charset="-120"/>
               </a:rPr>
-              <a:t>−$151K</a:t>
+              <a:t>−$113K</a:t>
             </a:r>
             <a:endParaRPr lang="en-US" sz="1300" dirty="0"/>
           </a:p>
@@ -24140,7 +24220,7 @@
                 <a:ea typeface="Inter" pitchFamily="34" charset="-122"/>
                 <a:cs typeface="Inter" pitchFamily="34" charset="-120"/>
               </a:rPr>
-              <a:t>−1,093</a:t>
+              <a:t>−820</a:t>
             </a:r>
             <a:endParaRPr lang="en-US" sz="1300" dirty="0"/>
           </a:p>
@@ -24214,7 +24294,7 @@
         <p:spPr>
           <a:xfrm>
             <a:off x="457200" y="6126480"/>
-            <a:ext cx="11274552" cy="356616"/>
+            <a:ext cx="11274552" cy="615696"/>
           </a:xfrm>
           <a:prstGeom prst="rect">
             <a:avLst/>
@@ -24234,7 +24314,7 @@
         <p:spPr>
           <a:xfrm>
             <a:off x="658368" y="6144768"/>
-            <a:ext cx="10927080" cy="320040"/>
+            <a:ext cx="10927080" cy="579120"/>
           </a:xfrm>
           <a:prstGeom prst="rect">
             <a:avLst/>
@@ -24250,7 +24330,7 @@
               <a:buNone/>
             </a:pPr>
             <a:r>
-              <a:rPr lang="en-US" sz="1500" b="1" dirty="0">
+              <a:rPr lang="en-US" sz="1600" b="1" dirty="0">
                 <a:solidFill>
                   <a:srgbClr val="A82B26"/>
                 </a:solidFill>
@@ -24258,9 +24338,9 @@
                 <a:ea typeface="Inter" pitchFamily="34" charset="-122"/>
                 <a:cs typeface="Inter" pitchFamily="34" charset="-120"/>
               </a:rPr>
-              <a:t>21 stores under 10% leave $844,657 a year; 12 are at or above it. Chevy LV is furthest below at −$151K.</a:t>
-            </a:r>
-            <a:endParaRPr lang="en-US" sz="1500" dirty="0"/>
+              <a:t>21 stores under 10% have left $633,493 so far this year; 12 are at or above it. Chevy LV is furthest below at −$113K.</a:t>
+            </a:r>
+            <a:endParaRPr lang="en-US" sz="1600" dirty="0"/>
           </a:p>
         </p:txBody>
       </p:sp>
@@ -24349,7 +24429,7 @@
                 <a:ea typeface="Inter" pitchFamily="34" charset="-122"/>
                 <a:cs typeface="Inter" pitchFamily="34" charset="-120"/>
               </a:rPr>
-              <a:t>OPCODES · JAN–SEP 2026, ANNUALIZED</a:t>
+              <a:t>OPCODES · JAN–SEP 2026 YTD</a:t>
             </a:r>
             <a:endParaRPr lang="en-US" sz="1400" dirty="0"/>
           </a:p>
@@ -24819,7 +24899,7 @@
                 <a:ea typeface="Inter" pitchFamily="34" charset="-122"/>
                 <a:cs typeface="Inter" pitchFamily="34" charset="-120"/>
               </a:rPr>
-              <a:t>+$185K</a:t>
+              <a:t>+$138K</a:t>
             </a:r>
             <a:endParaRPr lang="en-US" sz="1300" dirty="0"/>
           </a:p>
@@ -24858,7 +24938,7 @@
                 <a:ea typeface="Inter" pitchFamily="34" charset="-122"/>
                 <a:cs typeface="Inter" pitchFamily="34" charset="-120"/>
               </a:rPr>
-              <a:t>+1,366</a:t>
+              <a:t>+1,024</a:t>
             </a:r>
             <a:endParaRPr lang="en-US" sz="1300" dirty="0"/>
           </a:p>
@@ -25054,7 +25134,7 @@
                 <a:ea typeface="Inter" pitchFamily="34" charset="-122"/>
                 <a:cs typeface="Inter" pitchFamily="34" charset="-120"/>
               </a:rPr>
-              <a:t>+$72K</a:t>
+              <a:t>+$54K</a:t>
             </a:r>
             <a:endParaRPr lang="en-US" sz="1300" dirty="0"/>
           </a:p>
@@ -25093,7 +25173,7 @@
                 <a:ea typeface="Inter" pitchFamily="34" charset="-122"/>
                 <a:cs typeface="Inter" pitchFamily="34" charset="-120"/>
               </a:rPr>
-              <a:t>+470</a:t>
+              <a:t>+353</a:t>
             </a:r>
             <a:endParaRPr lang="en-US" sz="1300" dirty="0"/>
           </a:p>
@@ -25289,7 +25369,7 @@
                 <a:ea typeface="Inter" pitchFamily="34" charset="-122"/>
                 <a:cs typeface="Inter" pitchFamily="34" charset="-120"/>
               </a:rPr>
-              <a:t>+$51K</a:t>
+              <a:t>+$39K</a:t>
             </a:r>
             <a:endParaRPr lang="en-US" sz="1300" dirty="0"/>
           </a:p>
@@ -25328,7 +25408,7 @@
                 <a:ea typeface="Inter" pitchFamily="34" charset="-122"/>
                 <a:cs typeface="Inter" pitchFamily="34" charset="-120"/>
               </a:rPr>
-              <a:t>+156</a:t>
+              <a:t>+117</a:t>
             </a:r>
             <a:endParaRPr lang="en-US" sz="1300" dirty="0"/>
           </a:p>
@@ -25524,7 +25604,7 @@
                 <a:ea typeface="Inter" pitchFamily="34" charset="-122"/>
                 <a:cs typeface="Inter" pitchFamily="34" charset="-120"/>
               </a:rPr>
-              <a:t>+$13K</a:t>
+              <a:t>+$10K</a:t>
             </a:r>
             <a:endParaRPr lang="en-US" sz="1300" dirty="0"/>
           </a:p>
@@ -25563,7 +25643,7 @@
                 <a:ea typeface="Inter" pitchFamily="34" charset="-122"/>
                 <a:cs typeface="Inter" pitchFamily="34" charset="-120"/>
               </a:rPr>
-              <a:t>+92</a:t>
+              <a:t>+69</a:t>
             </a:r>
             <a:endParaRPr lang="en-US" sz="1300" dirty="0"/>
           </a:p>
@@ -25739,7 +25819,7 @@
                 <a:ea typeface="Inter" pitchFamily="34" charset="-122"/>
                 <a:cs typeface="Inter" pitchFamily="34" charset="-120"/>
               </a:rPr>
-              <a:t>+$12K</a:t>
+              <a:t>+$9K</a:t>
             </a:r>
             <a:endParaRPr lang="en-US" sz="1300" dirty="0"/>
           </a:p>
@@ -25778,7 +25858,7 @@
                 <a:ea typeface="Inter" pitchFamily="34" charset="-122"/>
                 <a:cs typeface="Inter" pitchFamily="34" charset="-120"/>
               </a:rPr>
-              <a:t>+75</a:t>
+              <a:t>+57</a:t>
             </a:r>
             <a:endParaRPr lang="en-US" sz="1300" dirty="0"/>
           </a:p>
@@ -25954,7 +26034,7 @@
                 <a:ea typeface="Inter" pitchFamily="34" charset="-122"/>
                 <a:cs typeface="Inter" pitchFamily="34" charset="-120"/>
               </a:rPr>
-              <a:t>+$4K</a:t>
+              <a:t>+$3K</a:t>
             </a:r>
             <a:endParaRPr lang="en-US" sz="1300" dirty="0"/>
           </a:p>
@@ -25993,7 +26073,7 @@
                 <a:ea typeface="Inter" pitchFamily="34" charset="-122"/>
                 <a:cs typeface="Inter" pitchFamily="34" charset="-120"/>
               </a:rPr>
-              <a:t>+25</a:t>
+              <a:t>+19</a:t>
             </a:r>
             <a:endParaRPr lang="en-US" sz="1300" dirty="0"/>
           </a:p>
@@ -26169,7 +26249,7 @@
                 <a:ea typeface="Inter" pitchFamily="34" charset="-122"/>
                 <a:cs typeface="Inter" pitchFamily="34" charset="-120"/>
               </a:rPr>
-              <a:t>+$4K</a:t>
+              <a:t>+$3K</a:t>
             </a:r>
             <a:endParaRPr lang="en-US" sz="1300" dirty="0"/>
           </a:p>
@@ -26208,7 +26288,7 @@
                 <a:ea typeface="Inter" pitchFamily="34" charset="-122"/>
                 <a:cs typeface="Inter" pitchFamily="34" charset="-120"/>
               </a:rPr>
-              <a:t>+34</a:t>
+              <a:t>+25</a:t>
             </a:r>
             <a:endParaRPr lang="en-US" sz="1300" dirty="0"/>
           </a:p>
@@ -26384,7 +26464,7 @@
                 <a:ea typeface="Inter" pitchFamily="34" charset="-122"/>
                 <a:cs typeface="Inter" pitchFamily="34" charset="-120"/>
               </a:rPr>
-              <a:t>−$1K</a:t>
+              <a:t>−$905</a:t>
             </a:r>
             <a:endParaRPr lang="en-US" sz="1300" dirty="0"/>
           </a:p>
@@ -26423,7 +26503,7 @@
                 <a:ea typeface="Inter" pitchFamily="34" charset="-122"/>
                 <a:cs typeface="Inter" pitchFamily="34" charset="-120"/>
               </a:rPr>
-              <a:t>−4</a:t>
+              <a:t>−3</a:t>
             </a:r>
             <a:endParaRPr lang="en-US" sz="1300" dirty="0"/>
           </a:p>
@@ -26599,7 +26679,7 @@
                 <a:ea typeface="Inter" pitchFamily="34" charset="-122"/>
                 <a:cs typeface="Inter" pitchFamily="34" charset="-120"/>
               </a:rPr>
-              <a:t>−$10K</a:t>
+              <a:t>−$8K</a:t>
             </a:r>
             <a:endParaRPr lang="en-US" sz="1300" dirty="0"/>
           </a:p>
@@ -26638,7 +26718,7 @@
                 <a:ea typeface="Inter" pitchFamily="34" charset="-122"/>
                 <a:cs typeface="Inter" pitchFamily="34" charset="-120"/>
               </a:rPr>
-              <a:t>−78</a:t>
+              <a:t>−59</a:t>
             </a:r>
             <a:endParaRPr lang="en-US" sz="1300" dirty="0"/>
           </a:p>
@@ -26814,7 +26894,7 @@
                 <a:ea typeface="Inter" pitchFamily="34" charset="-122"/>
                 <a:cs typeface="Inter" pitchFamily="34" charset="-120"/>
               </a:rPr>
-              <a:t>−$13K</a:t>
+              <a:t>−$10K</a:t>
             </a:r>
             <a:endParaRPr lang="en-US" sz="1300" dirty="0"/>
           </a:p>
@@ -26853,7 +26933,7 @@
                 <a:ea typeface="Inter" pitchFamily="34" charset="-122"/>
                 <a:cs typeface="Inter" pitchFamily="34" charset="-120"/>
               </a:rPr>
-              <a:t>−72</a:t>
+              <a:t>−54</a:t>
             </a:r>
             <a:endParaRPr lang="en-US" sz="1300" dirty="0"/>
           </a:p>
@@ -27029,7 +27109,7 @@
                 <a:ea typeface="Inter" pitchFamily="34" charset="-122"/>
                 <a:cs typeface="Inter" pitchFamily="34" charset="-120"/>
               </a:rPr>
-              <a:t>−$18K</a:t>
+              <a:t>−$14K</a:t>
             </a:r>
             <a:endParaRPr lang="en-US" sz="1300" dirty="0"/>
           </a:p>
@@ -27068,7 +27148,7 @@
                 <a:ea typeface="Inter" pitchFamily="34" charset="-122"/>
                 <a:cs typeface="Inter" pitchFamily="34" charset="-120"/>
               </a:rPr>
-              <a:t>−55</a:t>
+              <a:t>−42</a:t>
             </a:r>
             <a:endParaRPr lang="en-US" sz="1300" dirty="0"/>
           </a:p>
@@ -27244,7 +27324,7 @@
                 <a:ea typeface="Inter" pitchFamily="34" charset="-122"/>
                 <a:cs typeface="Inter" pitchFamily="34" charset="-120"/>
               </a:rPr>
-              <a:t>−$19K</a:t>
+              <a:t>−$14K</a:t>
             </a:r>
             <a:endParaRPr lang="en-US" sz="1300" dirty="0"/>
           </a:p>
@@ -27283,7 +27363,7 @@
                 <a:ea typeface="Inter" pitchFamily="34" charset="-122"/>
                 <a:cs typeface="Inter" pitchFamily="34" charset="-120"/>
               </a:rPr>
-              <a:t>−186</a:t>
+              <a:t>−140</a:t>
             </a:r>
             <a:endParaRPr lang="en-US" sz="1300" dirty="0"/>
           </a:p>
@@ -27459,7 +27539,7 @@
                 <a:ea typeface="Inter" pitchFamily="34" charset="-122"/>
                 <a:cs typeface="Inter" pitchFamily="34" charset="-120"/>
               </a:rPr>
-              <a:t>−$21K</a:t>
+              <a:t>−$16K</a:t>
             </a:r>
             <a:endParaRPr lang="en-US" sz="1300" dirty="0"/>
           </a:p>
@@ -27498,7 +27578,7 @@
                 <a:ea typeface="Inter" pitchFamily="34" charset="-122"/>
                 <a:cs typeface="Inter" pitchFamily="34" charset="-120"/>
               </a:rPr>
-              <a:t>−160</a:t>
+              <a:t>−120</a:t>
             </a:r>
             <a:endParaRPr lang="en-US" sz="1300" dirty="0"/>
           </a:p>
@@ -27674,7 +27754,7 @@
                 <a:ea typeface="Inter" pitchFamily="34" charset="-122"/>
                 <a:cs typeface="Inter" pitchFamily="34" charset="-120"/>
               </a:rPr>
-              <a:t>−$24K</a:t>
+              <a:t>−$18K</a:t>
             </a:r>
             <a:endParaRPr lang="en-US" sz="1300" dirty="0"/>
           </a:p>
@@ -27713,7 +27793,7 @@
                 <a:ea typeface="Inter" pitchFamily="34" charset="-122"/>
                 <a:cs typeface="Inter" pitchFamily="34" charset="-120"/>
               </a:rPr>
-              <a:t>−92</a:t>
+              <a:t>−69</a:t>
             </a:r>
             <a:endParaRPr lang="en-US" sz="1300" dirty="0"/>
           </a:p>
@@ -27889,7 +27969,7 @@
                 <a:ea typeface="Inter" pitchFamily="34" charset="-122"/>
                 <a:cs typeface="Inter" pitchFamily="34" charset="-120"/>
               </a:rPr>
-              <a:t>−$25K</a:t>
+              <a:t>−$19K</a:t>
             </a:r>
             <a:endParaRPr lang="en-US" sz="1300" dirty="0"/>
           </a:p>
@@ -27928,7 +28008,7 @@
                 <a:ea typeface="Inter" pitchFamily="34" charset="-122"/>
                 <a:cs typeface="Inter" pitchFamily="34" charset="-120"/>
               </a:rPr>
-              <a:t>−195</a:t>
+              <a:t>−147</a:t>
             </a:r>
             <a:endParaRPr lang="en-US" sz="1300" dirty="0"/>
           </a:p>
@@ -28104,7 +28184,7 @@
                 <a:ea typeface="Inter" pitchFamily="34" charset="-122"/>
                 <a:cs typeface="Inter" pitchFamily="34" charset="-120"/>
               </a:rPr>
-              <a:t>−$26K</a:t>
+              <a:t>−$20K</a:t>
             </a:r>
             <a:endParaRPr lang="en-US" sz="1300" dirty="0"/>
           </a:p>
@@ -28143,7 +28223,7 @@
                 <a:ea typeface="Inter" pitchFamily="34" charset="-122"/>
                 <a:cs typeface="Inter" pitchFamily="34" charset="-120"/>
               </a:rPr>
-              <a:t>−174</a:t>
+              <a:t>−131</a:t>
             </a:r>
             <a:endParaRPr lang="en-US" sz="1300" dirty="0"/>
           </a:p>
@@ -28319,7 +28399,7 @@
                 <a:ea typeface="Inter" pitchFamily="34" charset="-122"/>
                 <a:cs typeface="Inter" pitchFamily="34" charset="-120"/>
               </a:rPr>
-              <a:t>−$29K</a:t>
+              <a:t>−$22K</a:t>
             </a:r>
             <a:endParaRPr lang="en-US" sz="1300" dirty="0"/>
           </a:p>
@@ -28358,7 +28438,7 @@
                 <a:ea typeface="Inter" pitchFamily="34" charset="-122"/>
                 <a:cs typeface="Inter" pitchFamily="34" charset="-120"/>
               </a:rPr>
-              <a:t>−123</a:t>
+              <a:t>−92</a:t>
             </a:r>
             <a:endParaRPr lang="en-US" sz="1300" dirty="0"/>
           </a:p>
@@ -28534,7 +28614,7 @@
                 <a:ea typeface="Inter" pitchFamily="34" charset="-122"/>
                 <a:cs typeface="Inter" pitchFamily="34" charset="-120"/>
               </a:rPr>
-              <a:t>−$34K</a:t>
+              <a:t>−$25K</a:t>
             </a:r>
             <a:endParaRPr lang="en-US" sz="1300" dirty="0"/>
           </a:p>
@@ -28573,7 +28653,7 @@
                 <a:ea typeface="Inter" pitchFamily="34" charset="-122"/>
                 <a:cs typeface="Inter" pitchFamily="34" charset="-120"/>
               </a:rPr>
-              <a:t>−103</a:t>
+              <a:t>−77</a:t>
             </a:r>
             <a:endParaRPr lang="en-US" sz="1300" dirty="0"/>
           </a:p>
@@ -28749,7 +28829,7 @@
                 <a:ea typeface="Inter" pitchFamily="34" charset="-122"/>
                 <a:cs typeface="Inter" pitchFamily="34" charset="-120"/>
               </a:rPr>
-              <a:t>−$46K</a:t>
+              <a:t>−$34K</a:t>
             </a:r>
             <a:endParaRPr lang="en-US" sz="1300" dirty="0"/>
           </a:p>
@@ -28788,7 +28868,7 @@
                 <a:ea typeface="Inter" pitchFamily="34" charset="-122"/>
                 <a:cs typeface="Inter" pitchFamily="34" charset="-120"/>
               </a:rPr>
-              <a:t>−170</a:t>
+              <a:t>−128</a:t>
             </a:r>
             <a:endParaRPr lang="en-US" sz="1300" dirty="0"/>
           </a:p>
@@ -28964,7 +29044,7 @@
                 <a:ea typeface="Inter" pitchFamily="34" charset="-122"/>
                 <a:cs typeface="Inter" pitchFamily="34" charset="-120"/>
               </a:rPr>
-              <a:t>−$51K</a:t>
+              <a:t>−$39K</a:t>
             </a:r>
             <a:endParaRPr lang="en-US" sz="1300" dirty="0"/>
           </a:p>
@@ -29003,7 +29083,7 @@
                 <a:ea typeface="Inter" pitchFamily="34" charset="-122"/>
                 <a:cs typeface="Inter" pitchFamily="34" charset="-120"/>
               </a:rPr>
-              <a:t>−313</a:t>
+              <a:t>−234</a:t>
             </a:r>
             <a:endParaRPr lang="en-US" sz="1300" dirty="0"/>
           </a:p>
@@ -29179,7 +29259,7 @@
                 <a:ea typeface="Inter" pitchFamily="34" charset="-122"/>
                 <a:cs typeface="Inter" pitchFamily="34" charset="-120"/>
               </a:rPr>
-              <a:t>−$56K</a:t>
+              <a:t>−$42K</a:t>
             </a:r>
             <a:endParaRPr lang="en-US" sz="1300" dirty="0"/>
           </a:p>
@@ -29218,7 +29298,7 @@
                 <a:ea typeface="Inter" pitchFamily="34" charset="-122"/>
                 <a:cs typeface="Inter" pitchFamily="34" charset="-120"/>
               </a:rPr>
-              <a:t>−340</a:t>
+              <a:t>−255</a:t>
             </a:r>
             <a:endParaRPr lang="en-US" sz="1300" dirty="0"/>
           </a:p>
@@ -29414,7 +29494,7 @@
                 <a:ea typeface="Inter" pitchFamily="34" charset="-122"/>
                 <a:cs typeface="Inter" pitchFamily="34" charset="-120"/>
               </a:rPr>
-              <a:t>−$56K</a:t>
+              <a:t>−$42K</a:t>
             </a:r>
             <a:endParaRPr lang="en-US" sz="1300" dirty="0"/>
           </a:p>
@@ -29453,7 +29533,7 @@
                 <a:ea typeface="Inter" pitchFamily="34" charset="-122"/>
                 <a:cs typeface="Inter" pitchFamily="34" charset="-120"/>
               </a:rPr>
-              <a:t>−387</a:t>
+              <a:t>−290</a:t>
             </a:r>
             <a:endParaRPr lang="en-US" sz="1300" dirty="0"/>
           </a:p>
@@ -29629,7 +29709,7 @@
                 <a:ea typeface="Inter" pitchFamily="34" charset="-122"/>
                 <a:cs typeface="Inter" pitchFamily="34" charset="-120"/>
               </a:rPr>
-              <a:t>−$60K</a:t>
+              <a:t>−$45K</a:t>
             </a:r>
             <a:endParaRPr lang="en-US" sz="1300" dirty="0"/>
           </a:p>
@@ -29668,7 +29748,7 @@
                 <a:ea typeface="Inter" pitchFamily="34" charset="-122"/>
                 <a:cs typeface="Inter" pitchFamily="34" charset="-120"/>
               </a:rPr>
-              <a:t>−364</a:t>
+              <a:t>−273</a:t>
             </a:r>
             <a:endParaRPr lang="en-US" sz="1300" dirty="0"/>
           </a:p>
@@ -29844,7 +29924,7 @@
                 <a:ea typeface="Inter" pitchFamily="34" charset="-122"/>
                 <a:cs typeface="Inter" pitchFamily="34" charset="-120"/>
               </a:rPr>
-              <a:t>−$62K</a:t>
+              <a:t>−$46K</a:t>
             </a:r>
             <a:endParaRPr lang="en-US" sz="1300" dirty="0"/>
           </a:p>
@@ -29883,7 +29963,7 @@
                 <a:ea typeface="Inter" pitchFamily="34" charset="-122"/>
                 <a:cs typeface="Inter" pitchFamily="34" charset="-120"/>
               </a:rPr>
-              <a:t>−321</a:t>
+              <a:t>−241</a:t>
             </a:r>
             <a:endParaRPr lang="en-US" sz="1300" dirty="0"/>
           </a:p>
@@ -30059,7 +30139,7 @@
                 <a:ea typeface="Inter" pitchFamily="34" charset="-122"/>
                 <a:cs typeface="Inter" pitchFamily="34" charset="-120"/>
               </a:rPr>
-              <a:t>−$62K</a:t>
+              <a:t>−$47K</a:t>
             </a:r>
             <a:endParaRPr lang="en-US" sz="1300" dirty="0"/>
           </a:p>
@@ -30098,7 +30178,7 @@
                 <a:ea typeface="Inter" pitchFamily="34" charset="-122"/>
                 <a:cs typeface="Inter" pitchFamily="34" charset="-120"/>
               </a:rPr>
-              <a:t>−378</a:t>
+              <a:t>−283</a:t>
             </a:r>
             <a:endParaRPr lang="en-US" sz="1300" dirty="0"/>
           </a:p>
@@ -30294,7 +30374,7 @@
                 <a:ea typeface="Inter" pitchFamily="34" charset="-122"/>
                 <a:cs typeface="Inter" pitchFamily="34" charset="-120"/>
               </a:rPr>
-              <a:t>−$64K</a:t>
+              <a:t>−$48K</a:t>
             </a:r>
             <a:endParaRPr lang="en-US" sz="1300" dirty="0"/>
           </a:p>
@@ -30333,7 +30413,7 @@
                 <a:ea typeface="Inter" pitchFamily="34" charset="-122"/>
                 <a:cs typeface="Inter" pitchFamily="34" charset="-120"/>
               </a:rPr>
-              <a:t>−308</a:t>
+              <a:t>−231</a:t>
             </a:r>
             <a:endParaRPr lang="en-US" sz="1300" dirty="0"/>
           </a:p>
@@ -30509,7 +30589,7 @@
                 <a:ea typeface="Inter" pitchFamily="34" charset="-122"/>
                 <a:cs typeface="Inter" pitchFamily="34" charset="-120"/>
               </a:rPr>
-              <a:t>−$65K</a:t>
+              <a:t>−$49K</a:t>
             </a:r>
             <a:endParaRPr lang="en-US" sz="1300" dirty="0"/>
           </a:p>
@@ -30548,7 +30628,7 @@
                 <a:ea typeface="Inter" pitchFamily="34" charset="-122"/>
                 <a:cs typeface="Inter" pitchFamily="34" charset="-120"/>
               </a:rPr>
-              <a:t>−400</a:t>
+              <a:t>−300</a:t>
             </a:r>
             <a:endParaRPr lang="en-US" sz="1300" dirty="0"/>
           </a:p>
@@ -30724,7 +30804,7 @@
                 <a:ea typeface="Inter" pitchFamily="34" charset="-122"/>
                 <a:cs typeface="Inter" pitchFamily="34" charset="-120"/>
               </a:rPr>
-              <a:t>−$75K</a:t>
+              <a:t>−$56K</a:t>
             </a:r>
             <a:endParaRPr lang="en-US" sz="1300" dirty="0"/>
           </a:p>
@@ -30763,7 +30843,7 @@
                 <a:ea typeface="Inter" pitchFamily="34" charset="-122"/>
                 <a:cs typeface="Inter" pitchFamily="34" charset="-120"/>
               </a:rPr>
-              <a:t>−509</a:t>
+              <a:t>−382</a:t>
             </a:r>
             <a:endParaRPr lang="en-US" sz="1300" dirty="0"/>
           </a:p>
@@ -30939,7 +31019,7 @@
                 <a:ea typeface="Inter" pitchFamily="34" charset="-122"/>
                 <a:cs typeface="Inter" pitchFamily="34" charset="-120"/>
               </a:rPr>
-              <a:t>−$76K</a:t>
+              <a:t>−$57K</a:t>
             </a:r>
             <a:endParaRPr lang="en-US" sz="1300" dirty="0"/>
           </a:p>
@@ -30978,7 +31058,7 @@
                 <a:ea typeface="Inter" pitchFamily="34" charset="-122"/>
                 <a:cs typeface="Inter" pitchFamily="34" charset="-120"/>
               </a:rPr>
-              <a:t>−464</a:t>
+              <a:t>−348</a:t>
             </a:r>
             <a:endParaRPr lang="en-US" sz="1300" dirty="0"/>
           </a:p>
@@ -31154,7 +31234,7 @@
                 <a:ea typeface="Inter" pitchFamily="34" charset="-122"/>
                 <a:cs typeface="Inter" pitchFamily="34" charset="-120"/>
               </a:rPr>
-              <a:t>−$85K</a:t>
+              <a:t>−$63K</a:t>
             </a:r>
             <a:endParaRPr lang="en-US" sz="1300" dirty="0"/>
           </a:p>
@@ -31193,7 +31273,7 @@
                 <a:ea typeface="Inter" pitchFamily="34" charset="-122"/>
                 <a:cs typeface="Inter" pitchFamily="34" charset="-120"/>
               </a:rPr>
-              <a:t>−515</a:t>
+              <a:t>−386</a:t>
             </a:r>
             <a:endParaRPr lang="en-US" sz="1300" dirty="0"/>
           </a:p>
@@ -31389,7 +31469,7 @@
                 <a:ea typeface="Inter" pitchFamily="34" charset="-122"/>
                 <a:cs typeface="Inter" pitchFamily="34" charset="-120"/>
               </a:rPr>
-              <a:t>−$109K</a:t>
+              <a:t>−$82K</a:t>
             </a:r>
             <a:endParaRPr lang="en-US" sz="1300" dirty="0"/>
           </a:p>
@@ -31428,7 +31508,7 @@
                 <a:ea typeface="Inter" pitchFamily="34" charset="-122"/>
                 <a:cs typeface="Inter" pitchFamily="34" charset="-120"/>
               </a:rPr>
-              <a:t>−1,173</a:t>
+              <a:t>−880</a:t>
             </a:r>
             <a:endParaRPr lang="en-US" sz="1300" dirty="0"/>
           </a:p>
@@ -31604,7 +31684,7 @@
                 <a:ea typeface="Inter" pitchFamily="34" charset="-122"/>
                 <a:cs typeface="Inter" pitchFamily="34" charset="-120"/>
               </a:rPr>
-              <a:t>−$129K</a:t>
+              <a:t>−$96K</a:t>
             </a:r>
             <a:endParaRPr lang="en-US" sz="1300" dirty="0"/>
           </a:p>
@@ -31643,7 +31723,7 @@
                 <a:ea typeface="Inter" pitchFamily="34" charset="-122"/>
                 <a:cs typeface="Inter" pitchFamily="34" charset="-120"/>
               </a:rPr>
-              <a:t>−1,056</a:t>
+              <a:t>−792</a:t>
             </a:r>
             <a:endParaRPr lang="en-US" sz="1300" dirty="0"/>
           </a:p>
@@ -31819,7 +31899,7 @@
                 <a:ea typeface="Inter" pitchFamily="34" charset="-122"/>
                 <a:cs typeface="Inter" pitchFamily="34" charset="-120"/>
               </a:rPr>
-              <a:t>−$142K</a:t>
+              <a:t>−$107K</a:t>
             </a:r>
             <a:endParaRPr lang="en-US" sz="1300" dirty="0"/>
           </a:p>
@@ -31858,7 +31938,7 @@
                 <a:ea typeface="Inter" pitchFamily="34" charset="-122"/>
                 <a:cs typeface="Inter" pitchFamily="34" charset="-120"/>
               </a:rPr>
-              <a:t>−585</a:t>
+              <a:t>−439</a:t>
             </a:r>
             <a:endParaRPr lang="en-US" sz="1300" dirty="0"/>
           </a:p>
@@ -31932,7 +32012,7 @@
         <p:spPr>
           <a:xfrm>
             <a:off x="457200" y="6126480"/>
-            <a:ext cx="11274552" cy="356616"/>
+            <a:ext cx="11274552" cy="615696"/>
           </a:xfrm>
           <a:prstGeom prst="rect">
             <a:avLst/>
@@ -31952,7 +32032,7 @@
         <p:spPr>
           <a:xfrm>
             <a:off x="658368" y="6144768"/>
-            <a:ext cx="10927080" cy="320040"/>
+            <a:ext cx="10927080" cy="579120"/>
           </a:xfrm>
           <a:prstGeom prst="rect">
             <a:avLst/>
@@ -31968,7 +32048,7 @@
               <a:buNone/>
             </a:pPr>
             <a:r>
-              <a:rPr lang="en-US" sz="1500" b="1" dirty="0">
+              <a:rPr lang="en-US" sz="1600" b="1" dirty="0">
                 <a:solidFill>
                   <a:srgbClr val="A82B26"/>
                 </a:solidFill>
@@ -31976,9 +32056,9 @@
                 <a:ea typeface="Inter" pitchFamily="34" charset="-122"/>
                 <a:cs typeface="Inter" pitchFamily="34" charset="-120"/>
               </a:rPr>
-              <a:t>26 stores under 7.5% leave $1,356,881 a year; 7 are at or above it. Chevy LV is furthest below at −$142K.</a:t>
-            </a:r>
-            <a:endParaRPr lang="en-US" sz="1500" dirty="0"/>
+              <a:t>26 stores under 7.5% have left $1,017,661 so far this year; 7 are at or above it. Chevy LV is furthest below at −$107K.</a:t>
+            </a:r>
+            <a:endParaRPr lang="en-US" sz="1600" dirty="0"/>
           </a:p>
         </p:txBody>
       </p:sp>
